--- a/연구자료/260430_Linear_Logistic_Regression.pptx
+++ b/연구자료/260430_Linear_Logistic_Regression.pptx
@@ -61,11 +61,11 @@
       <p:regular r:id="rId44"/>
     </p:embeddedFont>
     <p:embeddedFont>
-      <p:font typeface="KoPub돋움체 Bold" panose="020B0600000101010101" charset="-127"/>
+      <p:font typeface="KoPub돋움체 Bold" panose="00000800000000000000" pitchFamily="2" charset="-127"/>
       <p:bold r:id="rId45"/>
     </p:embeddedFont>
     <p:embeddedFont>
-      <p:font typeface="KoPub돋움체 Medium" panose="020B0600000101010101" charset="-127"/>
+      <p:font typeface="KoPub돋움체 Medium" panose="00000600000000000000" pitchFamily="2" charset="-127"/>
       <p:regular r:id="rId46"/>
     </p:embeddedFont>
     <p:embeddedFont>
@@ -239,6 +239,87 @@
 
 <file path=ppt/changesInfos/changesInfo1.xml><?xml version="1.0" encoding="utf-8"?>
 <pc:chgInfo xmlns:a="http://schemas.openxmlformats.org/drawingml/2006/main" xmlns:r="http://schemas.openxmlformats.org/officeDocument/2006/relationships" xmlns:ac="http://schemas.microsoft.com/office/drawing/2013/main/command" xmlns:pc="http://schemas.microsoft.com/office/powerpoint/2013/main/command">
+  <pc:docChgLst>
+    <pc:chgData name="Jihun Kim" userId="2469e03939fca47a" providerId="LiveId" clId="{0EC0481E-6524-4E60-9AD2-E07F55D3906F}"/>
+    <pc:docChg chg="undo custSel modSld modMainMaster">
+      <pc:chgData name="Jihun Kim" userId="2469e03939fca47a" providerId="LiveId" clId="{0EC0481E-6524-4E60-9AD2-E07F55D3906F}" dt="2026-04-09T12:43:38.717" v="9" actId="113"/>
+      <pc:docMkLst>
+        <pc:docMk/>
+      </pc:docMkLst>
+      <pc:sldChg chg="modSp mod">
+        <pc:chgData name="Jihun Kim" userId="2469e03939fca47a" providerId="LiveId" clId="{0EC0481E-6524-4E60-9AD2-E07F55D3906F}" dt="2026-04-09T12:43:04.015" v="5" actId="2711"/>
+        <pc:sldMkLst>
+          <pc:docMk/>
+          <pc:sldMk cId="1998851532" sldId="256"/>
+        </pc:sldMkLst>
+        <pc:spChg chg="mod">
+          <ac:chgData name="Jihun Kim" userId="2469e03939fca47a" providerId="LiveId" clId="{0EC0481E-6524-4E60-9AD2-E07F55D3906F}" dt="2026-04-09T12:41:51.143" v="2" actId="207"/>
+          <ac:spMkLst>
+            <pc:docMk/>
+            <pc:sldMk cId="1998851532" sldId="256"/>
+            <ac:spMk id="4" creationId="{4C14D9A0-1BB9-428F-B273-3CE24758593B}"/>
+          </ac:spMkLst>
+        </pc:spChg>
+        <pc:spChg chg="mod">
+          <ac:chgData name="Jihun Kim" userId="2469e03939fca47a" providerId="LiveId" clId="{0EC0481E-6524-4E60-9AD2-E07F55D3906F}" dt="2026-04-09T12:42:23.172" v="3" actId="2711"/>
+          <ac:spMkLst>
+            <pc:docMk/>
+            <pc:sldMk cId="1998851532" sldId="256"/>
+            <ac:spMk id="5" creationId="{94B21C1C-F3A0-440B-961E-968F2C77FB2A}"/>
+          </ac:spMkLst>
+        </pc:spChg>
+        <pc:spChg chg="mod">
+          <ac:chgData name="Jihun Kim" userId="2469e03939fca47a" providerId="LiveId" clId="{0EC0481E-6524-4E60-9AD2-E07F55D3906F}" dt="2026-04-09T12:42:57.903" v="4" actId="2711"/>
+          <ac:spMkLst>
+            <pc:docMk/>
+            <pc:sldMk cId="1998851532" sldId="256"/>
+            <ac:spMk id="6" creationId="{63F70F93-076B-4BBC-B933-AC7768BB0AE5}"/>
+          </ac:spMkLst>
+        </pc:spChg>
+        <pc:spChg chg="mod">
+          <ac:chgData name="Jihun Kim" userId="2469e03939fca47a" providerId="LiveId" clId="{0EC0481E-6524-4E60-9AD2-E07F55D3906F}" dt="2026-04-09T12:43:04.015" v="5" actId="2711"/>
+          <ac:spMkLst>
+            <pc:docMk/>
+            <pc:sldMk cId="1998851532" sldId="256"/>
+            <ac:spMk id="7" creationId="{CEB5E8A0-083F-4B6E-AA66-93BFFD6A8E1A}"/>
+          </ac:spMkLst>
+        </pc:spChg>
+      </pc:sldChg>
+      <pc:sldMasterChg chg="modSldLayout">
+        <pc:chgData name="Jihun Kim" userId="2469e03939fca47a" providerId="LiveId" clId="{0EC0481E-6524-4E60-9AD2-E07F55D3906F}" dt="2026-04-09T12:43:38.717" v="9" actId="113"/>
+        <pc:sldMasterMkLst>
+          <pc:docMk/>
+          <pc:sldMasterMk cId="2755485914" sldId="2147483648"/>
+        </pc:sldMasterMkLst>
+        <pc:sldLayoutChg chg="modSp mod">
+          <pc:chgData name="Jihun Kim" userId="2469e03939fca47a" providerId="LiveId" clId="{0EC0481E-6524-4E60-9AD2-E07F55D3906F}" dt="2026-04-09T12:43:38.717" v="9" actId="113"/>
+          <pc:sldLayoutMkLst>
+            <pc:docMk/>
+            <pc:sldMasterMk cId="2755485914" sldId="2147483648"/>
+            <pc:sldLayoutMk cId="3176484067" sldId="2147483650"/>
+          </pc:sldLayoutMkLst>
+          <pc:spChg chg="mod">
+            <ac:chgData name="Jihun Kim" userId="2469e03939fca47a" providerId="LiveId" clId="{0EC0481E-6524-4E60-9AD2-E07F55D3906F}" dt="2026-04-09T12:43:24.420" v="6" actId="2711"/>
+            <ac:spMkLst>
+              <pc:docMk/>
+              <pc:sldMasterMk cId="2755485914" sldId="2147483648"/>
+              <pc:sldLayoutMk cId="3176484067" sldId="2147483650"/>
+              <ac:spMk id="2" creationId="{FE4F955D-C3E9-4033-8442-9095377B0662}"/>
+            </ac:spMkLst>
+          </pc:spChg>
+          <pc:spChg chg="mod">
+            <ac:chgData name="Jihun Kim" userId="2469e03939fca47a" providerId="LiveId" clId="{0EC0481E-6524-4E60-9AD2-E07F55D3906F}" dt="2026-04-09T12:43:38.717" v="9" actId="113"/>
+            <ac:spMkLst>
+              <pc:docMk/>
+              <pc:sldMasterMk cId="2755485914" sldId="2147483648"/>
+              <pc:sldLayoutMk cId="3176484067" sldId="2147483650"/>
+              <ac:spMk id="3" creationId="{9CA482F1-FC12-443E-892A-B48F9C50AA53}"/>
+            </ac:spMkLst>
+          </pc:spChg>
+        </pc:sldLayoutChg>
+      </pc:sldMasterChg>
+    </pc:docChg>
+  </pc:docChgLst>
   <pc:docChgLst>
     <pc:chgData name="janghoon jun" userId="056a5883350c2f5e" providerId="LiveId" clId="{74AFAB52-6487-4651-9B79-2F181DBD8D0A}"/>
     <pc:docChg chg="addSld delSld modSld sldOrd">
@@ -980,87 +1061,6 @@
           <pc:sldMk cId="3506109384" sldId="437"/>
         </pc:sldMkLst>
       </pc:sldChg>
-    </pc:docChg>
-  </pc:docChgLst>
-  <pc:docChgLst>
-    <pc:chgData name="Jihun Kim" userId="2469e03939fca47a" providerId="LiveId" clId="{0EC0481E-6524-4E60-9AD2-E07F55D3906F}"/>
-    <pc:docChg chg="undo custSel modSld modMainMaster">
-      <pc:chgData name="Jihun Kim" userId="2469e03939fca47a" providerId="LiveId" clId="{0EC0481E-6524-4E60-9AD2-E07F55D3906F}" dt="2026-04-09T12:43:38.717" v="9" actId="113"/>
-      <pc:docMkLst>
-        <pc:docMk/>
-      </pc:docMkLst>
-      <pc:sldChg chg="modSp mod">
-        <pc:chgData name="Jihun Kim" userId="2469e03939fca47a" providerId="LiveId" clId="{0EC0481E-6524-4E60-9AD2-E07F55D3906F}" dt="2026-04-09T12:43:04.015" v="5" actId="2711"/>
-        <pc:sldMkLst>
-          <pc:docMk/>
-          <pc:sldMk cId="1998851532" sldId="256"/>
-        </pc:sldMkLst>
-        <pc:spChg chg="mod">
-          <ac:chgData name="Jihun Kim" userId="2469e03939fca47a" providerId="LiveId" clId="{0EC0481E-6524-4E60-9AD2-E07F55D3906F}" dt="2026-04-09T12:41:51.143" v="2" actId="207"/>
-          <ac:spMkLst>
-            <pc:docMk/>
-            <pc:sldMk cId="1998851532" sldId="256"/>
-            <ac:spMk id="4" creationId="{4C14D9A0-1BB9-428F-B273-3CE24758593B}"/>
-          </ac:spMkLst>
-        </pc:spChg>
-        <pc:spChg chg="mod">
-          <ac:chgData name="Jihun Kim" userId="2469e03939fca47a" providerId="LiveId" clId="{0EC0481E-6524-4E60-9AD2-E07F55D3906F}" dt="2026-04-09T12:42:23.172" v="3" actId="2711"/>
-          <ac:spMkLst>
-            <pc:docMk/>
-            <pc:sldMk cId="1998851532" sldId="256"/>
-            <ac:spMk id="5" creationId="{94B21C1C-F3A0-440B-961E-968F2C77FB2A}"/>
-          </ac:spMkLst>
-        </pc:spChg>
-        <pc:spChg chg="mod">
-          <ac:chgData name="Jihun Kim" userId="2469e03939fca47a" providerId="LiveId" clId="{0EC0481E-6524-4E60-9AD2-E07F55D3906F}" dt="2026-04-09T12:42:57.903" v="4" actId="2711"/>
-          <ac:spMkLst>
-            <pc:docMk/>
-            <pc:sldMk cId="1998851532" sldId="256"/>
-            <ac:spMk id="6" creationId="{63F70F93-076B-4BBC-B933-AC7768BB0AE5}"/>
-          </ac:spMkLst>
-        </pc:spChg>
-        <pc:spChg chg="mod">
-          <ac:chgData name="Jihun Kim" userId="2469e03939fca47a" providerId="LiveId" clId="{0EC0481E-6524-4E60-9AD2-E07F55D3906F}" dt="2026-04-09T12:43:04.015" v="5" actId="2711"/>
-          <ac:spMkLst>
-            <pc:docMk/>
-            <pc:sldMk cId="1998851532" sldId="256"/>
-            <ac:spMk id="7" creationId="{CEB5E8A0-083F-4B6E-AA66-93BFFD6A8E1A}"/>
-          </ac:spMkLst>
-        </pc:spChg>
-      </pc:sldChg>
-      <pc:sldMasterChg chg="modSldLayout">
-        <pc:chgData name="Jihun Kim" userId="2469e03939fca47a" providerId="LiveId" clId="{0EC0481E-6524-4E60-9AD2-E07F55D3906F}" dt="2026-04-09T12:43:38.717" v="9" actId="113"/>
-        <pc:sldMasterMkLst>
-          <pc:docMk/>
-          <pc:sldMasterMk cId="2755485914" sldId="2147483648"/>
-        </pc:sldMasterMkLst>
-        <pc:sldLayoutChg chg="modSp mod">
-          <pc:chgData name="Jihun Kim" userId="2469e03939fca47a" providerId="LiveId" clId="{0EC0481E-6524-4E60-9AD2-E07F55D3906F}" dt="2026-04-09T12:43:38.717" v="9" actId="113"/>
-          <pc:sldLayoutMkLst>
-            <pc:docMk/>
-            <pc:sldMasterMk cId="2755485914" sldId="2147483648"/>
-            <pc:sldLayoutMk cId="3176484067" sldId="2147483650"/>
-          </pc:sldLayoutMkLst>
-          <pc:spChg chg="mod">
-            <ac:chgData name="Jihun Kim" userId="2469e03939fca47a" providerId="LiveId" clId="{0EC0481E-6524-4E60-9AD2-E07F55D3906F}" dt="2026-04-09T12:43:24.420" v="6" actId="2711"/>
-            <ac:spMkLst>
-              <pc:docMk/>
-              <pc:sldMasterMk cId="2755485914" sldId="2147483648"/>
-              <pc:sldLayoutMk cId="3176484067" sldId="2147483650"/>
-              <ac:spMk id="2" creationId="{FE4F955D-C3E9-4033-8442-9095377B0662}"/>
-            </ac:spMkLst>
-          </pc:spChg>
-          <pc:spChg chg="mod">
-            <ac:chgData name="Jihun Kim" userId="2469e03939fca47a" providerId="LiveId" clId="{0EC0481E-6524-4E60-9AD2-E07F55D3906F}" dt="2026-04-09T12:43:38.717" v="9" actId="113"/>
-            <ac:spMkLst>
-              <pc:docMk/>
-              <pc:sldMasterMk cId="2755485914" sldId="2147483648"/>
-              <pc:sldLayoutMk cId="3176484067" sldId="2147483650"/>
-              <ac:spMk id="3" creationId="{9CA482F1-FC12-443E-892A-B48F9C50AA53}"/>
-            </ac:spMkLst>
-          </pc:spChg>
-        </pc:sldLayoutChg>
-      </pc:sldMasterChg>
     </pc:docChg>
   </pc:docChgLst>
 </pc:chgInfo>
@@ -30406,6 +30406,85 @@
             </a:r>
           </a:p>
           <a:p>
+            <a:pPr lvl="1"/>
+            <a:r>
+              <a:rPr lang="en-US" altLang="ko-KR" dirty="0"/>
+              <a:t>Case1 [</a:t>
+            </a:r>
+            <a:r>
+              <a:rPr lang="ko-KR" altLang="en-US" dirty="0"/>
+              <a:t>성별</a:t>
+            </a:r>
+            <a:r>
+              <a:rPr lang="en-US" altLang="ko-KR" dirty="0"/>
+              <a:t>, </a:t>
+            </a:r>
+            <a:r>
+              <a:rPr lang="ko-KR" altLang="en-US" dirty="0"/>
+              <a:t>나이</a:t>
+            </a:r>
+            <a:r>
+              <a:rPr lang="en-US" altLang="ko-KR" dirty="0"/>
+              <a:t>, BMI], Case2 [+AEC features], Case3 [+</a:t>
+            </a:r>
+            <a:r>
+              <a:rPr lang="ko-KR" altLang="en-US" dirty="0"/>
+              <a:t>모델명</a:t>
+            </a:r>
+            <a:r>
+              <a:rPr lang="en-US" altLang="ko-KR" dirty="0"/>
+              <a:t>, </a:t>
+            </a:r>
+            <a:r>
+              <a:rPr lang="en-US" altLang="ko-KR" dirty="0" err="1"/>
+              <a:t>kVp</a:t>
+            </a:r>
+            <a:r>
+              <a:rPr lang="en-US" altLang="ko-KR" dirty="0"/>
+              <a:t>]</a:t>
+            </a:r>
+          </a:p>
+          <a:p>
+            <a:pPr lvl="1"/>
+            <a:r>
+              <a:rPr lang="en-US" altLang="ko-KR" dirty="0"/>
+              <a:t>AEC features</a:t>
+            </a:r>
+            <a:r>
+              <a:rPr lang="ko-KR" altLang="en-US" dirty="0"/>
+              <a:t>의 경우 이전 연구에 사용되었던 </a:t>
+            </a:r>
+            <a:r>
+              <a:rPr lang="en-US" altLang="ko-KR" dirty="0"/>
+              <a:t>[mean, CV, skewness, </a:t>
+            </a:r>
+            <a:r>
+              <a:rPr lang="en-US" altLang="ko-KR" dirty="0" err="1"/>
+              <a:t>slope_abs_mean</a:t>
+            </a:r>
+            <a:r>
+              <a:rPr lang="en-US" altLang="ko-KR" dirty="0"/>
+              <a:t>]</a:t>
+            </a:r>
+            <a:r>
+              <a:rPr lang="ko-KR" altLang="en-US" dirty="0"/>
+              <a:t>과 새로운 </a:t>
+            </a:r>
+            <a:r>
+              <a:rPr lang="en-US" altLang="ko-KR" dirty="0"/>
+              <a:t>features 9</a:t>
+            </a:r>
+            <a:r>
+              <a:rPr lang="ko-KR" altLang="en-US" dirty="0"/>
+              <a:t>개를 모두 확인하고 성능 비교</a:t>
+            </a:r>
+            <a:endParaRPr lang="en-US" altLang="ko-KR" dirty="0"/>
+          </a:p>
+          <a:p>
+            <a:pPr lvl="1"/>
+            <a:endParaRPr lang="en-US" altLang="ko-KR" dirty="0"/>
+          </a:p>
+          <a:p>
             <a:endParaRPr lang="en-US" altLang="ko-KR" dirty="0"/>
           </a:p>
         </p:txBody>

--- a/연구자료/260430_Linear_Logistic_Regression.pptx
+++ b/연구자료/260430_Linear_Logistic_Regression.pptx
@@ -5,7 +5,7 @@
     <p:sldMasterId id="2147483648" r:id="rId1"/>
   </p:sldMasterIdLst>
   <p:notesMasterIdLst>
-    <p:notesMasterId r:id="rId42"/>
+    <p:notesMasterId r:id="rId44"/>
   </p:notesMasterIdLst>
   <p:sldIdLst>
     <p:sldId id="256" r:id="rId2"/>
@@ -23,55 +23,57 @@
     <p:sldId id="425" r:id="rId14"/>
     <p:sldId id="426" r:id="rId15"/>
     <p:sldId id="369" r:id="rId16"/>
-    <p:sldId id="355" r:id="rId17"/>
-    <p:sldId id="417" r:id="rId18"/>
-    <p:sldId id="427" r:id="rId19"/>
-    <p:sldId id="429" r:id="rId20"/>
-    <p:sldId id="397" r:id="rId21"/>
-    <p:sldId id="398" r:id="rId22"/>
-    <p:sldId id="390" r:id="rId23"/>
-    <p:sldId id="391" r:id="rId24"/>
-    <p:sldId id="419" r:id="rId25"/>
-    <p:sldId id="430" r:id="rId26"/>
-    <p:sldId id="431" r:id="rId27"/>
-    <p:sldId id="420" r:id="rId28"/>
-    <p:sldId id="421" r:id="rId29"/>
-    <p:sldId id="384" r:id="rId30"/>
-    <p:sldId id="422" r:id="rId31"/>
-    <p:sldId id="432" r:id="rId32"/>
-    <p:sldId id="433" r:id="rId33"/>
-    <p:sldId id="423" r:id="rId34"/>
-    <p:sldId id="405" r:id="rId35"/>
-    <p:sldId id="434" r:id="rId36"/>
-    <p:sldId id="435" r:id="rId37"/>
-    <p:sldId id="436" r:id="rId38"/>
-    <p:sldId id="437" r:id="rId39"/>
-    <p:sldId id="399" r:id="rId40"/>
-    <p:sldId id="345" r:id="rId41"/>
+    <p:sldId id="438" r:id="rId17"/>
+    <p:sldId id="439" r:id="rId18"/>
+    <p:sldId id="355" r:id="rId19"/>
+    <p:sldId id="417" r:id="rId20"/>
+    <p:sldId id="427" r:id="rId21"/>
+    <p:sldId id="429" r:id="rId22"/>
+    <p:sldId id="397" r:id="rId23"/>
+    <p:sldId id="398" r:id="rId24"/>
+    <p:sldId id="390" r:id="rId25"/>
+    <p:sldId id="391" r:id="rId26"/>
+    <p:sldId id="419" r:id="rId27"/>
+    <p:sldId id="430" r:id="rId28"/>
+    <p:sldId id="431" r:id="rId29"/>
+    <p:sldId id="420" r:id="rId30"/>
+    <p:sldId id="421" r:id="rId31"/>
+    <p:sldId id="384" r:id="rId32"/>
+    <p:sldId id="422" r:id="rId33"/>
+    <p:sldId id="432" r:id="rId34"/>
+    <p:sldId id="433" r:id="rId35"/>
+    <p:sldId id="423" r:id="rId36"/>
+    <p:sldId id="405" r:id="rId37"/>
+    <p:sldId id="434" r:id="rId38"/>
+    <p:sldId id="435" r:id="rId39"/>
+    <p:sldId id="436" r:id="rId40"/>
+    <p:sldId id="437" r:id="rId41"/>
+    <p:sldId id="399" r:id="rId42"/>
+    <p:sldId id="345" r:id="rId43"/>
   </p:sldIdLst>
   <p:sldSz cx="12192000" cy="6858000"/>
   <p:notesSz cx="6858000" cy="9144000"/>
   <p:embeddedFontLst>
     <p:embeddedFont>
       <p:font typeface="KoPubWorld돋움체 Bold" panose="020B0600000101010101" charset="-127"/>
-      <p:bold r:id="rId43"/>
+      <p:bold r:id="rId45"/>
     </p:embeddedFont>
     <p:embeddedFont>
       <p:font typeface="KoPubWorld돋움체 Medium" panose="020B0600000101010101" charset="-127"/>
-      <p:regular r:id="rId44"/>
+      <p:regular r:id="rId46"/>
     </p:embeddedFont>
     <p:embeddedFont>
       <p:font typeface="KoPub돋움체 Bold" panose="00000800000000000000" pitchFamily="2" charset="-127"/>
-      <p:bold r:id="rId45"/>
+      <p:bold r:id="rId47"/>
     </p:embeddedFont>
     <p:embeddedFont>
       <p:font typeface="KoPub돋움체 Medium" panose="00000600000000000000" pitchFamily="2" charset="-127"/>
-      <p:regular r:id="rId46"/>
+      <p:regular r:id="rId48"/>
     </p:embeddedFont>
     <p:embeddedFont>
       <p:font typeface="맑은 고딕" panose="020B0503020000020004" pitchFamily="50" charset="-127"/>
-      <p:regular r:id="rId47"/>
-      <p:bold r:id="rId48"/>
+      <p:regular r:id="rId49"/>
+      <p:bold r:id="rId50"/>
     </p:embeddedFont>
   </p:embeddedFontLst>
   <p:defaultTextStyle>
@@ -189,6 +191,8 @@
             <p14:sldId id="425"/>
             <p14:sldId id="426"/>
             <p14:sldId id="369"/>
+            <p14:sldId id="438"/>
+            <p14:sldId id="439"/>
             <p14:sldId id="355"/>
             <p14:sldId id="417"/>
             <p14:sldId id="427"/>
@@ -237,96 +241,38 @@
 </p:cmAuthorLst>
 </file>
 
+<file path=ppt/revisionInfo.xml><?xml version="1.0" encoding="utf-8"?>
+<p1510:revInfo xmlns:a="http://schemas.openxmlformats.org/drawingml/2006/main" xmlns:r="http://schemas.openxmlformats.org/officeDocument/2006/relationships" xmlns:p1510="http://schemas.microsoft.com/office/powerpoint/2015/10/main">
+  <p1510:revLst>
+    <p1510:client id="{59280094-6966-4D40-B0D2-C3AF0E296DD5}" v="9" dt="2026-04-29T00:58:34.506"/>
+  </p1510:revLst>
+</p1510:revInfo>
+</file>
+
 <file path=ppt/changesInfos/changesInfo1.xml><?xml version="1.0" encoding="utf-8"?>
 <pc:chgInfo xmlns:a="http://schemas.openxmlformats.org/drawingml/2006/main" xmlns:r="http://schemas.openxmlformats.org/officeDocument/2006/relationships" xmlns:ac="http://schemas.microsoft.com/office/drawing/2013/main/command" xmlns:pc="http://schemas.microsoft.com/office/powerpoint/2013/main/command">
   <pc:docChgLst>
-    <pc:chgData name="Jihun Kim" userId="2469e03939fca47a" providerId="LiveId" clId="{0EC0481E-6524-4E60-9AD2-E07F55D3906F}"/>
-    <pc:docChg chg="undo custSel modSld modMainMaster">
-      <pc:chgData name="Jihun Kim" userId="2469e03939fca47a" providerId="LiveId" clId="{0EC0481E-6524-4E60-9AD2-E07F55D3906F}" dt="2026-04-09T12:43:38.717" v="9" actId="113"/>
+    <pc:chgData name="janghoon jun" userId="056a5883350c2f5e" providerId="LiveId" clId="{74AFAB52-6487-4651-9B79-2F181DBD8D0A}"/>
+    <pc:docChg chg="undo custSel addSld delSld modSld sldOrd">
+      <pc:chgData name="janghoon jun" userId="056a5883350c2f5e" providerId="LiveId" clId="{74AFAB52-6487-4651-9B79-2F181DBD8D0A}" dt="2026-04-29T01:39:44.323" v="1131" actId="478"/>
       <pc:docMkLst>
         <pc:docMk/>
       </pc:docMkLst>
       <pc:sldChg chg="modSp mod">
-        <pc:chgData name="Jihun Kim" userId="2469e03939fca47a" providerId="LiveId" clId="{0EC0481E-6524-4E60-9AD2-E07F55D3906F}" dt="2026-04-09T12:43:04.015" v="5" actId="2711"/>
+        <pc:chgData name="janghoon jun" userId="056a5883350c2f5e" providerId="LiveId" clId="{74AFAB52-6487-4651-9B79-2F181DBD8D0A}" dt="2026-04-29T00:52:38.595" v="540" actId="20577"/>
         <pc:sldMkLst>
           <pc:docMk/>
-          <pc:sldMk cId="1998851532" sldId="256"/>
+          <pc:sldMk cId="3808511553" sldId="258"/>
         </pc:sldMkLst>
         <pc:spChg chg="mod">
-          <ac:chgData name="Jihun Kim" userId="2469e03939fca47a" providerId="LiveId" clId="{0EC0481E-6524-4E60-9AD2-E07F55D3906F}" dt="2026-04-09T12:41:51.143" v="2" actId="207"/>
+          <ac:chgData name="janghoon jun" userId="056a5883350c2f5e" providerId="LiveId" clId="{74AFAB52-6487-4651-9B79-2F181DBD8D0A}" dt="2026-04-29T00:52:38.595" v="540" actId="20577"/>
           <ac:spMkLst>
             <pc:docMk/>
-            <pc:sldMk cId="1998851532" sldId="256"/>
-            <ac:spMk id="4" creationId="{4C14D9A0-1BB9-428F-B273-3CE24758593B}"/>
-          </ac:spMkLst>
-        </pc:spChg>
-        <pc:spChg chg="mod">
-          <ac:chgData name="Jihun Kim" userId="2469e03939fca47a" providerId="LiveId" clId="{0EC0481E-6524-4E60-9AD2-E07F55D3906F}" dt="2026-04-09T12:42:23.172" v="3" actId="2711"/>
-          <ac:spMkLst>
-            <pc:docMk/>
-            <pc:sldMk cId="1998851532" sldId="256"/>
-            <ac:spMk id="5" creationId="{94B21C1C-F3A0-440B-961E-968F2C77FB2A}"/>
-          </ac:spMkLst>
-        </pc:spChg>
-        <pc:spChg chg="mod">
-          <ac:chgData name="Jihun Kim" userId="2469e03939fca47a" providerId="LiveId" clId="{0EC0481E-6524-4E60-9AD2-E07F55D3906F}" dt="2026-04-09T12:42:57.903" v="4" actId="2711"/>
-          <ac:spMkLst>
-            <pc:docMk/>
-            <pc:sldMk cId="1998851532" sldId="256"/>
-            <ac:spMk id="6" creationId="{63F70F93-076B-4BBC-B933-AC7768BB0AE5}"/>
-          </ac:spMkLst>
-        </pc:spChg>
-        <pc:spChg chg="mod">
-          <ac:chgData name="Jihun Kim" userId="2469e03939fca47a" providerId="LiveId" clId="{0EC0481E-6524-4E60-9AD2-E07F55D3906F}" dt="2026-04-09T12:43:04.015" v="5" actId="2711"/>
-          <ac:spMkLst>
-            <pc:docMk/>
-            <pc:sldMk cId="1998851532" sldId="256"/>
-            <ac:spMk id="7" creationId="{CEB5E8A0-083F-4B6E-AA66-93BFFD6A8E1A}"/>
+            <pc:sldMk cId="3808511553" sldId="258"/>
+            <ac:spMk id="3" creationId="{A84C152F-6AC6-4EBB-8679-327588602FD5}"/>
           </ac:spMkLst>
         </pc:spChg>
       </pc:sldChg>
-      <pc:sldMasterChg chg="modSldLayout">
-        <pc:chgData name="Jihun Kim" userId="2469e03939fca47a" providerId="LiveId" clId="{0EC0481E-6524-4E60-9AD2-E07F55D3906F}" dt="2026-04-09T12:43:38.717" v="9" actId="113"/>
-        <pc:sldMasterMkLst>
-          <pc:docMk/>
-          <pc:sldMasterMk cId="2755485914" sldId="2147483648"/>
-        </pc:sldMasterMkLst>
-        <pc:sldLayoutChg chg="modSp mod">
-          <pc:chgData name="Jihun Kim" userId="2469e03939fca47a" providerId="LiveId" clId="{0EC0481E-6524-4E60-9AD2-E07F55D3906F}" dt="2026-04-09T12:43:38.717" v="9" actId="113"/>
-          <pc:sldLayoutMkLst>
-            <pc:docMk/>
-            <pc:sldMasterMk cId="2755485914" sldId="2147483648"/>
-            <pc:sldLayoutMk cId="3176484067" sldId="2147483650"/>
-          </pc:sldLayoutMkLst>
-          <pc:spChg chg="mod">
-            <ac:chgData name="Jihun Kim" userId="2469e03939fca47a" providerId="LiveId" clId="{0EC0481E-6524-4E60-9AD2-E07F55D3906F}" dt="2026-04-09T12:43:24.420" v="6" actId="2711"/>
-            <ac:spMkLst>
-              <pc:docMk/>
-              <pc:sldMasterMk cId="2755485914" sldId="2147483648"/>
-              <pc:sldLayoutMk cId="3176484067" sldId="2147483650"/>
-              <ac:spMk id="2" creationId="{FE4F955D-C3E9-4033-8442-9095377B0662}"/>
-            </ac:spMkLst>
-          </pc:spChg>
-          <pc:spChg chg="mod">
-            <ac:chgData name="Jihun Kim" userId="2469e03939fca47a" providerId="LiveId" clId="{0EC0481E-6524-4E60-9AD2-E07F55D3906F}" dt="2026-04-09T12:43:38.717" v="9" actId="113"/>
-            <ac:spMkLst>
-              <pc:docMk/>
-              <pc:sldMasterMk cId="2755485914" sldId="2147483648"/>
-              <pc:sldLayoutMk cId="3176484067" sldId="2147483650"/>
-              <ac:spMk id="3" creationId="{9CA482F1-FC12-443E-892A-B48F9C50AA53}"/>
-            </ac:spMkLst>
-          </pc:spChg>
-        </pc:sldLayoutChg>
-      </pc:sldMasterChg>
-    </pc:docChg>
-  </pc:docChgLst>
-  <pc:docChgLst>
-    <pc:chgData name="janghoon jun" userId="056a5883350c2f5e" providerId="LiveId" clId="{74AFAB52-6487-4651-9B79-2F181DBD8D0A}"/>
-    <pc:docChg chg="addSld delSld modSld sldOrd">
-      <pc:chgData name="janghoon jun" userId="056a5883350c2f5e" providerId="LiveId" clId="{74AFAB52-6487-4651-9B79-2F181DBD8D0A}" dt="2026-04-23T06:03:44.517" v="116"/>
-      <pc:docMkLst>
-        <pc:docMk/>
-      </pc:docMkLst>
       <pc:sldChg chg="modSp">
         <pc:chgData name="janghoon jun" userId="056a5883350c2f5e" providerId="LiveId" clId="{74AFAB52-6487-4651-9B79-2F181DBD8D0A}" dt="2026-04-23T04:33:29.886" v="1"/>
         <pc:sldMkLst>
@@ -339,6 +285,53 @@
             <pc:docMk/>
             <pc:sldMk cId="3042847678" sldId="355"/>
             <ac:graphicFrameMk id="8" creationId="{3649AB2B-068A-41A4-9569-D888FFBE35F3}"/>
+          </ac:graphicFrameMkLst>
+        </pc:graphicFrameChg>
+      </pc:sldChg>
+      <pc:sldChg chg="modSp mod">
+        <pc:chgData name="janghoon jun" userId="056a5883350c2f5e" providerId="LiveId" clId="{74AFAB52-6487-4651-9B79-2F181DBD8D0A}" dt="2026-04-29T01:29:47.884" v="1057" actId="20577"/>
+        <pc:sldMkLst>
+          <pc:docMk/>
+          <pc:sldMk cId="566521264" sldId="383"/>
+        </pc:sldMkLst>
+        <pc:spChg chg="mod">
+          <ac:chgData name="janghoon jun" userId="056a5883350c2f5e" providerId="LiveId" clId="{74AFAB52-6487-4651-9B79-2F181DBD8D0A}" dt="2026-04-29T01:24:32.544" v="1012" actId="20577"/>
+          <ac:spMkLst>
+            <pc:docMk/>
+            <pc:sldMk cId="566521264" sldId="383"/>
+            <ac:spMk id="41" creationId="{FA0E5E16-BED6-4786-BA12-4B9DA00E5C69}"/>
+          </ac:spMkLst>
+        </pc:spChg>
+        <pc:spChg chg="mod">
+          <ac:chgData name="janghoon jun" userId="056a5883350c2f5e" providerId="LiveId" clId="{74AFAB52-6487-4651-9B79-2F181DBD8D0A}" dt="2026-04-29T01:25:14.384" v="1039" actId="20577"/>
+          <ac:spMkLst>
+            <pc:docMk/>
+            <pc:sldMk cId="566521264" sldId="383"/>
+            <ac:spMk id="44" creationId="{43CA52CD-5E1B-4300-A6A1-8E0FB8D87ABE}"/>
+          </ac:spMkLst>
+        </pc:spChg>
+        <pc:spChg chg="mod">
+          <ac:chgData name="janghoon jun" userId="056a5883350c2f5e" providerId="LiveId" clId="{74AFAB52-6487-4651-9B79-2F181DBD8D0A}" dt="2026-04-29T01:25:24.398" v="1043" actId="20577"/>
+          <ac:spMkLst>
+            <pc:docMk/>
+            <pc:sldMk cId="566521264" sldId="383"/>
+            <ac:spMk id="47" creationId="{DD5D9754-A87E-43AF-A4C5-5CF4B1571F89}"/>
+          </ac:spMkLst>
+        </pc:spChg>
+        <pc:spChg chg="mod">
+          <ac:chgData name="janghoon jun" userId="056a5883350c2f5e" providerId="LiveId" clId="{74AFAB52-6487-4651-9B79-2F181DBD8D0A}" dt="2026-04-29T01:29:47.884" v="1057" actId="20577"/>
+          <ac:spMkLst>
+            <pc:docMk/>
+            <pc:sldMk cId="566521264" sldId="383"/>
+            <ac:spMk id="61" creationId="{F8B5CF73-5AD1-47BB-9047-4C29B1832002}"/>
+          </ac:spMkLst>
+        </pc:spChg>
+        <pc:graphicFrameChg chg="modGraphic">
+          <ac:chgData name="janghoon jun" userId="056a5883350c2f5e" providerId="LiveId" clId="{74AFAB52-6487-4651-9B79-2F181DBD8D0A}" dt="2026-04-29T01:24:53.790" v="1035" actId="20577"/>
+          <ac:graphicFrameMkLst>
+            <pc:docMk/>
+            <pc:sldMk cId="566521264" sldId="383"/>
+            <ac:graphicFrameMk id="58" creationId="{482DE016-3F1C-4650-8969-98555872D4F0}"/>
           </ac:graphicFrameMkLst>
         </pc:graphicFrameChg>
       </pc:sldChg>
@@ -459,14 +452,14 @@
           </ac:graphicFrameMkLst>
         </pc:graphicFrameChg>
       </pc:sldChg>
-      <pc:sldChg chg="modSp ord">
-        <pc:chgData name="janghoon jun" userId="056a5883350c2f5e" providerId="LiveId" clId="{74AFAB52-6487-4651-9B79-2F181DBD8D0A}" dt="2026-04-23T05:19:05.503" v="51"/>
+      <pc:sldChg chg="modSp mod ord">
+        <pc:chgData name="janghoon jun" userId="056a5883350c2f5e" providerId="LiveId" clId="{74AFAB52-6487-4651-9B79-2F181DBD8D0A}" dt="2026-04-29T01:36:00.416" v="1112" actId="6549"/>
         <pc:sldMkLst>
           <pc:docMk/>
           <pc:sldMk cId="1327445754" sldId="403"/>
         </pc:sldMkLst>
         <pc:spChg chg="mod">
-          <ac:chgData name="janghoon jun" userId="056a5883350c2f5e" providerId="LiveId" clId="{74AFAB52-6487-4651-9B79-2F181DBD8D0A}" dt="2026-04-23T05:19:05.503" v="51"/>
+          <ac:chgData name="janghoon jun" userId="056a5883350c2f5e" providerId="LiveId" clId="{74AFAB52-6487-4651-9B79-2F181DBD8D0A}" dt="2026-04-29T01:36:00.416" v="1112" actId="6549"/>
           <ac:spMkLst>
             <pc:docMk/>
             <pc:sldMk cId="1327445754" sldId="403"/>
@@ -474,18 +467,42 @@
           </ac:spMkLst>
         </pc:spChg>
       </pc:sldChg>
-      <pc:sldChg chg="addSp ord">
-        <pc:chgData name="janghoon jun" userId="056a5883350c2f5e" providerId="LiveId" clId="{74AFAB52-6487-4651-9B79-2F181DBD8D0A}" dt="2026-04-23T05:18:42.085" v="49"/>
+      <pc:sldChg chg="addSp delSp modSp mod ord">
+        <pc:chgData name="janghoon jun" userId="056a5883350c2f5e" providerId="LiveId" clId="{74AFAB52-6487-4651-9B79-2F181DBD8D0A}" dt="2026-04-29T01:39:44.323" v="1131" actId="478"/>
         <pc:sldMkLst>
           <pc:docMk/>
           <pc:sldMk cId="79559792" sldId="404"/>
         </pc:sldMkLst>
-        <pc:picChg chg="add">
-          <ac:chgData name="janghoon jun" userId="056a5883350c2f5e" providerId="LiveId" clId="{74AFAB52-6487-4651-9B79-2F181DBD8D0A}" dt="2026-04-23T05:16:07.774" v="43"/>
+        <pc:picChg chg="add del">
+          <ac:chgData name="janghoon jun" userId="056a5883350c2f5e" providerId="LiveId" clId="{74AFAB52-6487-4651-9B79-2F181DBD8D0A}" dt="2026-04-29T01:39:14.961" v="1124" actId="478"/>
+          <ac:picMkLst>
+            <pc:docMk/>
+            <pc:sldMk cId="79559792" sldId="404"/>
+            <ac:picMk id="5" creationId="{0D09B646-F084-4AEA-BEEF-1A6E6900AD82}"/>
+          </ac:picMkLst>
+        </pc:picChg>
+        <pc:picChg chg="add del">
+          <ac:chgData name="janghoon jun" userId="056a5883350c2f5e" providerId="LiveId" clId="{74AFAB52-6487-4651-9B79-2F181DBD8D0A}" dt="2026-04-29T01:39:15.555" v="1125" actId="478"/>
           <ac:picMkLst>
             <pc:docMk/>
             <pc:sldMk cId="79559792" sldId="404"/>
             <ac:picMk id="6" creationId="{E0F76B1F-ACFD-F8B9-7EB7-7F91F47F3EB9}"/>
+          </ac:picMkLst>
+        </pc:picChg>
+        <pc:picChg chg="add mod ord">
+          <ac:chgData name="janghoon jun" userId="056a5883350c2f5e" providerId="LiveId" clId="{74AFAB52-6487-4651-9B79-2F181DBD8D0A}" dt="2026-04-29T01:39:13.256" v="1123" actId="167"/>
+          <ac:picMkLst>
+            <pc:docMk/>
+            <pc:sldMk cId="79559792" sldId="404"/>
+            <ac:picMk id="7" creationId="{589A79D3-6C6E-4C9C-5192-74A2A746330D}"/>
+          </ac:picMkLst>
+        </pc:picChg>
+        <pc:picChg chg="add del mod">
+          <ac:chgData name="janghoon jun" userId="056a5883350c2f5e" providerId="LiveId" clId="{74AFAB52-6487-4651-9B79-2F181DBD8D0A}" dt="2026-04-29T01:39:44.323" v="1131" actId="478"/>
+          <ac:picMkLst>
+            <pc:docMk/>
+            <pc:sldMk cId="79559792" sldId="404"/>
+            <ac:picMk id="10" creationId="{7DA4E8E9-B57F-6CE5-8D2E-7AAD5ABC9D0E}"/>
           </ac:picMkLst>
         </pc:picChg>
       </pc:sldChg>
@@ -754,14 +771,14 @@
           </ac:graphicFrameMkLst>
         </pc:graphicFrameChg>
       </pc:sldChg>
-      <pc:sldChg chg="modSp add">
-        <pc:chgData name="janghoon jun" userId="056a5883350c2f5e" providerId="LiveId" clId="{74AFAB52-6487-4651-9B79-2F181DBD8D0A}" dt="2026-04-23T05:08:28.471" v="37"/>
+      <pc:sldChg chg="modSp add mod">
+        <pc:chgData name="janghoon jun" userId="056a5883350c2f5e" providerId="LiveId" clId="{74AFAB52-6487-4651-9B79-2F181DBD8D0A}" dt="2026-04-29T01:32:34.711" v="1071" actId="20577"/>
         <pc:sldMkLst>
           <pc:docMk/>
           <pc:sldMk cId="1183344318" sldId="424"/>
         </pc:sldMkLst>
         <pc:spChg chg="mod">
-          <ac:chgData name="janghoon jun" userId="056a5883350c2f5e" providerId="LiveId" clId="{74AFAB52-6487-4651-9B79-2F181DBD8D0A}" dt="2026-04-23T05:06:52.319" v="30"/>
+          <ac:chgData name="janghoon jun" userId="056a5883350c2f5e" providerId="LiveId" clId="{74AFAB52-6487-4651-9B79-2F181DBD8D0A}" dt="2026-04-29T01:32:32.495" v="1069" actId="20577"/>
           <ac:spMkLst>
             <pc:docMk/>
             <pc:sldMk cId="1183344318" sldId="424"/>
@@ -769,7 +786,7 @@
           </ac:spMkLst>
         </pc:spChg>
         <pc:spChg chg="mod">
-          <ac:chgData name="janghoon jun" userId="056a5883350c2f5e" providerId="LiveId" clId="{74AFAB52-6487-4651-9B79-2F181DBD8D0A}" dt="2026-04-23T05:06:57.396" v="31"/>
+          <ac:chgData name="janghoon jun" userId="056a5883350c2f5e" providerId="LiveId" clId="{74AFAB52-6487-4651-9B79-2F181DBD8D0A}" dt="2026-04-29T01:32:34.711" v="1071" actId="20577"/>
           <ac:spMkLst>
             <pc:docMk/>
             <pc:sldMk cId="1183344318" sldId="424"/>
@@ -801,15 +818,15 @@
           </ac:spMkLst>
         </pc:spChg>
         <pc:spChg chg="mod">
-          <ac:chgData name="janghoon jun" userId="056a5883350c2f5e" providerId="LiveId" clId="{74AFAB52-6487-4651-9B79-2F181DBD8D0A}" dt="2026-04-23T05:08:28.471" v="37"/>
+          <ac:chgData name="janghoon jun" userId="056a5883350c2f5e" providerId="LiveId" clId="{74AFAB52-6487-4651-9B79-2F181DBD8D0A}" dt="2026-04-29T01:31:34.994" v="1063" actId="20577"/>
           <ac:spMkLst>
             <pc:docMk/>
             <pc:sldMk cId="1183344318" sldId="424"/>
             <ac:spMk id="61" creationId="{6D2F29C0-3430-B09B-78DB-3454E73F31E6}"/>
           </ac:spMkLst>
         </pc:spChg>
-        <pc:graphicFrameChg chg="mod">
-          <ac:chgData name="janghoon jun" userId="056a5883350c2f5e" providerId="LiveId" clId="{74AFAB52-6487-4651-9B79-2F181DBD8D0A}" dt="2026-04-23T05:07:50.392" v="35"/>
+        <pc:graphicFrameChg chg="mod modGraphic">
+          <ac:chgData name="janghoon jun" userId="056a5883350c2f5e" providerId="LiveId" clId="{74AFAB52-6487-4651-9B79-2F181DBD8D0A}" dt="2026-04-29T01:32:30.040" v="1067" actId="20577"/>
           <ac:graphicFrameMkLst>
             <pc:docMk/>
             <pc:sldMk cId="1183344318" sldId="424"/>
@@ -817,14 +834,14 @@
           </ac:graphicFrameMkLst>
         </pc:graphicFrameChg>
       </pc:sldChg>
-      <pc:sldChg chg="modSp add ord">
-        <pc:chgData name="janghoon jun" userId="056a5883350c2f5e" providerId="LiveId" clId="{74AFAB52-6487-4651-9B79-2F181DBD8D0A}" dt="2026-04-23T05:10:30.524" v="41"/>
+      <pc:sldChg chg="modSp add mod ord">
+        <pc:chgData name="janghoon jun" userId="056a5883350c2f5e" providerId="LiveId" clId="{74AFAB52-6487-4651-9B79-2F181DBD8D0A}" dt="2026-04-29T01:34:58.301" v="1085" actId="20577"/>
         <pc:sldMkLst>
           <pc:docMk/>
           <pc:sldMk cId="3567372362" sldId="425"/>
         </pc:sldMkLst>
         <pc:spChg chg="mod">
-          <ac:chgData name="janghoon jun" userId="056a5883350c2f5e" providerId="LiveId" clId="{74AFAB52-6487-4651-9B79-2F181DBD8D0A}" dt="2026-04-23T05:10:30.524" v="41"/>
+          <ac:chgData name="janghoon jun" userId="056a5883350c2f5e" providerId="LiveId" clId="{74AFAB52-6487-4651-9B79-2F181DBD8D0A}" dt="2026-04-29T01:34:58.301" v="1085" actId="20577"/>
           <ac:spMkLst>
             <pc:docMk/>
             <pc:sldMk cId="3567372362" sldId="425"/>
@@ -1061,6 +1078,117 @@
           <pc:sldMk cId="3506109384" sldId="437"/>
         </pc:sldMkLst>
       </pc:sldChg>
+      <pc:sldChg chg="addSp delSp modSp add mod">
+        <pc:chgData name="janghoon jun" userId="056a5883350c2f5e" providerId="LiveId" clId="{74AFAB52-6487-4651-9B79-2F181DBD8D0A}" dt="2026-04-29T00:58:34.506" v="999"/>
+        <pc:sldMkLst>
+          <pc:docMk/>
+          <pc:sldMk cId="4099219520" sldId="438"/>
+        </pc:sldMkLst>
+        <pc:spChg chg="add del mod">
+          <ac:chgData name="janghoon jun" userId="056a5883350c2f5e" providerId="LiveId" clId="{74AFAB52-6487-4651-9B79-2F181DBD8D0A}" dt="2026-04-29T00:56:21.849" v="726" actId="478"/>
+          <ac:spMkLst>
+            <pc:docMk/>
+            <pc:sldMk cId="4099219520" sldId="438"/>
+            <ac:spMk id="3" creationId="{E1F33830-6301-294E-965D-34195F4CF66F}"/>
+          </ac:spMkLst>
+        </pc:spChg>
+        <pc:spChg chg="mod">
+          <ac:chgData name="janghoon jun" userId="056a5883350c2f5e" providerId="LiveId" clId="{74AFAB52-6487-4651-9B79-2F181DBD8D0A}" dt="2026-04-29T00:58:34.506" v="999"/>
+          <ac:spMkLst>
+            <pc:docMk/>
+            <pc:sldMk cId="4099219520" sldId="438"/>
+            <ac:spMk id="14" creationId="{776DA4E4-00A3-E690-8224-10FF5B020CD9}"/>
+          </ac:spMkLst>
+        </pc:spChg>
+      </pc:sldChg>
+      <pc:sldChg chg="add">
+        <pc:chgData name="janghoon jun" userId="056a5883350c2f5e" providerId="LiveId" clId="{74AFAB52-6487-4651-9B79-2F181DBD8D0A}" dt="2026-04-29T00:56:54.481" v="732"/>
+        <pc:sldMkLst>
+          <pc:docMk/>
+          <pc:sldMk cId="2448059843" sldId="439"/>
+        </pc:sldMkLst>
+      </pc:sldChg>
+    </pc:docChg>
+  </pc:docChgLst>
+  <pc:docChgLst>
+    <pc:chgData name="Jihun Kim" userId="2469e03939fca47a" providerId="LiveId" clId="{0EC0481E-6524-4E60-9AD2-E07F55D3906F}"/>
+    <pc:docChg chg="undo custSel modSld modMainMaster">
+      <pc:chgData name="Jihun Kim" userId="2469e03939fca47a" providerId="LiveId" clId="{0EC0481E-6524-4E60-9AD2-E07F55D3906F}" dt="2026-04-09T12:43:38.717" v="9" actId="113"/>
+      <pc:docMkLst>
+        <pc:docMk/>
+      </pc:docMkLst>
+      <pc:sldChg chg="modSp mod">
+        <pc:chgData name="Jihun Kim" userId="2469e03939fca47a" providerId="LiveId" clId="{0EC0481E-6524-4E60-9AD2-E07F55D3906F}" dt="2026-04-09T12:43:04.015" v="5" actId="2711"/>
+        <pc:sldMkLst>
+          <pc:docMk/>
+          <pc:sldMk cId="1998851532" sldId="256"/>
+        </pc:sldMkLst>
+        <pc:spChg chg="mod">
+          <ac:chgData name="Jihun Kim" userId="2469e03939fca47a" providerId="LiveId" clId="{0EC0481E-6524-4E60-9AD2-E07F55D3906F}" dt="2026-04-09T12:41:51.143" v="2" actId="207"/>
+          <ac:spMkLst>
+            <pc:docMk/>
+            <pc:sldMk cId="1998851532" sldId="256"/>
+            <ac:spMk id="4" creationId="{4C14D9A0-1BB9-428F-B273-3CE24758593B}"/>
+          </ac:spMkLst>
+        </pc:spChg>
+        <pc:spChg chg="mod">
+          <ac:chgData name="Jihun Kim" userId="2469e03939fca47a" providerId="LiveId" clId="{0EC0481E-6524-4E60-9AD2-E07F55D3906F}" dt="2026-04-09T12:42:23.172" v="3" actId="2711"/>
+          <ac:spMkLst>
+            <pc:docMk/>
+            <pc:sldMk cId="1998851532" sldId="256"/>
+            <ac:spMk id="5" creationId="{94B21C1C-F3A0-440B-961E-968F2C77FB2A}"/>
+          </ac:spMkLst>
+        </pc:spChg>
+        <pc:spChg chg="mod">
+          <ac:chgData name="Jihun Kim" userId="2469e03939fca47a" providerId="LiveId" clId="{0EC0481E-6524-4E60-9AD2-E07F55D3906F}" dt="2026-04-09T12:42:57.903" v="4" actId="2711"/>
+          <ac:spMkLst>
+            <pc:docMk/>
+            <pc:sldMk cId="1998851532" sldId="256"/>
+            <ac:spMk id="6" creationId="{63F70F93-076B-4BBC-B933-AC7768BB0AE5}"/>
+          </ac:spMkLst>
+        </pc:spChg>
+        <pc:spChg chg="mod">
+          <ac:chgData name="Jihun Kim" userId="2469e03939fca47a" providerId="LiveId" clId="{0EC0481E-6524-4E60-9AD2-E07F55D3906F}" dt="2026-04-09T12:43:04.015" v="5" actId="2711"/>
+          <ac:spMkLst>
+            <pc:docMk/>
+            <pc:sldMk cId="1998851532" sldId="256"/>
+            <ac:spMk id="7" creationId="{CEB5E8A0-083F-4B6E-AA66-93BFFD6A8E1A}"/>
+          </ac:spMkLst>
+        </pc:spChg>
+      </pc:sldChg>
+      <pc:sldMasterChg chg="modSldLayout">
+        <pc:chgData name="Jihun Kim" userId="2469e03939fca47a" providerId="LiveId" clId="{0EC0481E-6524-4E60-9AD2-E07F55D3906F}" dt="2026-04-09T12:43:38.717" v="9" actId="113"/>
+        <pc:sldMasterMkLst>
+          <pc:docMk/>
+          <pc:sldMasterMk cId="2755485914" sldId="2147483648"/>
+        </pc:sldMasterMkLst>
+        <pc:sldLayoutChg chg="modSp mod">
+          <pc:chgData name="Jihun Kim" userId="2469e03939fca47a" providerId="LiveId" clId="{0EC0481E-6524-4E60-9AD2-E07F55D3906F}" dt="2026-04-09T12:43:38.717" v="9" actId="113"/>
+          <pc:sldLayoutMkLst>
+            <pc:docMk/>
+            <pc:sldMasterMk cId="2755485914" sldId="2147483648"/>
+            <pc:sldLayoutMk cId="3176484067" sldId="2147483650"/>
+          </pc:sldLayoutMkLst>
+          <pc:spChg chg="mod">
+            <ac:chgData name="Jihun Kim" userId="2469e03939fca47a" providerId="LiveId" clId="{0EC0481E-6524-4E60-9AD2-E07F55D3906F}" dt="2026-04-09T12:43:24.420" v="6" actId="2711"/>
+            <ac:spMkLst>
+              <pc:docMk/>
+              <pc:sldMasterMk cId="2755485914" sldId="2147483648"/>
+              <pc:sldLayoutMk cId="3176484067" sldId="2147483650"/>
+              <ac:spMk id="2" creationId="{FE4F955D-C3E9-4033-8442-9095377B0662}"/>
+            </ac:spMkLst>
+          </pc:spChg>
+          <pc:spChg chg="mod">
+            <ac:chgData name="Jihun Kim" userId="2469e03939fca47a" providerId="LiveId" clId="{0EC0481E-6524-4E60-9AD2-E07F55D3906F}" dt="2026-04-09T12:43:38.717" v="9" actId="113"/>
+            <ac:spMkLst>
+              <pc:docMk/>
+              <pc:sldMasterMk cId="2755485914" sldId="2147483648"/>
+              <pc:sldLayoutMk cId="3176484067" sldId="2147483650"/>
+              <ac:spMk id="3" creationId="{9CA482F1-FC12-443E-892A-B48F9C50AA53}"/>
+            </ac:spMkLst>
+          </pc:spChg>
+        </pc:sldLayoutChg>
+      </pc:sldMasterChg>
     </pc:docChg>
   </pc:docChgLst>
 </pc:chgInfo>
@@ -1164,7 +1292,7 @@
           <a:p>
             <a:fld id="{33074436-1BEA-4F09-AD5C-9DF87C96BF5A}" type="datetimeFigureOut">
               <a:rPr lang="ko-KR" altLang="en-US" smtClean="0"/>
-              <a:t>2026-04-28</a:t>
+              <a:t>2026-04-29</a:t>
             </a:fld>
             <a:endParaRPr lang="ko-KR" altLang="en-US"/>
           </a:p>
@@ -2012,6 +2140,222 @@
   <p:cSld>
     <p:spTree>
       <p:nvGrpSpPr>
+        <p:cNvPr id="1" name="">
+          <a:extLst>
+            <a:ext uri="{FF2B5EF4-FFF2-40B4-BE49-F238E27FC236}">
+              <a16:creationId xmlns:a16="http://schemas.microsoft.com/office/drawing/2014/main" id="{F4AA566F-2E6E-1FA1-19C9-7DF770D62894}"/>
+            </a:ext>
+          </a:extLst>
+        </p:cNvPr>
+        <p:cNvGrpSpPr/>
+        <p:nvPr/>
+      </p:nvGrpSpPr>
+      <p:grpSpPr>
+        <a:xfrm>
+          <a:off x="0" y="0"/>
+          <a:ext cx="0" cy="0"/>
+          <a:chOff x="0" y="0"/>
+          <a:chExt cx="0" cy="0"/>
+        </a:xfrm>
+      </p:grpSpPr>
+      <p:sp>
+        <p:nvSpPr>
+          <p:cNvPr id="2" name="슬라이드 이미지 개체 틀 1">
+            <a:extLst>
+              <a:ext uri="{FF2B5EF4-FFF2-40B4-BE49-F238E27FC236}">
+                <a16:creationId xmlns:a16="http://schemas.microsoft.com/office/drawing/2014/main" id="{61B90227-C94C-C1B8-0CEE-61B007ED7744}"/>
+              </a:ext>
+            </a:extLst>
+          </p:cNvPr>
+          <p:cNvSpPr>
+            <a:spLocks noGrp="1" noRot="1" noChangeAspect="1"/>
+          </p:cNvSpPr>
+          <p:nvPr>
+            <p:ph type="sldImg"/>
+          </p:nvPr>
+        </p:nvSpPr>
+        <p:spPr/>
+      </p:sp>
+      <p:sp>
+        <p:nvSpPr>
+          <p:cNvPr id="3" name="슬라이드 노트 개체 틀 2">
+            <a:extLst>
+              <a:ext uri="{FF2B5EF4-FFF2-40B4-BE49-F238E27FC236}">
+                <a16:creationId xmlns:a16="http://schemas.microsoft.com/office/drawing/2014/main" id="{1A060A00-4238-8358-3234-740712683B06}"/>
+              </a:ext>
+            </a:extLst>
+          </p:cNvPr>
+          <p:cNvSpPr>
+            <a:spLocks noGrp="1"/>
+          </p:cNvSpPr>
+          <p:nvPr>
+            <p:ph type="body" idx="1"/>
+          </p:nvPr>
+        </p:nvSpPr>
+        <p:spPr/>
+        <p:txBody>
+          <a:bodyPr/>
+          <a:lstStyle/>
+          <a:p>
+            <a:endParaRPr lang="en-US" altLang="ko-KR" dirty="0"/>
+          </a:p>
+        </p:txBody>
+      </p:sp>
+      <p:sp>
+        <p:nvSpPr>
+          <p:cNvPr id="4" name="슬라이드 번호 개체 틀 3">
+            <a:extLst>
+              <a:ext uri="{FF2B5EF4-FFF2-40B4-BE49-F238E27FC236}">
+                <a16:creationId xmlns:a16="http://schemas.microsoft.com/office/drawing/2014/main" id="{E5CACDF0-3A10-A885-EC0C-7D4698CCF4BD}"/>
+              </a:ext>
+            </a:extLst>
+          </p:cNvPr>
+          <p:cNvSpPr>
+            <a:spLocks noGrp="1"/>
+          </p:cNvSpPr>
+          <p:nvPr>
+            <p:ph type="sldNum" sz="quarter" idx="5"/>
+          </p:nvPr>
+        </p:nvSpPr>
+        <p:spPr/>
+        <p:txBody>
+          <a:bodyPr/>
+          <a:lstStyle/>
+          <a:p>
+            <a:fld id="{433C9518-700F-4811-95BB-24DAF3FA92F2}" type="slidenum">
+              <a:rPr lang="ko-KR" altLang="en-US" smtClean="0"/>
+              <a:t>16</a:t>
+            </a:fld>
+            <a:endParaRPr lang="ko-KR" altLang="en-US"/>
+          </a:p>
+        </p:txBody>
+      </p:sp>
+    </p:spTree>
+    <p:extLst>
+      <p:ext uri="{BB962C8B-B14F-4D97-AF65-F5344CB8AC3E}">
+        <p14:creationId xmlns:p14="http://schemas.microsoft.com/office/powerpoint/2010/main" val="1642779227"/>
+      </p:ext>
+    </p:extLst>
+  </p:cSld>
+  <p:clrMapOvr>
+    <a:masterClrMapping/>
+  </p:clrMapOvr>
+</p:notes>
+</file>
+
+<file path=ppt/notesSlides/notesSlide16.xml><?xml version="1.0" encoding="utf-8"?>
+<p:notes xmlns:a="http://schemas.openxmlformats.org/drawingml/2006/main" xmlns:r="http://schemas.openxmlformats.org/officeDocument/2006/relationships" xmlns:p="http://schemas.openxmlformats.org/presentationml/2006/main">
+  <p:cSld>
+    <p:spTree>
+      <p:nvGrpSpPr>
+        <p:cNvPr id="1" name="">
+          <a:extLst>
+            <a:ext uri="{FF2B5EF4-FFF2-40B4-BE49-F238E27FC236}">
+              <a16:creationId xmlns:a16="http://schemas.microsoft.com/office/drawing/2014/main" id="{7176489A-CEE8-338E-B78B-094157534530}"/>
+            </a:ext>
+          </a:extLst>
+        </p:cNvPr>
+        <p:cNvGrpSpPr/>
+        <p:nvPr/>
+      </p:nvGrpSpPr>
+      <p:grpSpPr>
+        <a:xfrm>
+          <a:off x="0" y="0"/>
+          <a:ext cx="0" cy="0"/>
+          <a:chOff x="0" y="0"/>
+          <a:chExt cx="0" cy="0"/>
+        </a:xfrm>
+      </p:grpSpPr>
+      <p:sp>
+        <p:nvSpPr>
+          <p:cNvPr id="2" name="슬라이드 이미지 개체 틀 1">
+            <a:extLst>
+              <a:ext uri="{FF2B5EF4-FFF2-40B4-BE49-F238E27FC236}">
+                <a16:creationId xmlns:a16="http://schemas.microsoft.com/office/drawing/2014/main" id="{A31F500A-8AB8-2AAC-71C0-B36548C153AB}"/>
+              </a:ext>
+            </a:extLst>
+          </p:cNvPr>
+          <p:cNvSpPr>
+            <a:spLocks noGrp="1" noRot="1" noChangeAspect="1"/>
+          </p:cNvSpPr>
+          <p:nvPr>
+            <p:ph type="sldImg"/>
+          </p:nvPr>
+        </p:nvSpPr>
+        <p:spPr/>
+      </p:sp>
+      <p:sp>
+        <p:nvSpPr>
+          <p:cNvPr id="3" name="슬라이드 노트 개체 틀 2">
+            <a:extLst>
+              <a:ext uri="{FF2B5EF4-FFF2-40B4-BE49-F238E27FC236}">
+                <a16:creationId xmlns:a16="http://schemas.microsoft.com/office/drawing/2014/main" id="{0AEB6B2D-447F-9132-5DDA-6DF3CA1B2069}"/>
+              </a:ext>
+            </a:extLst>
+          </p:cNvPr>
+          <p:cNvSpPr>
+            <a:spLocks noGrp="1"/>
+          </p:cNvSpPr>
+          <p:nvPr>
+            <p:ph type="body" idx="1"/>
+          </p:nvPr>
+        </p:nvSpPr>
+        <p:spPr/>
+        <p:txBody>
+          <a:bodyPr/>
+          <a:lstStyle/>
+          <a:p>
+            <a:endParaRPr lang="en-US" altLang="ko-KR" dirty="0"/>
+          </a:p>
+        </p:txBody>
+      </p:sp>
+      <p:sp>
+        <p:nvSpPr>
+          <p:cNvPr id="4" name="슬라이드 번호 개체 틀 3">
+            <a:extLst>
+              <a:ext uri="{FF2B5EF4-FFF2-40B4-BE49-F238E27FC236}">
+                <a16:creationId xmlns:a16="http://schemas.microsoft.com/office/drawing/2014/main" id="{83CD8D70-DAE0-6BF5-1824-C0307E0025D1}"/>
+              </a:ext>
+            </a:extLst>
+          </p:cNvPr>
+          <p:cNvSpPr>
+            <a:spLocks noGrp="1"/>
+          </p:cNvSpPr>
+          <p:nvPr>
+            <p:ph type="sldNum" sz="quarter" idx="5"/>
+          </p:nvPr>
+        </p:nvSpPr>
+        <p:spPr/>
+        <p:txBody>
+          <a:bodyPr/>
+          <a:lstStyle/>
+          <a:p>
+            <a:fld id="{433C9518-700F-4811-95BB-24DAF3FA92F2}" type="slidenum">
+              <a:rPr lang="ko-KR" altLang="en-US" smtClean="0"/>
+              <a:t>17</a:t>
+            </a:fld>
+            <a:endParaRPr lang="ko-KR" altLang="en-US"/>
+          </a:p>
+        </p:txBody>
+      </p:sp>
+    </p:spTree>
+    <p:extLst>
+      <p:ext uri="{BB962C8B-B14F-4D97-AF65-F5344CB8AC3E}">
+        <p14:creationId xmlns:p14="http://schemas.microsoft.com/office/powerpoint/2010/main" val="3399737446"/>
+      </p:ext>
+    </p:extLst>
+  </p:cSld>
+  <p:clrMapOvr>
+    <a:masterClrMapping/>
+  </p:clrMapOvr>
+</p:notes>
+</file>
+
+<file path=ppt/notesSlides/notesSlide17.xml><?xml version="1.0" encoding="utf-8"?>
+<p:notes xmlns:a="http://schemas.openxmlformats.org/drawingml/2006/main" xmlns:r="http://schemas.openxmlformats.org/officeDocument/2006/relationships" xmlns:p="http://schemas.openxmlformats.org/presentationml/2006/main">
+  <p:cSld>
+    <p:spTree>
+      <p:nvGrpSpPr>
         <p:cNvPr id="1" name=""/>
         <p:cNvGrpSpPr/>
         <p:nvPr/>
@@ -2072,7 +2416,7 @@
           <a:p>
             <a:fld id="{433C9518-700F-4811-95BB-24DAF3FA92F2}" type="slidenum">
               <a:rPr lang="ko-KR" altLang="en-US" smtClean="0"/>
-              <a:t>16</a:t>
+              <a:t>18</a:t>
             </a:fld>
             <a:endParaRPr lang="ko-KR" altLang="en-US"/>
           </a:p>
@@ -2091,7 +2435,7 @@
 </p:notes>
 </file>
 
-<file path=ppt/notesSlides/notesSlide16.xml><?xml version="1.0" encoding="utf-8"?>
+<file path=ppt/notesSlides/notesSlide18.xml><?xml version="1.0" encoding="utf-8"?>
 <p:notes xmlns:a="http://schemas.openxmlformats.org/drawingml/2006/main" xmlns:r="http://schemas.openxmlformats.org/officeDocument/2006/relationships" xmlns:p="http://schemas.openxmlformats.org/presentationml/2006/main">
   <p:cSld>
     <p:spTree>
@@ -2180,7 +2524,7 @@
           <a:p>
             <a:fld id="{433C9518-700F-4811-95BB-24DAF3FA92F2}" type="slidenum">
               <a:rPr lang="ko-KR" altLang="en-US" smtClean="0"/>
-              <a:t>17</a:t>
+              <a:t>19</a:t>
             </a:fld>
             <a:endParaRPr lang="ko-KR" altLang="en-US"/>
           </a:p>
@@ -2199,7 +2543,7 @@
 </p:notes>
 </file>
 
-<file path=ppt/notesSlides/notesSlide17.xml><?xml version="1.0" encoding="utf-8"?>
+<file path=ppt/notesSlides/notesSlide19.xml><?xml version="1.0" encoding="utf-8"?>
 <p:notes xmlns:a="http://schemas.openxmlformats.org/drawingml/2006/main" xmlns:r="http://schemas.openxmlformats.org/officeDocument/2006/relationships" xmlns:p="http://schemas.openxmlformats.org/presentationml/2006/main">
   <p:cSld>
     <p:spTree>
@@ -2288,7 +2632,7 @@
           <a:p>
             <a:fld id="{433C9518-700F-4811-95BB-24DAF3FA92F2}" type="slidenum">
               <a:rPr lang="ko-KR" altLang="en-US" smtClean="0"/>
-              <a:t>18</a:t>
+              <a:t>20</a:t>
             </a:fld>
             <a:endParaRPr lang="ko-KR" altLang="en-US"/>
           </a:p>
@@ -2298,198 +2642,6 @@
     <p:extLst>
       <p:ext uri="{BB962C8B-B14F-4D97-AF65-F5344CB8AC3E}">
         <p14:creationId xmlns:p14="http://schemas.microsoft.com/office/powerpoint/2010/main" val="3288734074"/>
-      </p:ext>
-    </p:extLst>
-  </p:cSld>
-  <p:clrMapOvr>
-    <a:masterClrMapping/>
-  </p:clrMapOvr>
-</p:notes>
-</file>
-
-<file path=ppt/notesSlides/notesSlide18.xml><?xml version="1.0" encoding="utf-8"?>
-<p:notes xmlns:a="http://schemas.openxmlformats.org/drawingml/2006/main" xmlns:r="http://schemas.openxmlformats.org/officeDocument/2006/relationships" xmlns:p="http://schemas.openxmlformats.org/presentationml/2006/main">
-  <p:cSld>
-    <p:spTree>
-      <p:nvGrpSpPr>
-        <p:cNvPr id="1" name="">
-          <a:extLst>
-            <a:ext uri="{FF2B5EF4-FFF2-40B4-BE49-F238E27FC236}">
-              <a16:creationId xmlns:a16="http://schemas.microsoft.com/office/drawing/2014/main" id="{B4F0ECB1-A04F-46FA-3FC2-ADC8058C8347}"/>
-            </a:ext>
-          </a:extLst>
-        </p:cNvPr>
-        <p:cNvGrpSpPr/>
-        <p:nvPr/>
-      </p:nvGrpSpPr>
-      <p:grpSpPr>
-        <a:xfrm>
-          <a:off x="0" y="0"/>
-          <a:ext cx="0" cy="0"/>
-          <a:chOff x="0" y="0"/>
-          <a:chExt cx="0" cy="0"/>
-        </a:xfrm>
-      </p:grpSpPr>
-      <p:sp>
-        <p:nvSpPr>
-          <p:cNvPr id="2" name="슬라이드 이미지 개체 틀 1">
-            <a:extLst>
-              <a:ext uri="{FF2B5EF4-FFF2-40B4-BE49-F238E27FC236}">
-                <a16:creationId xmlns:a16="http://schemas.microsoft.com/office/drawing/2014/main" id="{1F0720AB-E13E-D83D-6F4D-39DB219040B7}"/>
-              </a:ext>
-            </a:extLst>
-          </p:cNvPr>
-          <p:cNvSpPr>
-            <a:spLocks noGrp="1" noRot="1" noChangeAspect="1"/>
-          </p:cNvSpPr>
-          <p:nvPr>
-            <p:ph type="sldImg"/>
-          </p:nvPr>
-        </p:nvSpPr>
-        <p:spPr/>
-      </p:sp>
-      <p:sp>
-        <p:nvSpPr>
-          <p:cNvPr id="3" name="슬라이드 노트 개체 틀 2">
-            <a:extLst>
-              <a:ext uri="{FF2B5EF4-FFF2-40B4-BE49-F238E27FC236}">
-                <a16:creationId xmlns:a16="http://schemas.microsoft.com/office/drawing/2014/main" id="{61A43EFA-F769-FCA7-38C6-FB554A52D977}"/>
-              </a:ext>
-            </a:extLst>
-          </p:cNvPr>
-          <p:cNvSpPr>
-            <a:spLocks noGrp="1"/>
-          </p:cNvSpPr>
-          <p:nvPr>
-            <p:ph type="body" idx="1"/>
-          </p:nvPr>
-        </p:nvSpPr>
-        <p:spPr/>
-        <p:txBody>
-          <a:bodyPr/>
-          <a:lstStyle/>
-          <a:p>
-            <a:endParaRPr lang="en-US" altLang="ko-KR" dirty="0"/>
-          </a:p>
-        </p:txBody>
-      </p:sp>
-      <p:sp>
-        <p:nvSpPr>
-          <p:cNvPr id="4" name="슬라이드 번호 개체 틀 3">
-            <a:extLst>
-              <a:ext uri="{FF2B5EF4-FFF2-40B4-BE49-F238E27FC236}">
-                <a16:creationId xmlns:a16="http://schemas.microsoft.com/office/drawing/2014/main" id="{5BE40A08-11BE-36BF-706C-75EDEF4EA8EA}"/>
-              </a:ext>
-            </a:extLst>
-          </p:cNvPr>
-          <p:cNvSpPr>
-            <a:spLocks noGrp="1"/>
-          </p:cNvSpPr>
-          <p:nvPr>
-            <p:ph type="sldNum" sz="quarter" idx="5"/>
-          </p:nvPr>
-        </p:nvSpPr>
-        <p:spPr/>
-        <p:txBody>
-          <a:bodyPr/>
-          <a:lstStyle/>
-          <a:p>
-            <a:fld id="{433C9518-700F-4811-95BB-24DAF3FA92F2}" type="slidenum">
-              <a:rPr lang="ko-KR" altLang="en-US" smtClean="0"/>
-              <a:t>19</a:t>
-            </a:fld>
-            <a:endParaRPr lang="ko-KR" altLang="en-US"/>
-          </a:p>
-        </p:txBody>
-      </p:sp>
-    </p:spTree>
-    <p:extLst>
-      <p:ext uri="{BB962C8B-B14F-4D97-AF65-F5344CB8AC3E}">
-        <p14:creationId xmlns:p14="http://schemas.microsoft.com/office/powerpoint/2010/main" val="2766819799"/>
-      </p:ext>
-    </p:extLst>
-  </p:cSld>
-  <p:clrMapOvr>
-    <a:masterClrMapping/>
-  </p:clrMapOvr>
-</p:notes>
-</file>
-
-<file path=ppt/notesSlides/notesSlide19.xml><?xml version="1.0" encoding="utf-8"?>
-<p:notes xmlns:a="http://schemas.openxmlformats.org/drawingml/2006/main" xmlns:r="http://schemas.openxmlformats.org/officeDocument/2006/relationships" xmlns:p="http://schemas.openxmlformats.org/presentationml/2006/main">
-  <p:cSld>
-    <p:spTree>
-      <p:nvGrpSpPr>
-        <p:cNvPr id="1" name=""/>
-        <p:cNvGrpSpPr/>
-        <p:nvPr/>
-      </p:nvGrpSpPr>
-      <p:grpSpPr>
-        <a:xfrm>
-          <a:off x="0" y="0"/>
-          <a:ext cx="0" cy="0"/>
-          <a:chOff x="0" y="0"/>
-          <a:chExt cx="0" cy="0"/>
-        </a:xfrm>
-      </p:grpSpPr>
-      <p:sp>
-        <p:nvSpPr>
-          <p:cNvPr id="2" name="슬라이드 이미지 개체 틀 1"/>
-          <p:cNvSpPr>
-            <a:spLocks noGrp="1" noRot="1" noChangeAspect="1"/>
-          </p:cNvSpPr>
-          <p:nvPr>
-            <p:ph type="sldImg"/>
-          </p:nvPr>
-        </p:nvSpPr>
-        <p:spPr/>
-      </p:sp>
-      <p:sp>
-        <p:nvSpPr>
-          <p:cNvPr id="3" name="슬라이드 노트 개체 틀 2"/>
-          <p:cNvSpPr>
-            <a:spLocks noGrp="1"/>
-          </p:cNvSpPr>
-          <p:nvPr>
-            <p:ph type="body" idx="1"/>
-          </p:nvPr>
-        </p:nvSpPr>
-        <p:spPr/>
-        <p:txBody>
-          <a:bodyPr/>
-          <a:lstStyle/>
-          <a:p>
-            <a:endParaRPr lang="en-US" altLang="ko-KR" dirty="0"/>
-          </a:p>
-        </p:txBody>
-      </p:sp>
-      <p:sp>
-        <p:nvSpPr>
-          <p:cNvPr id="4" name="슬라이드 번호 개체 틀 3"/>
-          <p:cNvSpPr>
-            <a:spLocks noGrp="1"/>
-          </p:cNvSpPr>
-          <p:nvPr>
-            <p:ph type="sldNum" sz="quarter" idx="5"/>
-          </p:nvPr>
-        </p:nvSpPr>
-        <p:spPr/>
-        <p:txBody>
-          <a:bodyPr/>
-          <a:lstStyle/>
-          <a:p>
-            <a:fld id="{433C9518-700F-4811-95BB-24DAF3FA92F2}" type="slidenum">
-              <a:rPr lang="ko-KR" altLang="en-US" smtClean="0"/>
-              <a:t>20</a:t>
-            </a:fld>
-            <a:endParaRPr lang="ko-KR" altLang="en-US"/>
-          </a:p>
-        </p:txBody>
-      </p:sp>
-    </p:spTree>
-    <p:extLst>
-      <p:ext uri="{BB962C8B-B14F-4D97-AF65-F5344CB8AC3E}">
-        <p14:creationId xmlns:p14="http://schemas.microsoft.com/office/powerpoint/2010/main" val="2855855225"/>
       </p:ext>
     </p:extLst>
   </p:cSld>
@@ -2588,6 +2740,114 @@
   <p:cSld>
     <p:spTree>
       <p:nvGrpSpPr>
+        <p:cNvPr id="1" name="">
+          <a:extLst>
+            <a:ext uri="{FF2B5EF4-FFF2-40B4-BE49-F238E27FC236}">
+              <a16:creationId xmlns:a16="http://schemas.microsoft.com/office/drawing/2014/main" id="{B4F0ECB1-A04F-46FA-3FC2-ADC8058C8347}"/>
+            </a:ext>
+          </a:extLst>
+        </p:cNvPr>
+        <p:cNvGrpSpPr/>
+        <p:nvPr/>
+      </p:nvGrpSpPr>
+      <p:grpSpPr>
+        <a:xfrm>
+          <a:off x="0" y="0"/>
+          <a:ext cx="0" cy="0"/>
+          <a:chOff x="0" y="0"/>
+          <a:chExt cx="0" cy="0"/>
+        </a:xfrm>
+      </p:grpSpPr>
+      <p:sp>
+        <p:nvSpPr>
+          <p:cNvPr id="2" name="슬라이드 이미지 개체 틀 1">
+            <a:extLst>
+              <a:ext uri="{FF2B5EF4-FFF2-40B4-BE49-F238E27FC236}">
+                <a16:creationId xmlns:a16="http://schemas.microsoft.com/office/drawing/2014/main" id="{1F0720AB-E13E-D83D-6F4D-39DB219040B7}"/>
+              </a:ext>
+            </a:extLst>
+          </p:cNvPr>
+          <p:cNvSpPr>
+            <a:spLocks noGrp="1" noRot="1" noChangeAspect="1"/>
+          </p:cNvSpPr>
+          <p:nvPr>
+            <p:ph type="sldImg"/>
+          </p:nvPr>
+        </p:nvSpPr>
+        <p:spPr/>
+      </p:sp>
+      <p:sp>
+        <p:nvSpPr>
+          <p:cNvPr id="3" name="슬라이드 노트 개체 틀 2">
+            <a:extLst>
+              <a:ext uri="{FF2B5EF4-FFF2-40B4-BE49-F238E27FC236}">
+                <a16:creationId xmlns:a16="http://schemas.microsoft.com/office/drawing/2014/main" id="{61A43EFA-F769-FCA7-38C6-FB554A52D977}"/>
+              </a:ext>
+            </a:extLst>
+          </p:cNvPr>
+          <p:cNvSpPr>
+            <a:spLocks noGrp="1"/>
+          </p:cNvSpPr>
+          <p:nvPr>
+            <p:ph type="body" idx="1"/>
+          </p:nvPr>
+        </p:nvSpPr>
+        <p:spPr/>
+        <p:txBody>
+          <a:bodyPr/>
+          <a:lstStyle/>
+          <a:p>
+            <a:endParaRPr lang="en-US" altLang="ko-KR" dirty="0"/>
+          </a:p>
+        </p:txBody>
+      </p:sp>
+      <p:sp>
+        <p:nvSpPr>
+          <p:cNvPr id="4" name="슬라이드 번호 개체 틀 3">
+            <a:extLst>
+              <a:ext uri="{FF2B5EF4-FFF2-40B4-BE49-F238E27FC236}">
+                <a16:creationId xmlns:a16="http://schemas.microsoft.com/office/drawing/2014/main" id="{5BE40A08-11BE-36BF-706C-75EDEF4EA8EA}"/>
+              </a:ext>
+            </a:extLst>
+          </p:cNvPr>
+          <p:cNvSpPr>
+            <a:spLocks noGrp="1"/>
+          </p:cNvSpPr>
+          <p:nvPr>
+            <p:ph type="sldNum" sz="quarter" idx="5"/>
+          </p:nvPr>
+        </p:nvSpPr>
+        <p:spPr/>
+        <p:txBody>
+          <a:bodyPr/>
+          <a:lstStyle/>
+          <a:p>
+            <a:fld id="{433C9518-700F-4811-95BB-24DAF3FA92F2}" type="slidenum">
+              <a:rPr lang="ko-KR" altLang="en-US" smtClean="0"/>
+              <a:t>21</a:t>
+            </a:fld>
+            <a:endParaRPr lang="ko-KR" altLang="en-US"/>
+          </a:p>
+        </p:txBody>
+      </p:sp>
+    </p:spTree>
+    <p:extLst>
+      <p:ext uri="{BB962C8B-B14F-4D97-AF65-F5344CB8AC3E}">
+        <p14:creationId xmlns:p14="http://schemas.microsoft.com/office/powerpoint/2010/main" val="2766819799"/>
+      </p:ext>
+    </p:extLst>
+  </p:cSld>
+  <p:clrMapOvr>
+    <a:masterClrMapping/>
+  </p:clrMapOvr>
+</p:notes>
+</file>
+
+<file path=ppt/notesSlides/notesSlide21.xml><?xml version="1.0" encoding="utf-8"?>
+<p:notes xmlns:a="http://schemas.openxmlformats.org/drawingml/2006/main" xmlns:r="http://schemas.openxmlformats.org/officeDocument/2006/relationships" xmlns:p="http://schemas.openxmlformats.org/presentationml/2006/main">
+  <p:cSld>
+    <p:spTree>
+      <p:nvGrpSpPr>
         <p:cNvPr id="1" name=""/>
         <p:cNvGrpSpPr/>
         <p:nvPr/>
@@ -2648,7 +2908,91 @@
           <a:p>
             <a:fld id="{433C9518-700F-4811-95BB-24DAF3FA92F2}" type="slidenum">
               <a:rPr lang="ko-KR" altLang="en-US" smtClean="0"/>
-              <a:t>21</a:t>
+              <a:t>22</a:t>
+            </a:fld>
+            <a:endParaRPr lang="ko-KR" altLang="en-US"/>
+          </a:p>
+        </p:txBody>
+      </p:sp>
+    </p:spTree>
+    <p:extLst>
+      <p:ext uri="{BB962C8B-B14F-4D97-AF65-F5344CB8AC3E}">
+        <p14:creationId xmlns:p14="http://schemas.microsoft.com/office/powerpoint/2010/main" val="2855855225"/>
+      </p:ext>
+    </p:extLst>
+  </p:cSld>
+  <p:clrMapOvr>
+    <a:masterClrMapping/>
+  </p:clrMapOvr>
+</p:notes>
+</file>
+
+<file path=ppt/notesSlides/notesSlide22.xml><?xml version="1.0" encoding="utf-8"?>
+<p:notes xmlns:a="http://schemas.openxmlformats.org/drawingml/2006/main" xmlns:r="http://schemas.openxmlformats.org/officeDocument/2006/relationships" xmlns:p="http://schemas.openxmlformats.org/presentationml/2006/main">
+  <p:cSld>
+    <p:spTree>
+      <p:nvGrpSpPr>
+        <p:cNvPr id="1" name=""/>
+        <p:cNvGrpSpPr/>
+        <p:nvPr/>
+      </p:nvGrpSpPr>
+      <p:grpSpPr>
+        <a:xfrm>
+          <a:off x="0" y="0"/>
+          <a:ext cx="0" cy="0"/>
+          <a:chOff x="0" y="0"/>
+          <a:chExt cx="0" cy="0"/>
+        </a:xfrm>
+      </p:grpSpPr>
+      <p:sp>
+        <p:nvSpPr>
+          <p:cNvPr id="2" name="슬라이드 이미지 개체 틀 1"/>
+          <p:cNvSpPr>
+            <a:spLocks noGrp="1" noRot="1" noChangeAspect="1"/>
+          </p:cNvSpPr>
+          <p:nvPr>
+            <p:ph type="sldImg"/>
+          </p:nvPr>
+        </p:nvSpPr>
+        <p:spPr/>
+      </p:sp>
+      <p:sp>
+        <p:nvSpPr>
+          <p:cNvPr id="3" name="슬라이드 노트 개체 틀 2"/>
+          <p:cNvSpPr>
+            <a:spLocks noGrp="1"/>
+          </p:cNvSpPr>
+          <p:nvPr>
+            <p:ph type="body" idx="1"/>
+          </p:nvPr>
+        </p:nvSpPr>
+        <p:spPr/>
+        <p:txBody>
+          <a:bodyPr/>
+          <a:lstStyle/>
+          <a:p>
+            <a:endParaRPr lang="en-US" altLang="ko-KR" dirty="0"/>
+          </a:p>
+        </p:txBody>
+      </p:sp>
+      <p:sp>
+        <p:nvSpPr>
+          <p:cNvPr id="4" name="슬라이드 번호 개체 틀 3"/>
+          <p:cNvSpPr>
+            <a:spLocks noGrp="1"/>
+          </p:cNvSpPr>
+          <p:nvPr>
+            <p:ph type="sldNum" sz="quarter" idx="5"/>
+          </p:nvPr>
+        </p:nvSpPr>
+        <p:spPr/>
+        <p:txBody>
+          <a:bodyPr/>
+          <a:lstStyle/>
+          <a:p>
+            <a:fld id="{433C9518-700F-4811-95BB-24DAF3FA92F2}" type="slidenum">
+              <a:rPr lang="ko-KR" altLang="en-US" smtClean="0"/>
+              <a:t>23</a:t>
             </a:fld>
             <a:endParaRPr lang="ko-KR" altLang="en-US"/>
           </a:p>
@@ -2667,7 +3011,7 @@
 </p:notes>
 </file>
 
-<file path=ppt/notesSlides/notesSlide21.xml><?xml version="1.0" encoding="utf-8"?>
+<file path=ppt/notesSlides/notesSlide23.xml><?xml version="1.0" encoding="utf-8"?>
 <p:notes xmlns:a="http://schemas.openxmlformats.org/drawingml/2006/main" xmlns:r="http://schemas.openxmlformats.org/officeDocument/2006/relationships" xmlns:p="http://schemas.openxmlformats.org/presentationml/2006/main">
   <p:cSld>
     <p:spTree>
@@ -2732,7 +3076,7 @@
           <a:p>
             <a:fld id="{433C9518-700F-4811-95BB-24DAF3FA92F2}" type="slidenum">
               <a:rPr lang="ko-KR" altLang="en-US" smtClean="0"/>
-              <a:t>23</a:t>
+              <a:t>25</a:t>
             </a:fld>
             <a:endParaRPr lang="ko-KR" altLang="en-US"/>
           </a:p>
@@ -2751,7 +3095,7 @@
 </p:notes>
 </file>
 
-<file path=ppt/notesSlides/notesSlide22.xml><?xml version="1.0" encoding="utf-8"?>
+<file path=ppt/notesSlides/notesSlide24.xml><?xml version="1.0" encoding="utf-8"?>
 <p:notes xmlns:a="http://schemas.openxmlformats.org/drawingml/2006/main" xmlns:r="http://schemas.openxmlformats.org/officeDocument/2006/relationships" xmlns:p="http://schemas.openxmlformats.org/presentationml/2006/main">
   <p:cSld>
     <p:spTree>
@@ -2840,7 +3184,7 @@
           <a:p>
             <a:fld id="{433C9518-700F-4811-95BB-24DAF3FA92F2}" type="slidenum">
               <a:rPr lang="ko-KR" altLang="en-US" smtClean="0"/>
-              <a:t>24</a:t>
+              <a:t>26</a:t>
             </a:fld>
             <a:endParaRPr lang="ko-KR" altLang="en-US"/>
           </a:p>
@@ -2859,7 +3203,7 @@
 </p:notes>
 </file>
 
-<file path=ppt/notesSlides/notesSlide23.xml><?xml version="1.0" encoding="utf-8"?>
+<file path=ppt/notesSlides/notesSlide25.xml><?xml version="1.0" encoding="utf-8"?>
 <p:notes xmlns:a="http://schemas.openxmlformats.org/drawingml/2006/main" xmlns:r="http://schemas.openxmlformats.org/officeDocument/2006/relationships" xmlns:p="http://schemas.openxmlformats.org/presentationml/2006/main">
   <p:cSld>
     <p:spTree>
@@ -2948,7 +3292,7 @@
           <a:p>
             <a:fld id="{433C9518-700F-4811-95BB-24DAF3FA92F2}" type="slidenum">
               <a:rPr lang="ko-KR" altLang="en-US" smtClean="0"/>
-              <a:t>25</a:t>
+              <a:t>27</a:t>
             </a:fld>
             <a:endParaRPr lang="ko-KR" altLang="en-US"/>
           </a:p>
@@ -2967,7 +3311,7 @@
 </p:notes>
 </file>
 
-<file path=ppt/notesSlides/notesSlide24.xml><?xml version="1.0" encoding="utf-8"?>
+<file path=ppt/notesSlides/notesSlide26.xml><?xml version="1.0" encoding="utf-8"?>
 <p:notes xmlns:a="http://schemas.openxmlformats.org/drawingml/2006/main" xmlns:r="http://schemas.openxmlformats.org/officeDocument/2006/relationships" xmlns:p="http://schemas.openxmlformats.org/presentationml/2006/main">
   <p:cSld>
     <p:spTree>
@@ -3056,7 +3400,7 @@
           <a:p>
             <a:fld id="{433C9518-700F-4811-95BB-24DAF3FA92F2}" type="slidenum">
               <a:rPr lang="ko-KR" altLang="en-US" smtClean="0"/>
-              <a:t>26</a:t>
+              <a:t>28</a:t>
             </a:fld>
             <a:endParaRPr lang="ko-KR" altLang="en-US"/>
           </a:p>
@@ -3075,7 +3419,7 @@
 </p:notes>
 </file>
 
-<file path=ppt/notesSlides/notesSlide25.xml><?xml version="1.0" encoding="utf-8"?>
+<file path=ppt/notesSlides/notesSlide27.xml><?xml version="1.0" encoding="utf-8"?>
 <p:notes xmlns:a="http://schemas.openxmlformats.org/drawingml/2006/main" xmlns:r="http://schemas.openxmlformats.org/officeDocument/2006/relationships" xmlns:p="http://schemas.openxmlformats.org/presentationml/2006/main">
   <p:cSld>
     <p:spTree>
@@ -3164,7 +3508,7 @@
           <a:p>
             <a:fld id="{433C9518-700F-4811-95BB-24DAF3FA92F2}" type="slidenum">
               <a:rPr lang="ko-KR" altLang="en-US" smtClean="0"/>
-              <a:t>28</a:t>
+              <a:t>30</a:t>
             </a:fld>
             <a:endParaRPr lang="ko-KR" altLang="en-US"/>
           </a:p>
@@ -3183,7 +3527,7 @@
 </p:notes>
 </file>
 
-<file path=ppt/notesSlides/notesSlide26.xml><?xml version="1.0" encoding="utf-8"?>
+<file path=ppt/notesSlides/notesSlide28.xml><?xml version="1.0" encoding="utf-8"?>
 <p:notes xmlns:a="http://schemas.openxmlformats.org/drawingml/2006/main" xmlns:r="http://schemas.openxmlformats.org/officeDocument/2006/relationships" xmlns:p="http://schemas.openxmlformats.org/presentationml/2006/main">
   <p:cSld>
     <p:spTree>
@@ -3248,7 +3592,7 @@
           <a:p>
             <a:fld id="{433C9518-700F-4811-95BB-24DAF3FA92F2}" type="slidenum">
               <a:rPr lang="ko-KR" altLang="en-US" smtClean="0"/>
-              <a:t>29</a:t>
+              <a:t>31</a:t>
             </a:fld>
             <a:endParaRPr lang="ko-KR" altLang="en-US"/>
           </a:p>
@@ -3267,7 +3611,7 @@
 </p:notes>
 </file>
 
-<file path=ppt/notesSlides/notesSlide27.xml><?xml version="1.0" encoding="utf-8"?>
+<file path=ppt/notesSlides/notesSlide29.xml><?xml version="1.0" encoding="utf-8"?>
 <p:notes xmlns:a="http://schemas.openxmlformats.org/drawingml/2006/main" xmlns:r="http://schemas.openxmlformats.org/officeDocument/2006/relationships" xmlns:p="http://schemas.openxmlformats.org/presentationml/2006/main">
   <p:cSld>
     <p:spTree>
@@ -3356,7 +3700,7 @@
           <a:p>
             <a:fld id="{433C9518-700F-4811-95BB-24DAF3FA92F2}" type="slidenum">
               <a:rPr lang="ko-KR" altLang="en-US" smtClean="0"/>
-              <a:t>30</a:t>
+              <a:t>32</a:t>
             </a:fld>
             <a:endParaRPr lang="ko-KR" altLang="en-US"/>
           </a:p>
@@ -3366,222 +3710,6 @@
     <p:extLst>
       <p:ext uri="{BB962C8B-B14F-4D97-AF65-F5344CB8AC3E}">
         <p14:creationId xmlns:p14="http://schemas.microsoft.com/office/powerpoint/2010/main" val="2578210949"/>
-      </p:ext>
-    </p:extLst>
-  </p:cSld>
-  <p:clrMapOvr>
-    <a:masterClrMapping/>
-  </p:clrMapOvr>
-</p:notes>
-</file>
-
-<file path=ppt/notesSlides/notesSlide28.xml><?xml version="1.0" encoding="utf-8"?>
-<p:notes xmlns:a="http://schemas.openxmlformats.org/drawingml/2006/main" xmlns:r="http://schemas.openxmlformats.org/officeDocument/2006/relationships" xmlns:p="http://schemas.openxmlformats.org/presentationml/2006/main">
-  <p:cSld>
-    <p:spTree>
-      <p:nvGrpSpPr>
-        <p:cNvPr id="1" name="">
-          <a:extLst>
-            <a:ext uri="{FF2B5EF4-FFF2-40B4-BE49-F238E27FC236}">
-              <a16:creationId xmlns:a16="http://schemas.microsoft.com/office/drawing/2014/main" id="{FBA59E3B-3D2F-9DC3-D40B-07AAB67B6FE7}"/>
-            </a:ext>
-          </a:extLst>
-        </p:cNvPr>
-        <p:cNvGrpSpPr/>
-        <p:nvPr/>
-      </p:nvGrpSpPr>
-      <p:grpSpPr>
-        <a:xfrm>
-          <a:off x="0" y="0"/>
-          <a:ext cx="0" cy="0"/>
-          <a:chOff x="0" y="0"/>
-          <a:chExt cx="0" cy="0"/>
-        </a:xfrm>
-      </p:grpSpPr>
-      <p:sp>
-        <p:nvSpPr>
-          <p:cNvPr id="2" name="슬라이드 이미지 개체 틀 1">
-            <a:extLst>
-              <a:ext uri="{FF2B5EF4-FFF2-40B4-BE49-F238E27FC236}">
-                <a16:creationId xmlns:a16="http://schemas.microsoft.com/office/drawing/2014/main" id="{71061D2B-F2C6-2703-8A04-C3C36FC065E1}"/>
-              </a:ext>
-            </a:extLst>
-          </p:cNvPr>
-          <p:cNvSpPr>
-            <a:spLocks noGrp="1" noRot="1" noChangeAspect="1"/>
-          </p:cNvSpPr>
-          <p:nvPr>
-            <p:ph type="sldImg"/>
-          </p:nvPr>
-        </p:nvSpPr>
-        <p:spPr/>
-      </p:sp>
-      <p:sp>
-        <p:nvSpPr>
-          <p:cNvPr id="3" name="슬라이드 노트 개체 틀 2">
-            <a:extLst>
-              <a:ext uri="{FF2B5EF4-FFF2-40B4-BE49-F238E27FC236}">
-                <a16:creationId xmlns:a16="http://schemas.microsoft.com/office/drawing/2014/main" id="{8FE12116-01AE-737B-BF1F-EBA70485FF79}"/>
-              </a:ext>
-            </a:extLst>
-          </p:cNvPr>
-          <p:cNvSpPr>
-            <a:spLocks noGrp="1"/>
-          </p:cNvSpPr>
-          <p:nvPr>
-            <p:ph type="body" idx="1"/>
-          </p:nvPr>
-        </p:nvSpPr>
-        <p:spPr/>
-        <p:txBody>
-          <a:bodyPr/>
-          <a:lstStyle/>
-          <a:p>
-            <a:endParaRPr lang="ko-KR" altLang="en-US" dirty="0"/>
-          </a:p>
-        </p:txBody>
-      </p:sp>
-      <p:sp>
-        <p:nvSpPr>
-          <p:cNvPr id="4" name="슬라이드 번호 개체 틀 3">
-            <a:extLst>
-              <a:ext uri="{FF2B5EF4-FFF2-40B4-BE49-F238E27FC236}">
-                <a16:creationId xmlns:a16="http://schemas.microsoft.com/office/drawing/2014/main" id="{DDA9BAEA-192D-7A89-D611-378392EF7A37}"/>
-              </a:ext>
-            </a:extLst>
-          </p:cNvPr>
-          <p:cNvSpPr>
-            <a:spLocks noGrp="1"/>
-          </p:cNvSpPr>
-          <p:nvPr>
-            <p:ph type="sldNum" sz="quarter" idx="5"/>
-          </p:nvPr>
-        </p:nvSpPr>
-        <p:spPr/>
-        <p:txBody>
-          <a:bodyPr/>
-          <a:lstStyle/>
-          <a:p>
-            <a:fld id="{433C9518-700F-4811-95BB-24DAF3FA92F2}" type="slidenum">
-              <a:rPr lang="ko-KR" altLang="en-US" smtClean="0"/>
-              <a:t>31</a:t>
-            </a:fld>
-            <a:endParaRPr lang="ko-KR" altLang="en-US"/>
-          </a:p>
-        </p:txBody>
-      </p:sp>
-    </p:spTree>
-    <p:extLst>
-      <p:ext uri="{BB962C8B-B14F-4D97-AF65-F5344CB8AC3E}">
-        <p14:creationId xmlns:p14="http://schemas.microsoft.com/office/powerpoint/2010/main" val="2167185356"/>
-      </p:ext>
-    </p:extLst>
-  </p:cSld>
-  <p:clrMapOvr>
-    <a:masterClrMapping/>
-  </p:clrMapOvr>
-</p:notes>
-</file>
-
-<file path=ppt/notesSlides/notesSlide29.xml><?xml version="1.0" encoding="utf-8"?>
-<p:notes xmlns:a="http://schemas.openxmlformats.org/drawingml/2006/main" xmlns:r="http://schemas.openxmlformats.org/officeDocument/2006/relationships" xmlns:p="http://schemas.openxmlformats.org/presentationml/2006/main">
-  <p:cSld>
-    <p:spTree>
-      <p:nvGrpSpPr>
-        <p:cNvPr id="1" name="">
-          <a:extLst>
-            <a:ext uri="{FF2B5EF4-FFF2-40B4-BE49-F238E27FC236}">
-              <a16:creationId xmlns:a16="http://schemas.microsoft.com/office/drawing/2014/main" id="{74BB58D9-1E7B-8D02-EE5C-019730E14E85}"/>
-            </a:ext>
-          </a:extLst>
-        </p:cNvPr>
-        <p:cNvGrpSpPr/>
-        <p:nvPr/>
-      </p:nvGrpSpPr>
-      <p:grpSpPr>
-        <a:xfrm>
-          <a:off x="0" y="0"/>
-          <a:ext cx="0" cy="0"/>
-          <a:chOff x="0" y="0"/>
-          <a:chExt cx="0" cy="0"/>
-        </a:xfrm>
-      </p:grpSpPr>
-      <p:sp>
-        <p:nvSpPr>
-          <p:cNvPr id="2" name="슬라이드 이미지 개체 틀 1">
-            <a:extLst>
-              <a:ext uri="{FF2B5EF4-FFF2-40B4-BE49-F238E27FC236}">
-                <a16:creationId xmlns:a16="http://schemas.microsoft.com/office/drawing/2014/main" id="{834AE8D9-C875-820E-D04A-0F4946EDFB2F}"/>
-              </a:ext>
-            </a:extLst>
-          </p:cNvPr>
-          <p:cNvSpPr>
-            <a:spLocks noGrp="1" noRot="1" noChangeAspect="1"/>
-          </p:cNvSpPr>
-          <p:nvPr>
-            <p:ph type="sldImg"/>
-          </p:nvPr>
-        </p:nvSpPr>
-        <p:spPr/>
-      </p:sp>
-      <p:sp>
-        <p:nvSpPr>
-          <p:cNvPr id="3" name="슬라이드 노트 개체 틀 2">
-            <a:extLst>
-              <a:ext uri="{FF2B5EF4-FFF2-40B4-BE49-F238E27FC236}">
-                <a16:creationId xmlns:a16="http://schemas.microsoft.com/office/drawing/2014/main" id="{A0A96155-5604-4EC0-A2C2-2D30699D9D1B}"/>
-              </a:ext>
-            </a:extLst>
-          </p:cNvPr>
-          <p:cNvSpPr>
-            <a:spLocks noGrp="1"/>
-          </p:cNvSpPr>
-          <p:nvPr>
-            <p:ph type="body" idx="1"/>
-          </p:nvPr>
-        </p:nvSpPr>
-        <p:spPr/>
-        <p:txBody>
-          <a:bodyPr/>
-          <a:lstStyle/>
-          <a:p>
-            <a:endParaRPr lang="ko-KR" altLang="en-US" dirty="0"/>
-          </a:p>
-        </p:txBody>
-      </p:sp>
-      <p:sp>
-        <p:nvSpPr>
-          <p:cNvPr id="4" name="슬라이드 번호 개체 틀 3">
-            <a:extLst>
-              <a:ext uri="{FF2B5EF4-FFF2-40B4-BE49-F238E27FC236}">
-                <a16:creationId xmlns:a16="http://schemas.microsoft.com/office/drawing/2014/main" id="{91A954AA-74F0-521C-8EB2-F497FBCA4437}"/>
-              </a:ext>
-            </a:extLst>
-          </p:cNvPr>
-          <p:cNvSpPr>
-            <a:spLocks noGrp="1"/>
-          </p:cNvSpPr>
-          <p:nvPr>
-            <p:ph type="sldNum" sz="quarter" idx="5"/>
-          </p:nvPr>
-        </p:nvSpPr>
-        <p:spPr/>
-        <p:txBody>
-          <a:bodyPr/>
-          <a:lstStyle/>
-          <a:p>
-            <a:fld id="{433C9518-700F-4811-95BB-24DAF3FA92F2}" type="slidenum">
-              <a:rPr lang="ko-KR" altLang="en-US" smtClean="0"/>
-              <a:t>32</a:t>
-            </a:fld>
-            <a:endParaRPr lang="ko-KR" altLang="en-US"/>
-          </a:p>
-        </p:txBody>
-      </p:sp>
-    </p:spTree>
-    <p:extLst>
-      <p:ext uri="{BB962C8B-B14F-4D97-AF65-F5344CB8AC3E}">
-        <p14:creationId xmlns:p14="http://schemas.microsoft.com/office/powerpoint/2010/main" val="380065631"/>
       </p:ext>
     </p:extLst>
   </p:cSld>
@@ -3683,6 +3811,222 @@
         <p:cNvPr id="1" name="">
           <a:extLst>
             <a:ext uri="{FF2B5EF4-FFF2-40B4-BE49-F238E27FC236}">
+              <a16:creationId xmlns:a16="http://schemas.microsoft.com/office/drawing/2014/main" id="{FBA59E3B-3D2F-9DC3-D40B-07AAB67B6FE7}"/>
+            </a:ext>
+          </a:extLst>
+        </p:cNvPr>
+        <p:cNvGrpSpPr/>
+        <p:nvPr/>
+      </p:nvGrpSpPr>
+      <p:grpSpPr>
+        <a:xfrm>
+          <a:off x="0" y="0"/>
+          <a:ext cx="0" cy="0"/>
+          <a:chOff x="0" y="0"/>
+          <a:chExt cx="0" cy="0"/>
+        </a:xfrm>
+      </p:grpSpPr>
+      <p:sp>
+        <p:nvSpPr>
+          <p:cNvPr id="2" name="슬라이드 이미지 개체 틀 1">
+            <a:extLst>
+              <a:ext uri="{FF2B5EF4-FFF2-40B4-BE49-F238E27FC236}">
+                <a16:creationId xmlns:a16="http://schemas.microsoft.com/office/drawing/2014/main" id="{71061D2B-F2C6-2703-8A04-C3C36FC065E1}"/>
+              </a:ext>
+            </a:extLst>
+          </p:cNvPr>
+          <p:cNvSpPr>
+            <a:spLocks noGrp="1" noRot="1" noChangeAspect="1"/>
+          </p:cNvSpPr>
+          <p:nvPr>
+            <p:ph type="sldImg"/>
+          </p:nvPr>
+        </p:nvSpPr>
+        <p:spPr/>
+      </p:sp>
+      <p:sp>
+        <p:nvSpPr>
+          <p:cNvPr id="3" name="슬라이드 노트 개체 틀 2">
+            <a:extLst>
+              <a:ext uri="{FF2B5EF4-FFF2-40B4-BE49-F238E27FC236}">
+                <a16:creationId xmlns:a16="http://schemas.microsoft.com/office/drawing/2014/main" id="{8FE12116-01AE-737B-BF1F-EBA70485FF79}"/>
+              </a:ext>
+            </a:extLst>
+          </p:cNvPr>
+          <p:cNvSpPr>
+            <a:spLocks noGrp="1"/>
+          </p:cNvSpPr>
+          <p:nvPr>
+            <p:ph type="body" idx="1"/>
+          </p:nvPr>
+        </p:nvSpPr>
+        <p:spPr/>
+        <p:txBody>
+          <a:bodyPr/>
+          <a:lstStyle/>
+          <a:p>
+            <a:endParaRPr lang="ko-KR" altLang="en-US" dirty="0"/>
+          </a:p>
+        </p:txBody>
+      </p:sp>
+      <p:sp>
+        <p:nvSpPr>
+          <p:cNvPr id="4" name="슬라이드 번호 개체 틀 3">
+            <a:extLst>
+              <a:ext uri="{FF2B5EF4-FFF2-40B4-BE49-F238E27FC236}">
+                <a16:creationId xmlns:a16="http://schemas.microsoft.com/office/drawing/2014/main" id="{DDA9BAEA-192D-7A89-D611-378392EF7A37}"/>
+              </a:ext>
+            </a:extLst>
+          </p:cNvPr>
+          <p:cNvSpPr>
+            <a:spLocks noGrp="1"/>
+          </p:cNvSpPr>
+          <p:nvPr>
+            <p:ph type="sldNum" sz="quarter" idx="5"/>
+          </p:nvPr>
+        </p:nvSpPr>
+        <p:spPr/>
+        <p:txBody>
+          <a:bodyPr/>
+          <a:lstStyle/>
+          <a:p>
+            <a:fld id="{433C9518-700F-4811-95BB-24DAF3FA92F2}" type="slidenum">
+              <a:rPr lang="ko-KR" altLang="en-US" smtClean="0"/>
+              <a:t>33</a:t>
+            </a:fld>
+            <a:endParaRPr lang="ko-KR" altLang="en-US"/>
+          </a:p>
+        </p:txBody>
+      </p:sp>
+    </p:spTree>
+    <p:extLst>
+      <p:ext uri="{BB962C8B-B14F-4D97-AF65-F5344CB8AC3E}">
+        <p14:creationId xmlns:p14="http://schemas.microsoft.com/office/powerpoint/2010/main" val="2167185356"/>
+      </p:ext>
+    </p:extLst>
+  </p:cSld>
+  <p:clrMapOvr>
+    <a:masterClrMapping/>
+  </p:clrMapOvr>
+</p:notes>
+</file>
+
+<file path=ppt/notesSlides/notesSlide31.xml><?xml version="1.0" encoding="utf-8"?>
+<p:notes xmlns:a="http://schemas.openxmlformats.org/drawingml/2006/main" xmlns:r="http://schemas.openxmlformats.org/officeDocument/2006/relationships" xmlns:p="http://schemas.openxmlformats.org/presentationml/2006/main">
+  <p:cSld>
+    <p:spTree>
+      <p:nvGrpSpPr>
+        <p:cNvPr id="1" name="">
+          <a:extLst>
+            <a:ext uri="{FF2B5EF4-FFF2-40B4-BE49-F238E27FC236}">
+              <a16:creationId xmlns:a16="http://schemas.microsoft.com/office/drawing/2014/main" id="{74BB58D9-1E7B-8D02-EE5C-019730E14E85}"/>
+            </a:ext>
+          </a:extLst>
+        </p:cNvPr>
+        <p:cNvGrpSpPr/>
+        <p:nvPr/>
+      </p:nvGrpSpPr>
+      <p:grpSpPr>
+        <a:xfrm>
+          <a:off x="0" y="0"/>
+          <a:ext cx="0" cy="0"/>
+          <a:chOff x="0" y="0"/>
+          <a:chExt cx="0" cy="0"/>
+        </a:xfrm>
+      </p:grpSpPr>
+      <p:sp>
+        <p:nvSpPr>
+          <p:cNvPr id="2" name="슬라이드 이미지 개체 틀 1">
+            <a:extLst>
+              <a:ext uri="{FF2B5EF4-FFF2-40B4-BE49-F238E27FC236}">
+                <a16:creationId xmlns:a16="http://schemas.microsoft.com/office/drawing/2014/main" id="{834AE8D9-C875-820E-D04A-0F4946EDFB2F}"/>
+              </a:ext>
+            </a:extLst>
+          </p:cNvPr>
+          <p:cNvSpPr>
+            <a:spLocks noGrp="1" noRot="1" noChangeAspect="1"/>
+          </p:cNvSpPr>
+          <p:nvPr>
+            <p:ph type="sldImg"/>
+          </p:nvPr>
+        </p:nvSpPr>
+        <p:spPr/>
+      </p:sp>
+      <p:sp>
+        <p:nvSpPr>
+          <p:cNvPr id="3" name="슬라이드 노트 개체 틀 2">
+            <a:extLst>
+              <a:ext uri="{FF2B5EF4-FFF2-40B4-BE49-F238E27FC236}">
+                <a16:creationId xmlns:a16="http://schemas.microsoft.com/office/drawing/2014/main" id="{A0A96155-5604-4EC0-A2C2-2D30699D9D1B}"/>
+              </a:ext>
+            </a:extLst>
+          </p:cNvPr>
+          <p:cNvSpPr>
+            <a:spLocks noGrp="1"/>
+          </p:cNvSpPr>
+          <p:nvPr>
+            <p:ph type="body" idx="1"/>
+          </p:nvPr>
+        </p:nvSpPr>
+        <p:spPr/>
+        <p:txBody>
+          <a:bodyPr/>
+          <a:lstStyle/>
+          <a:p>
+            <a:endParaRPr lang="ko-KR" altLang="en-US" dirty="0"/>
+          </a:p>
+        </p:txBody>
+      </p:sp>
+      <p:sp>
+        <p:nvSpPr>
+          <p:cNvPr id="4" name="슬라이드 번호 개체 틀 3">
+            <a:extLst>
+              <a:ext uri="{FF2B5EF4-FFF2-40B4-BE49-F238E27FC236}">
+                <a16:creationId xmlns:a16="http://schemas.microsoft.com/office/drawing/2014/main" id="{91A954AA-74F0-521C-8EB2-F497FBCA4437}"/>
+              </a:ext>
+            </a:extLst>
+          </p:cNvPr>
+          <p:cNvSpPr>
+            <a:spLocks noGrp="1"/>
+          </p:cNvSpPr>
+          <p:nvPr>
+            <p:ph type="sldNum" sz="quarter" idx="5"/>
+          </p:nvPr>
+        </p:nvSpPr>
+        <p:spPr/>
+        <p:txBody>
+          <a:bodyPr/>
+          <a:lstStyle/>
+          <a:p>
+            <a:fld id="{433C9518-700F-4811-95BB-24DAF3FA92F2}" type="slidenum">
+              <a:rPr lang="ko-KR" altLang="en-US" smtClean="0"/>
+              <a:t>34</a:t>
+            </a:fld>
+            <a:endParaRPr lang="ko-KR" altLang="en-US"/>
+          </a:p>
+        </p:txBody>
+      </p:sp>
+    </p:spTree>
+    <p:extLst>
+      <p:ext uri="{BB962C8B-B14F-4D97-AF65-F5344CB8AC3E}">
+        <p14:creationId xmlns:p14="http://schemas.microsoft.com/office/powerpoint/2010/main" val="380065631"/>
+      </p:ext>
+    </p:extLst>
+  </p:cSld>
+  <p:clrMapOvr>
+    <a:masterClrMapping/>
+  </p:clrMapOvr>
+</p:notes>
+</file>
+
+<file path=ppt/notesSlides/notesSlide32.xml><?xml version="1.0" encoding="utf-8"?>
+<p:notes xmlns:a="http://schemas.openxmlformats.org/drawingml/2006/main" xmlns:r="http://schemas.openxmlformats.org/officeDocument/2006/relationships" xmlns:p="http://schemas.openxmlformats.org/presentationml/2006/main">
+  <p:cSld>
+    <p:spTree>
+      <p:nvGrpSpPr>
+        <p:cNvPr id="1" name="">
+          <a:extLst>
+            <a:ext uri="{FF2B5EF4-FFF2-40B4-BE49-F238E27FC236}">
               <a16:creationId xmlns:a16="http://schemas.microsoft.com/office/drawing/2014/main" id="{F1A16686-73B2-2FD0-2673-9BDC1D000F2A}"/>
             </a:ext>
           </a:extLst>
@@ -3764,7 +4108,7 @@
           <a:p>
             <a:fld id="{433C9518-700F-4811-95BB-24DAF3FA92F2}" type="slidenum">
               <a:rPr lang="ko-KR" altLang="en-US" smtClean="0"/>
-              <a:t>33</a:t>
+              <a:t>35</a:t>
             </a:fld>
             <a:endParaRPr lang="ko-KR" altLang="en-US"/>
           </a:p>
@@ -3783,7 +4127,7 @@
 </p:notes>
 </file>
 
-<file path=ppt/notesSlides/notesSlide31.xml><?xml version="1.0" encoding="utf-8"?>
+<file path=ppt/notesSlides/notesSlide33.xml><?xml version="1.0" encoding="utf-8"?>
 <p:notes xmlns:a="http://schemas.openxmlformats.org/drawingml/2006/main" xmlns:r="http://schemas.openxmlformats.org/officeDocument/2006/relationships" xmlns:p="http://schemas.openxmlformats.org/presentationml/2006/main">
   <p:cSld>
     <p:spTree>
@@ -3848,7 +4192,7 @@
           <a:p>
             <a:fld id="{433C9518-700F-4811-95BB-24DAF3FA92F2}" type="slidenum">
               <a:rPr lang="ko-KR" altLang="en-US" smtClean="0"/>
-              <a:t>34</a:t>
+              <a:t>36</a:t>
             </a:fld>
             <a:endParaRPr lang="ko-KR" altLang="en-US"/>
           </a:p>
@@ -3867,7 +4211,7 @@
 </p:notes>
 </file>
 
-<file path=ppt/notesSlides/notesSlide32.xml><?xml version="1.0" encoding="utf-8"?>
+<file path=ppt/notesSlides/notesSlide34.xml><?xml version="1.0" encoding="utf-8"?>
 <p:notes xmlns:a="http://schemas.openxmlformats.org/drawingml/2006/main" xmlns:r="http://schemas.openxmlformats.org/officeDocument/2006/relationships" xmlns:p="http://schemas.openxmlformats.org/presentationml/2006/main">
   <p:cSld>
     <p:spTree>
@@ -3956,7 +4300,7 @@
           <a:p>
             <a:fld id="{433C9518-700F-4811-95BB-24DAF3FA92F2}" type="slidenum">
               <a:rPr lang="ko-KR" altLang="en-US" smtClean="0"/>
-              <a:t>35</a:t>
+              <a:t>37</a:t>
             </a:fld>
             <a:endParaRPr lang="ko-KR" altLang="en-US"/>
           </a:p>
@@ -3975,7 +4319,7 @@
 </p:notes>
 </file>
 
-<file path=ppt/notesSlides/notesSlide33.xml><?xml version="1.0" encoding="utf-8"?>
+<file path=ppt/notesSlides/notesSlide35.xml><?xml version="1.0" encoding="utf-8"?>
 <p:notes xmlns:a="http://schemas.openxmlformats.org/drawingml/2006/main" xmlns:r="http://schemas.openxmlformats.org/officeDocument/2006/relationships" xmlns:p="http://schemas.openxmlformats.org/presentationml/2006/main">
   <p:cSld>
     <p:spTree>
@@ -4064,7 +4408,7 @@
           <a:p>
             <a:fld id="{433C9518-700F-4811-95BB-24DAF3FA92F2}" type="slidenum">
               <a:rPr lang="ko-KR" altLang="en-US" smtClean="0"/>
-              <a:t>36</a:t>
+              <a:t>38</a:t>
             </a:fld>
             <a:endParaRPr lang="ko-KR" altLang="en-US"/>
           </a:p>
@@ -4083,7 +4427,7 @@
 </p:notes>
 </file>
 
-<file path=ppt/notesSlides/notesSlide34.xml><?xml version="1.0" encoding="utf-8"?>
+<file path=ppt/notesSlides/notesSlide36.xml><?xml version="1.0" encoding="utf-8"?>
 <p:notes xmlns:a="http://schemas.openxmlformats.org/drawingml/2006/main" xmlns:r="http://schemas.openxmlformats.org/officeDocument/2006/relationships" xmlns:p="http://schemas.openxmlformats.org/presentationml/2006/main">
   <p:cSld>
     <p:spTree>
@@ -4172,7 +4516,7 @@
           <a:p>
             <a:fld id="{433C9518-700F-4811-95BB-24DAF3FA92F2}" type="slidenum">
               <a:rPr lang="ko-KR" altLang="en-US" smtClean="0"/>
-              <a:t>37</a:t>
+              <a:t>39</a:t>
             </a:fld>
             <a:endParaRPr lang="ko-KR" altLang="en-US"/>
           </a:p>
@@ -4191,7 +4535,7 @@
 </p:notes>
 </file>
 
-<file path=ppt/notesSlides/notesSlide35.xml><?xml version="1.0" encoding="utf-8"?>
+<file path=ppt/notesSlides/notesSlide37.xml><?xml version="1.0" encoding="utf-8"?>
 <p:notes xmlns:a="http://schemas.openxmlformats.org/drawingml/2006/main" xmlns:r="http://schemas.openxmlformats.org/officeDocument/2006/relationships" xmlns:p="http://schemas.openxmlformats.org/presentationml/2006/main">
   <p:cSld>
     <p:spTree>
@@ -4280,7 +4624,7 @@
           <a:p>
             <a:fld id="{433C9518-700F-4811-95BB-24DAF3FA92F2}" type="slidenum">
               <a:rPr lang="ko-KR" altLang="en-US" smtClean="0"/>
-              <a:t>38</a:t>
+              <a:t>40</a:t>
             </a:fld>
             <a:endParaRPr lang="ko-KR" altLang="en-US"/>
           </a:p>
@@ -4299,7 +4643,7 @@
 </p:notes>
 </file>
 
-<file path=ppt/notesSlides/notesSlide36.xml><?xml version="1.0" encoding="utf-8"?>
+<file path=ppt/notesSlides/notesSlide38.xml><?xml version="1.0" encoding="utf-8"?>
 <p:notes xmlns:a="http://schemas.openxmlformats.org/drawingml/2006/main" xmlns:r="http://schemas.openxmlformats.org/officeDocument/2006/relationships" xmlns:p="http://schemas.openxmlformats.org/presentationml/2006/main">
   <p:cSld>
     <p:spTree>
@@ -4364,7 +4708,7 @@
           <a:p>
             <a:fld id="{433C9518-700F-4811-95BB-24DAF3FA92F2}" type="slidenum">
               <a:rPr lang="ko-KR" altLang="en-US" smtClean="0"/>
-              <a:t>39</a:t>
+              <a:t>41</a:t>
             </a:fld>
             <a:endParaRPr lang="ko-KR" altLang="en-US"/>
           </a:p>
@@ -4383,7 +4727,7 @@
 </p:notes>
 </file>
 
-<file path=ppt/notesSlides/notesSlide37.xml><?xml version="1.0" encoding="utf-8"?>
+<file path=ppt/notesSlides/notesSlide39.xml><?xml version="1.0" encoding="utf-8"?>
 <p:notes xmlns:a="http://schemas.openxmlformats.org/drawingml/2006/main" xmlns:r="http://schemas.openxmlformats.org/officeDocument/2006/relationships" xmlns:p="http://schemas.openxmlformats.org/presentationml/2006/main" showMasterSp="0" showMasterPhAnim="0">
   <p:cSld>
     <p:spTree>
@@ -4520,7 +4864,7 @@
             </a:pPr>
             <a:fld id="{00000000-1234-1234-1234-123412341234}" type="slidenum">
               <a:rPr lang="en-US"/>
-              <a:t>40</a:t>
+              <a:t>42</a:t>
             </a:fld>
             <a:endParaRPr/>
           </a:p>
@@ -8869,7 +9213,7 @@
             </a:r>
             <a:r>
               <a:rPr lang="en-US" altLang="ko-KR" dirty="0"/>
-              <a:t>1,673</a:t>
+              <a:t>1,365</a:t>
             </a:r>
             <a:r>
               <a:rPr lang="ko-KR" altLang="en-US" dirty="0"/>
@@ -8917,7 +9261,7 @@
             </a:r>
             <a:r>
               <a:rPr lang="en-US" altLang="ko-KR" dirty="0"/>
-              <a:t>TAMA outlier(0, 1)</a:t>
+              <a:t>TAMA outlier(0, 1), BMI</a:t>
             </a:r>
             <a:r>
               <a:rPr lang="ko-KR" altLang="en-US" dirty="0"/>
@@ -8925,7 +9269,7 @@
             </a:r>
             <a:r>
               <a:rPr lang="en-US" altLang="ko-KR" dirty="0"/>
-              <a:t>: 2,023</a:t>
+              <a:t>: 1,642</a:t>
             </a:r>
           </a:p>
           <a:p>
@@ -8940,7 +9284,7 @@
             </a:r>
             <a:r>
               <a:rPr lang="en-US" altLang="ko-KR" dirty="0"/>
-              <a:t>: 2,023 </a:t>
+              <a:t>: 1,642 </a:t>
             </a:r>
             <a:r>
               <a:rPr lang="ko-KR" altLang="en-US" dirty="0"/>
@@ -8956,22 +9300,7 @@
             </a:r>
             <a:r>
               <a:rPr lang="en-US" altLang="ko-KR" dirty="0"/>
-              <a:t>: 1,673</a:t>
-            </a:r>
-          </a:p>
-          <a:p>
-            <a:pPr lvl="1"/>
-            <a:r>
-              <a:rPr lang="en-US" altLang="ko-KR" dirty="0"/>
-              <a:t>BMI </a:t>
-            </a:r>
-            <a:r>
-              <a:rPr lang="ko-KR" altLang="en-US" dirty="0"/>
-              <a:t>데이터 추가 </a:t>
-            </a:r>
-            <a:r>
-              <a:rPr lang="en-US" altLang="ko-KR" dirty="0"/>
-              <a:t>: 1,421</a:t>
+              <a:t>: 1,365</a:t>
             </a:r>
           </a:p>
         </p:txBody>
@@ -9008,10 +9337,10 @@
       </p:grpSpPr>
       <p:pic>
         <p:nvPicPr>
-          <p:cNvPr id="6" name="그림 5">
+          <p:cNvPr id="7" name="그림 6">
             <a:extLst>
               <a:ext uri="{FF2B5EF4-FFF2-40B4-BE49-F238E27FC236}">
-                <a16:creationId xmlns:a16="http://schemas.microsoft.com/office/drawing/2014/main" id="{E0F76B1F-ACFD-F8B9-7EB7-7F91F47F3EB9}"/>
+                <a16:creationId xmlns:a16="http://schemas.microsoft.com/office/drawing/2014/main" id="{589A79D3-6C6E-4C9C-5192-74A2A746330D}"/>
               </a:ext>
             </a:extLst>
           </p:cNvPr>
@@ -9034,8 +9363,8 @@
         </p:blipFill>
         <p:spPr>
           <a:xfrm>
-            <a:off x="-1" y="1811868"/>
-            <a:ext cx="7363536" cy="4427050"/>
+            <a:off x="88823" y="1811867"/>
+            <a:ext cx="7378419" cy="4427051"/>
           </a:xfrm>
           <a:prstGeom prst="rect">
             <a:avLst/>
@@ -9154,42 +9483,6 @@
       </p:sp>
       <p:pic>
         <p:nvPicPr>
-          <p:cNvPr id="5" name="그림 4">
-            <a:extLst>
-              <a:ext uri="{FF2B5EF4-FFF2-40B4-BE49-F238E27FC236}">
-                <a16:creationId xmlns:a16="http://schemas.microsoft.com/office/drawing/2014/main" id="{0D09B646-F084-4AEA-BEEF-1A6E6900AD82}"/>
-              </a:ext>
-            </a:extLst>
-          </p:cNvPr>
-          <p:cNvPicPr>
-            <a:picLocks noChangeAspect="1"/>
-          </p:cNvPicPr>
-          <p:nvPr/>
-        </p:nvPicPr>
-        <p:blipFill>
-          <a:blip r:embed="rId4">
-            <a:extLst>
-              <a:ext uri="{28A0092B-C50C-407E-A947-70E740481C1C}">
-                <a14:useLocalDpi xmlns:a14="http://schemas.microsoft.com/office/drawing/2010/main" val="0"/>
-              </a:ext>
-            </a:extLst>
-          </a:blip>
-          <a:stretch>
-            <a:fillRect/>
-          </a:stretch>
-        </p:blipFill>
-        <p:spPr>
-          <a:xfrm>
-            <a:off x="0" y="1811868"/>
-            <a:ext cx="7363535" cy="4427050"/>
-          </a:xfrm>
-          <a:prstGeom prst="rect">
-            <a:avLst/>
-          </a:prstGeom>
-        </p:spPr>
-      </p:pic>
-      <p:pic>
-        <p:nvPicPr>
           <p:cNvPr id="8" name="그림 7">
             <a:extLst>
               <a:ext uri="{FF2B5EF4-FFF2-40B4-BE49-F238E27FC236}">
@@ -9203,7 +9496,7 @@
           <p:nvPr/>
         </p:nvPicPr>
         <p:blipFill>
-          <a:blip r:embed="rId5">
+          <a:blip r:embed="rId4">
             <a:extLst>
               <a:ext uri="{28A0092B-C50C-407E-A947-70E740481C1C}">
                 <a14:useLocalDpi xmlns:a14="http://schemas.microsoft.com/office/drawing/2010/main" val="0"/>
@@ -9698,7 +9991,7 @@
                   <a:latin typeface="KoPub돋움체 Bold" panose="00000800000000000000" pitchFamily="2" charset="-127"/>
                   <a:ea typeface="KoPub돋움체 Bold" panose="00000800000000000000" pitchFamily="2" charset="-127"/>
                 </a:rPr>
-                <a:t>637</a:t>
+                <a:t>638</a:t>
               </a:r>
               <a:r>
                 <a:rPr lang="ko-KR" altLang="en-US" sz="1600" b="1" dirty="0">
@@ -9858,7 +10151,7 @@
                   <a:latin typeface="KoPub돋움체 Bold" panose="00000800000000000000" pitchFamily="2" charset="-127"/>
                   <a:ea typeface="KoPub돋움체 Bold" panose="00000800000000000000" pitchFamily="2" charset="-127"/>
                 </a:rPr>
-                <a:t>632</a:t>
+                <a:t>631</a:t>
               </a:r>
               <a:r>
                 <a:rPr lang="ko-KR" altLang="en-US" sz="1600" b="1" dirty="0">
@@ -10466,7 +10759,7 @@
           <p:nvPr>
             <p:extLst>
               <p:ext uri="{D42A27DB-BD31-4B8C-83A1-F6EECF244321}">
-                <p14:modId xmlns:p14="http://schemas.microsoft.com/office/powerpoint/2010/main" val="4017498329"/>
+                <p14:modId xmlns:p14="http://schemas.microsoft.com/office/powerpoint/2010/main" val="1014930649"/>
               </p:ext>
             </p:extLst>
           </p:nvPr>
@@ -10794,8 +11087,25 @@
                           <a:latin typeface="KoPub돋움체 Medium" panose="00000600000000000000" pitchFamily="2" charset="-127"/>
                           <a:ea typeface="KoPub돋움체 Medium" panose="00000600000000000000" pitchFamily="2" charset="-127"/>
                         </a:rPr>
-                        <a:t>637</a:t>
-                      </a:r>
+                        <a:t>63</a:t>
+                      </a:r>
+                      <a:r>
+                        <a:rPr lang="en-US" sz="1200" dirty="0">
+                          <a:solidFill>
+                            <a:srgbClr val="1A1A2E"/>
+                          </a:solidFill>
+                          <a:latin typeface="KoPub돋움체 Medium" panose="00000600000000000000" pitchFamily="2" charset="-127"/>
+                          <a:ea typeface="KoPub돋움체 Medium" panose="00000600000000000000" pitchFamily="2" charset="-127"/>
+                        </a:rPr>
+                        <a:t>8</a:t>
+                      </a:r>
+                      <a:endParaRPr sz="1200" dirty="0">
+                        <a:solidFill>
+                          <a:srgbClr val="1A1A2E"/>
+                        </a:solidFill>
+                        <a:latin typeface="KoPub돋움체 Medium" panose="00000600000000000000" pitchFamily="2" charset="-127"/>
+                        <a:ea typeface="KoPub돋움체 Medium" panose="00000600000000000000" pitchFamily="2" charset="-127"/>
+                      </a:endParaRPr>
                     </a:p>
                   </a:txBody>
                   <a:tcPr anchor="ctr">
@@ -10982,15 +11292,32 @@
                     <a:p>
                       <a:pPr algn="ctr"/>
                       <a:r>
-                        <a:rPr sz="1200">
+                        <a:rPr sz="1200" dirty="0">
                           <a:solidFill>
                             <a:srgbClr val="1A1A2E"/>
                           </a:solidFill>
                           <a:latin typeface="KoPub돋움체 Medium" panose="00000600000000000000" pitchFamily="2" charset="-127"/>
                           <a:ea typeface="KoPub돋움체 Medium" panose="00000600000000000000" pitchFamily="2" charset="-127"/>
                         </a:rPr>
-                        <a:t>632</a:t>
-                      </a:r>
+                        <a:t>63</a:t>
+                      </a:r>
+                      <a:r>
+                        <a:rPr lang="en-US" sz="1200" dirty="0">
+                          <a:solidFill>
+                            <a:srgbClr val="1A1A2E"/>
+                          </a:solidFill>
+                          <a:latin typeface="KoPub돋움체 Medium" panose="00000600000000000000" pitchFamily="2" charset="-127"/>
+                          <a:ea typeface="KoPub돋움체 Medium" panose="00000600000000000000" pitchFamily="2" charset="-127"/>
+                        </a:rPr>
+                        <a:t>1</a:t>
+                      </a:r>
+                      <a:endParaRPr sz="1200" dirty="0">
+                        <a:solidFill>
+                          <a:srgbClr val="1A1A2E"/>
+                        </a:solidFill>
+                        <a:latin typeface="KoPub돋움체 Medium" panose="00000600000000000000" pitchFamily="2" charset="-127"/>
+                        <a:ea typeface="KoPub돋움체 Medium" panose="00000600000000000000" pitchFamily="2" charset="-127"/>
+                      </a:endParaRPr>
                     </a:p>
                   </a:txBody>
                   <a:tcPr anchor="ctr">
@@ -11469,7 +11796,7 @@
                   <a:latin typeface="KoPub돋움체 Bold" panose="00000800000000000000" pitchFamily="2" charset="-127"/>
                   <a:ea typeface="KoPub돋움체 Bold" panose="00000800000000000000" pitchFamily="2" charset="-127"/>
                 </a:rPr>
-                <a:t>317 / 1,269 = 25.0 %</a:t>
+                <a:t>314 / 1,269 = 24.7 %</a:t>
               </a:r>
               <a:endParaRPr sz="1200" b="0" i="0" dirty="0">
                 <a:solidFill>
@@ -11652,7 +11979,7 @@
             </a:r>
             <a:r>
               <a:rPr lang="en-US" altLang="ko-KR" dirty="0"/>
-              <a:t>TAMA </a:t>
+              <a:t>TAMA, BMI </a:t>
             </a:r>
             <a:r>
               <a:rPr lang="ko-KR" altLang="en-US" dirty="0" err="1"/>
@@ -11664,7 +11991,7 @@
             </a:r>
             <a:r>
               <a:rPr lang="en-US" altLang="ko-KR" dirty="0"/>
-              <a:t>: 2,257</a:t>
+              <a:t>: 2,254</a:t>
             </a:r>
           </a:p>
           <a:p>
@@ -11679,7 +12006,7 @@
             </a:r>
             <a:r>
               <a:rPr lang="en-US" altLang="ko-KR" dirty="0"/>
-              <a:t>: 2,257 </a:t>
+              <a:t>: 2,254 </a:t>
             </a:r>
             <a:r>
               <a:rPr lang="ko-KR" altLang="en-US" dirty="0"/>
@@ -11697,22 +12024,6 @@
               <a:rPr lang="en-US" altLang="ko-KR" dirty="0"/>
               <a:t>: 1,269</a:t>
             </a:r>
-          </a:p>
-          <a:p>
-            <a:pPr lvl="1"/>
-            <a:r>
-              <a:rPr lang="en-US" altLang="ko-KR" dirty="0"/>
-              <a:t>BMI </a:t>
-            </a:r>
-            <a:r>
-              <a:rPr lang="ko-KR" altLang="en-US" dirty="0"/>
-              <a:t>데이터 추가 </a:t>
-            </a:r>
-            <a:r>
-              <a:rPr lang="en-US" altLang="ko-KR"/>
-              <a:t>: 1,295</a:t>
-            </a:r>
-            <a:endParaRPr lang="en-US" altLang="ko-KR" dirty="0"/>
           </a:p>
         </p:txBody>
       </p:sp>
@@ -12238,6 +12549,771 @@
   <p:cSld>
     <p:spTree>
       <p:nvGrpSpPr>
+        <p:cNvPr id="1" name="">
+          <a:extLst>
+            <a:ext uri="{FF2B5EF4-FFF2-40B4-BE49-F238E27FC236}">
+              <a16:creationId xmlns:a16="http://schemas.microsoft.com/office/drawing/2014/main" id="{15D65BD2-87D5-C074-EAAD-D6924743BE39}"/>
+            </a:ext>
+          </a:extLst>
+        </p:cNvPr>
+        <p:cNvGrpSpPr/>
+        <p:nvPr/>
+      </p:nvGrpSpPr>
+      <p:grpSpPr>
+        <a:xfrm>
+          <a:off x="0" y="0"/>
+          <a:ext cx="0" cy="0"/>
+          <a:chOff x="0" y="0"/>
+          <a:chExt cx="0" cy="0"/>
+        </a:xfrm>
+      </p:grpSpPr>
+      <p:sp>
+        <p:nvSpPr>
+          <p:cNvPr id="2" name="제목 1">
+            <a:extLst>
+              <a:ext uri="{FF2B5EF4-FFF2-40B4-BE49-F238E27FC236}">
+                <a16:creationId xmlns:a16="http://schemas.microsoft.com/office/drawing/2014/main" id="{DE99DBCB-83BA-7224-5DD3-7B3DC26396B9}"/>
+              </a:ext>
+            </a:extLst>
+          </p:cNvPr>
+          <p:cNvSpPr>
+            <a:spLocks noGrp="1"/>
+          </p:cNvSpPr>
+          <p:nvPr>
+            <p:ph type="title"/>
+          </p:nvPr>
+        </p:nvSpPr>
+        <p:spPr/>
+        <p:txBody>
+          <a:bodyPr/>
+          <a:lstStyle/>
+          <a:p>
+            <a:r>
+              <a:rPr lang="en-US" altLang="ko-KR" dirty="0"/>
+              <a:t>3. </a:t>
+            </a:r>
+            <a:r>
+              <a:rPr lang="en-US" altLang="ko-KR"/>
+              <a:t>Detailed progress</a:t>
+            </a:r>
+            <a:endParaRPr lang="ko-KR" altLang="en-US" dirty="0"/>
+          </a:p>
+        </p:txBody>
+      </p:sp>
+      <p:sp>
+        <p:nvSpPr>
+          <p:cNvPr id="4" name="슬라이드 번호 개체 틀 3">
+            <a:extLst>
+              <a:ext uri="{FF2B5EF4-FFF2-40B4-BE49-F238E27FC236}">
+                <a16:creationId xmlns:a16="http://schemas.microsoft.com/office/drawing/2014/main" id="{C3B16D1B-6E8C-B89F-8724-DBEB8948FCFE}"/>
+              </a:ext>
+            </a:extLst>
+          </p:cNvPr>
+          <p:cNvSpPr>
+            <a:spLocks noGrp="1"/>
+          </p:cNvSpPr>
+          <p:nvPr>
+            <p:ph type="sldNum" sz="quarter" idx="12"/>
+          </p:nvPr>
+        </p:nvSpPr>
+        <p:spPr/>
+        <p:txBody>
+          <a:bodyPr/>
+          <a:lstStyle/>
+          <a:p>
+            <a:fld id="{9F4AF89A-28FA-47FA-B28F-9A9C6913CB7A}" type="slidenum">
+              <a:rPr lang="ko-KR" altLang="en-US" smtClean="0"/>
+              <a:t>16</a:t>
+            </a:fld>
+            <a:endParaRPr lang="ko-KR" altLang="en-US" dirty="0"/>
+          </a:p>
+        </p:txBody>
+      </p:sp>
+      <p:sp>
+        <p:nvSpPr>
+          <p:cNvPr id="14" name="내용 개체 틀 2">
+            <a:extLst>
+              <a:ext uri="{FF2B5EF4-FFF2-40B4-BE49-F238E27FC236}">
+                <a16:creationId xmlns:a16="http://schemas.microsoft.com/office/drawing/2014/main" id="{776DA4E4-00A3-E690-8224-10FF5B020CD9}"/>
+              </a:ext>
+            </a:extLst>
+          </p:cNvPr>
+          <p:cNvSpPr>
+            <a:spLocks noGrp="1"/>
+          </p:cNvSpPr>
+          <p:nvPr>
+            <p:ph idx="1"/>
+          </p:nvPr>
+        </p:nvSpPr>
+        <p:spPr>
+          <a:xfrm>
+            <a:off x="508000" y="897468"/>
+            <a:ext cx="11176000" cy="5063066"/>
+          </a:xfrm>
+        </p:spPr>
+        <p:txBody>
+          <a:bodyPr>
+            <a:normAutofit/>
+          </a:bodyPr>
+          <a:lstStyle/>
+          <a:p>
+            <a:r>
+              <a:rPr lang="ko-KR" altLang="en-US" b="1" dirty="0"/>
+              <a:t>수동 선택</a:t>
+            </a:r>
+            <a:endParaRPr lang="en-US" altLang="ko-KR" b="1" dirty="0"/>
+          </a:p>
+          <a:p>
+            <a:pPr lvl="1"/>
+            <a:r>
+              <a:rPr lang="ko-KR" altLang="en-US" dirty="0"/>
+              <a:t>전체 </a:t>
+            </a:r>
+            <a:r>
+              <a:rPr lang="en-US" altLang="ko-KR" dirty="0"/>
+              <a:t>AEC Feature vs</a:t>
+            </a:r>
+            <a:r>
+              <a:rPr lang="ko-KR" altLang="en-US" dirty="0"/>
+              <a:t> </a:t>
+            </a:r>
+            <a:r>
+              <a:rPr lang="en-US" altLang="ko-KR" dirty="0"/>
+              <a:t>TAMA</a:t>
+            </a:r>
+            <a:r>
+              <a:rPr lang="ko-KR" altLang="en-US" dirty="0"/>
+              <a:t>를 통해 </a:t>
+            </a:r>
+            <a:r>
+              <a:rPr lang="en-US" altLang="ko-KR" dirty="0"/>
+              <a:t>Pearson/Spearman </a:t>
+            </a:r>
+            <a:r>
+              <a:rPr lang="ko-KR" altLang="en-US" dirty="0"/>
+              <a:t>상관계수 </a:t>
+            </a:r>
+            <a:r>
+              <a:rPr lang="en-US" altLang="ko-KR" dirty="0"/>
+              <a:t>+ VIF </a:t>
+            </a:r>
+            <a:r>
+              <a:rPr lang="ko-KR" altLang="en-US" dirty="0"/>
+              <a:t>계산</a:t>
+            </a:r>
+            <a:endParaRPr lang="en-US" altLang="ko-KR" dirty="0"/>
+          </a:p>
+          <a:p>
+            <a:pPr lvl="1"/>
+            <a:r>
+              <a:rPr lang="ko-KR" altLang="en-US" dirty="0">
+                <a:solidFill>
+                  <a:srgbClr val="1A1A2E"/>
+                </a:solidFill>
+              </a:rPr>
+              <a:t>결과 확인 후 수동으로 </a:t>
+            </a:r>
+            <a:r>
+              <a:rPr lang="en-US" altLang="ko-KR" dirty="0">
+                <a:solidFill>
+                  <a:srgbClr val="1A1A2E"/>
+                </a:solidFill>
+              </a:rPr>
+              <a:t>feature </a:t>
+            </a:r>
+            <a:r>
+              <a:rPr lang="ko-KR" altLang="en-US" dirty="0">
+                <a:solidFill>
+                  <a:srgbClr val="1A1A2E"/>
+                </a:solidFill>
+              </a:rPr>
+              <a:t>선택</a:t>
+            </a:r>
+            <a:endParaRPr lang="en-US" altLang="ko-KR" dirty="0">
+              <a:solidFill>
+                <a:srgbClr val="1A1A2E"/>
+              </a:solidFill>
+            </a:endParaRPr>
+          </a:p>
+          <a:p>
+            <a:pPr lvl="1"/>
+            <a:r>
+              <a:rPr lang="ko-KR" altLang="en-US" dirty="0">
+                <a:solidFill>
+                  <a:srgbClr val="1A1A2E"/>
+                </a:solidFill>
+              </a:rPr>
+              <a:t>단일 병원</a:t>
+            </a:r>
+            <a:r>
+              <a:rPr lang="en-US" altLang="ko-KR" dirty="0">
+                <a:solidFill>
+                  <a:srgbClr val="1A1A2E"/>
+                </a:solidFill>
+              </a:rPr>
+              <a:t>(</a:t>
+            </a:r>
+            <a:r>
+              <a:rPr lang="ko-KR" altLang="en-US" dirty="0">
+                <a:solidFill>
+                  <a:srgbClr val="1A1A2E"/>
+                </a:solidFill>
+              </a:rPr>
+              <a:t>강남</a:t>
+            </a:r>
+            <a:r>
+              <a:rPr lang="en-US" altLang="ko-KR" dirty="0">
+                <a:solidFill>
+                  <a:srgbClr val="1A1A2E"/>
+                </a:solidFill>
+              </a:rPr>
+              <a:t>)</a:t>
+            </a:r>
+            <a:r>
+              <a:rPr lang="ko-KR" altLang="en-US" dirty="0">
+                <a:solidFill>
+                  <a:srgbClr val="1A1A2E"/>
+                </a:solidFill>
+              </a:rPr>
+              <a:t>만 분석</a:t>
+            </a:r>
+            <a:endParaRPr lang="en-US" altLang="ko-KR" dirty="0">
+              <a:solidFill>
+                <a:srgbClr val="1A1A2E"/>
+              </a:solidFill>
+            </a:endParaRPr>
+          </a:p>
+          <a:p>
+            <a:pPr lvl="1"/>
+            <a:r>
+              <a:rPr lang="ko-KR" altLang="en-US" dirty="0">
+                <a:solidFill>
+                  <a:srgbClr val="1A1A2E"/>
+                </a:solidFill>
+              </a:rPr>
+              <a:t>선택 결과</a:t>
+            </a:r>
+            <a:r>
+              <a:rPr lang="en-US" altLang="ko-KR" dirty="0">
+                <a:solidFill>
+                  <a:srgbClr val="1A1A2E"/>
+                </a:solidFill>
+              </a:rPr>
+              <a:t>:  ['mean', 'CV', 'skewness', '</a:t>
+            </a:r>
+            <a:r>
+              <a:rPr lang="en-US" altLang="ko-KR" dirty="0" err="1">
+                <a:solidFill>
+                  <a:srgbClr val="1A1A2E"/>
+                </a:solidFill>
+              </a:rPr>
+              <a:t>slope_abs_mean</a:t>
+            </a:r>
+            <a:r>
+              <a:rPr lang="en-US" altLang="ko-KR" dirty="0">
+                <a:solidFill>
+                  <a:srgbClr val="1A1A2E"/>
+                </a:solidFill>
+              </a:rPr>
+              <a:t>']</a:t>
+            </a:r>
+            <a:endParaRPr lang="ko-KR" altLang="en-US" dirty="0">
+              <a:solidFill>
+                <a:srgbClr val="1A1A2E"/>
+              </a:solidFill>
+            </a:endParaRPr>
+          </a:p>
+          <a:p>
+            <a:pPr lvl="1"/>
+            <a:endParaRPr lang="en-US" altLang="ko-KR" dirty="0">
+              <a:solidFill>
+                <a:srgbClr val="1A1A2E"/>
+              </a:solidFill>
+            </a:endParaRPr>
+          </a:p>
+          <a:p>
+            <a:pPr lvl="1"/>
+            <a:endParaRPr lang="en-US" altLang="ko-KR" dirty="0"/>
+          </a:p>
+        </p:txBody>
+      </p:sp>
+    </p:spTree>
+    <p:extLst>
+      <p:ext uri="{BB962C8B-B14F-4D97-AF65-F5344CB8AC3E}">
+        <p14:creationId xmlns:p14="http://schemas.microsoft.com/office/powerpoint/2010/main" val="4099219520"/>
+      </p:ext>
+    </p:extLst>
+  </p:cSld>
+  <p:clrMapOvr>
+    <a:masterClrMapping/>
+  </p:clrMapOvr>
+</p:sld>
+</file>
+
+<file path=ppt/slides/slide17.xml><?xml version="1.0" encoding="utf-8"?>
+<p:sld xmlns:a="http://schemas.openxmlformats.org/drawingml/2006/main" xmlns:r="http://schemas.openxmlformats.org/officeDocument/2006/relationships" xmlns:p="http://schemas.openxmlformats.org/presentationml/2006/main">
+  <p:cSld>
+    <p:spTree>
+      <p:nvGrpSpPr>
+        <p:cNvPr id="1" name="">
+          <a:extLst>
+            <a:ext uri="{FF2B5EF4-FFF2-40B4-BE49-F238E27FC236}">
+              <a16:creationId xmlns:a16="http://schemas.microsoft.com/office/drawing/2014/main" id="{1B896C61-0560-DFF9-6385-475BEB734F76}"/>
+            </a:ext>
+          </a:extLst>
+        </p:cNvPr>
+        <p:cNvGrpSpPr/>
+        <p:nvPr/>
+      </p:nvGrpSpPr>
+      <p:grpSpPr>
+        <a:xfrm>
+          <a:off x="0" y="0"/>
+          <a:ext cx="0" cy="0"/>
+          <a:chOff x="0" y="0"/>
+          <a:chExt cx="0" cy="0"/>
+        </a:xfrm>
+      </p:grpSpPr>
+      <p:sp>
+        <p:nvSpPr>
+          <p:cNvPr id="2" name="제목 1">
+            <a:extLst>
+              <a:ext uri="{FF2B5EF4-FFF2-40B4-BE49-F238E27FC236}">
+                <a16:creationId xmlns:a16="http://schemas.microsoft.com/office/drawing/2014/main" id="{49859806-4F9B-C58F-568A-671515A8C1AE}"/>
+              </a:ext>
+            </a:extLst>
+          </p:cNvPr>
+          <p:cNvSpPr>
+            <a:spLocks noGrp="1"/>
+          </p:cNvSpPr>
+          <p:nvPr>
+            <p:ph type="title"/>
+          </p:nvPr>
+        </p:nvSpPr>
+        <p:spPr/>
+        <p:txBody>
+          <a:bodyPr/>
+          <a:lstStyle/>
+          <a:p>
+            <a:r>
+              <a:rPr lang="en-US" altLang="ko-KR" dirty="0"/>
+              <a:t>3. </a:t>
+            </a:r>
+            <a:r>
+              <a:rPr lang="en-US" altLang="ko-KR"/>
+              <a:t>Detailed progress</a:t>
+            </a:r>
+            <a:endParaRPr lang="ko-KR" altLang="en-US" dirty="0"/>
+          </a:p>
+        </p:txBody>
+      </p:sp>
+      <p:sp>
+        <p:nvSpPr>
+          <p:cNvPr id="4" name="슬라이드 번호 개체 틀 3">
+            <a:extLst>
+              <a:ext uri="{FF2B5EF4-FFF2-40B4-BE49-F238E27FC236}">
+                <a16:creationId xmlns:a16="http://schemas.microsoft.com/office/drawing/2014/main" id="{6958E39A-2CEC-3AE7-D3E9-EFF1EDC0A002}"/>
+              </a:ext>
+            </a:extLst>
+          </p:cNvPr>
+          <p:cNvSpPr>
+            <a:spLocks noGrp="1"/>
+          </p:cNvSpPr>
+          <p:nvPr>
+            <p:ph type="sldNum" sz="quarter" idx="12"/>
+          </p:nvPr>
+        </p:nvSpPr>
+        <p:spPr/>
+        <p:txBody>
+          <a:bodyPr/>
+          <a:lstStyle/>
+          <a:p>
+            <a:fld id="{9F4AF89A-28FA-47FA-B28F-9A9C6913CB7A}" type="slidenum">
+              <a:rPr lang="ko-KR" altLang="en-US" smtClean="0"/>
+              <a:t>17</a:t>
+            </a:fld>
+            <a:endParaRPr lang="ko-KR" altLang="en-US" dirty="0"/>
+          </a:p>
+        </p:txBody>
+      </p:sp>
+      <p:sp>
+        <p:nvSpPr>
+          <p:cNvPr id="14" name="내용 개체 틀 2">
+            <a:extLst>
+              <a:ext uri="{FF2B5EF4-FFF2-40B4-BE49-F238E27FC236}">
+                <a16:creationId xmlns:a16="http://schemas.microsoft.com/office/drawing/2014/main" id="{30577F5C-B21D-CABE-BC19-67450CCB75A3}"/>
+              </a:ext>
+            </a:extLst>
+          </p:cNvPr>
+          <p:cNvSpPr>
+            <a:spLocks noGrp="1"/>
+          </p:cNvSpPr>
+          <p:nvPr>
+            <p:ph idx="1"/>
+          </p:nvPr>
+        </p:nvSpPr>
+        <p:spPr>
+          <a:xfrm>
+            <a:off x="508000" y="897468"/>
+            <a:ext cx="11176000" cy="5063066"/>
+          </a:xfrm>
+        </p:spPr>
+        <p:txBody>
+          <a:bodyPr>
+            <a:normAutofit/>
+          </a:bodyPr>
+          <a:lstStyle/>
+          <a:p>
+            <a:r>
+              <a:rPr lang="ko-KR" altLang="en-US" b="1" dirty="0"/>
+              <a:t>자동 파이프라인</a:t>
+            </a:r>
+            <a:endParaRPr lang="en-US" altLang="ko-KR" b="1" dirty="0"/>
+          </a:p>
+          <a:p>
+            <a:pPr lvl="1"/>
+            <a:r>
+              <a:rPr lang="en-US" altLang="ko-KR" dirty="0"/>
+              <a:t>Step 1 : Near-zero</a:t>
+            </a:r>
+            <a:r>
+              <a:rPr lang="ko-KR" altLang="en-US" dirty="0"/>
+              <a:t> </a:t>
+            </a:r>
+            <a:r>
+              <a:rPr lang="en-US" altLang="ko-KR" dirty="0"/>
+              <a:t>variance</a:t>
+            </a:r>
+            <a:r>
+              <a:rPr lang="ko-KR" altLang="en-US" dirty="0"/>
+              <a:t> 제거</a:t>
+            </a:r>
+            <a:r>
+              <a:rPr lang="en-US" altLang="ko-KR" dirty="0"/>
+              <a:t> (</a:t>
+            </a:r>
+            <a:r>
+              <a:rPr lang="ko-KR" altLang="en-US" dirty="0"/>
+              <a:t>표준화 후 </a:t>
+            </a:r>
+            <a:r>
+              <a:rPr lang="en-US" altLang="ko-KR" dirty="0"/>
+              <a:t>threshold=0.01)</a:t>
+            </a:r>
+          </a:p>
+          <a:p>
+            <a:pPr lvl="1"/>
+            <a:r>
+              <a:rPr lang="en-US" altLang="ko-KR" dirty="0"/>
+              <a:t>Step 2 : </a:t>
+            </a:r>
+            <a:r>
+              <a:rPr lang="en-US" altLang="ko-KR" dirty="0">
+                <a:solidFill>
+                  <a:srgbClr val="1A1A2E"/>
+                </a:solidFill>
+              </a:rPr>
+              <a:t>Pearson |r| ≥ 0.95 </a:t>
+            </a:r>
+            <a:r>
+              <a:rPr lang="ko-KR" altLang="en-US" dirty="0">
+                <a:solidFill>
+                  <a:srgbClr val="1A1A2E"/>
+                </a:solidFill>
+              </a:rPr>
+              <a:t>중복 피처 제거 </a:t>
+            </a:r>
+            <a:r>
+              <a:rPr lang="en-US" altLang="ko-KR" dirty="0">
+                <a:solidFill>
+                  <a:srgbClr val="1A1A2E"/>
+                </a:solidFill>
+              </a:rPr>
+              <a:t>(VIF</a:t>
+            </a:r>
+            <a:r>
+              <a:rPr lang="ko-KR" altLang="en-US" dirty="0">
+                <a:solidFill>
+                  <a:srgbClr val="1A1A2E"/>
+                </a:solidFill>
+              </a:rPr>
+              <a:t>는 참고용 보고만</a:t>
+            </a:r>
+            <a:r>
+              <a:rPr lang="en-US" altLang="ko-KR" dirty="0">
+                <a:solidFill>
+                  <a:srgbClr val="1A1A2E"/>
+                </a:solidFill>
+              </a:rPr>
+              <a:t>)</a:t>
+            </a:r>
+          </a:p>
+          <a:p>
+            <a:pPr lvl="1"/>
+            <a:r>
+              <a:rPr lang="en-US" altLang="ko-KR" dirty="0"/>
+              <a:t>Step 3 : </a:t>
+            </a:r>
+            <a:r>
+              <a:rPr lang="ko-KR" altLang="en-US" dirty="0" err="1">
+                <a:solidFill>
+                  <a:srgbClr val="1A1A2E"/>
+                </a:solidFill>
+              </a:rPr>
+              <a:t>단변량</a:t>
+            </a:r>
+            <a:r>
+              <a:rPr lang="ko-KR" altLang="en-US" dirty="0">
+                <a:solidFill>
+                  <a:srgbClr val="1A1A2E"/>
+                </a:solidFill>
+              </a:rPr>
+              <a:t> 필터</a:t>
+            </a:r>
+            <a:r>
+              <a:rPr lang="en-US" altLang="ko-KR" dirty="0">
+                <a:solidFill>
+                  <a:srgbClr val="1A1A2E"/>
+                </a:solidFill>
+              </a:rPr>
+              <a:t>: MI &gt; 0  OR  Spearman p &lt; 0.05 (</a:t>
+            </a:r>
+            <a:r>
+              <a:rPr lang="ko-KR" altLang="en-US" dirty="0">
+                <a:solidFill>
+                  <a:srgbClr val="1A1A2E"/>
+                </a:solidFill>
+              </a:rPr>
+              <a:t>상한 없음 </a:t>
+            </a:r>
+            <a:r>
+              <a:rPr lang="en-US" altLang="ko-KR" dirty="0">
+                <a:solidFill>
+                  <a:srgbClr val="1A1A2E"/>
+                </a:solidFill>
+              </a:rPr>
+              <a:t>— </a:t>
+            </a:r>
+            <a:r>
+              <a:rPr lang="ko-KR" altLang="en-US" dirty="0">
+                <a:solidFill>
+                  <a:srgbClr val="1A1A2E"/>
+                </a:solidFill>
+              </a:rPr>
+              <a:t>후보 최대 보존</a:t>
+            </a:r>
+            <a:r>
+              <a:rPr lang="en-US" altLang="ko-KR" dirty="0">
+                <a:solidFill>
+                  <a:srgbClr val="1A1A2E"/>
+                </a:solidFill>
+              </a:rPr>
+              <a:t>)</a:t>
+            </a:r>
+          </a:p>
+          <a:p>
+            <a:pPr lvl="1"/>
+            <a:r>
+              <a:rPr lang="en-US" altLang="ko-KR" dirty="0">
+                <a:solidFill>
+                  <a:srgbClr val="1A1A2E"/>
+                </a:solidFill>
+              </a:rPr>
+              <a:t>Step 4 : </a:t>
+            </a:r>
+            <a:r>
+              <a:rPr lang="ko-KR" altLang="en-US" dirty="0">
+                <a:solidFill>
+                  <a:srgbClr val="1A1A2E"/>
+                </a:solidFill>
+              </a:rPr>
+              <a:t>모델 기반 앙상블 투표  </a:t>
+            </a:r>
+            <a:r>
+              <a:rPr lang="en-US" altLang="ko-KR" dirty="0">
+                <a:solidFill>
+                  <a:srgbClr val="1A1A2E"/>
+                </a:solidFill>
+              </a:rPr>
+              <a:t>LASSO + RFECV(Ridge) + RF Permutation → pool </a:t>
+            </a:r>
+            <a:r>
+              <a:rPr lang="ko-KR" altLang="en-US" dirty="0">
+                <a:solidFill>
+                  <a:srgbClr val="1A1A2E"/>
+                </a:solidFill>
+              </a:rPr>
+              <a:t>구성 후 </a:t>
+            </a:r>
+            <a:r>
+              <a:rPr lang="en-US" altLang="ko-KR" dirty="0">
+                <a:solidFill>
+                  <a:srgbClr val="1A1A2E"/>
+                </a:solidFill>
+              </a:rPr>
+              <a:t>CV R² </a:t>
+            </a:r>
+            <a:r>
+              <a:rPr lang="ko-KR" altLang="en-US" dirty="0">
+                <a:solidFill>
+                  <a:srgbClr val="1A1A2E"/>
+                </a:solidFill>
+              </a:rPr>
+              <a:t>최적화
+</a:t>
+            </a:r>
+            <a:r>
+              <a:rPr lang="en-US" altLang="ko-KR" dirty="0">
+                <a:solidFill>
+                  <a:srgbClr val="1A1A2E"/>
+                </a:solidFill>
+              </a:rPr>
+              <a:t>Final : VIF &gt; 10 </a:t>
+            </a:r>
+            <a:r>
+              <a:rPr lang="ko-KR" altLang="en-US" dirty="0">
+                <a:solidFill>
+                  <a:srgbClr val="1A1A2E"/>
+                </a:solidFill>
+              </a:rPr>
+              <a:t>반복 제거 </a:t>
+            </a:r>
+            <a:r>
+              <a:rPr lang="en-US" altLang="ko-KR" dirty="0">
+                <a:solidFill>
+                  <a:srgbClr val="1A1A2E"/>
+                </a:solidFill>
+              </a:rPr>
+              <a:t>(FIXED: 'mean' </a:t>
+            </a:r>
+            <a:r>
+              <a:rPr lang="ko-KR" altLang="en-US" dirty="0">
+                <a:solidFill>
+                  <a:srgbClr val="1A1A2E"/>
+                </a:solidFill>
+              </a:rPr>
+              <a:t>강제 보존</a:t>
+            </a:r>
+            <a:r>
+              <a:rPr lang="en-US" altLang="ko-KR" dirty="0">
+                <a:solidFill>
+                  <a:srgbClr val="1A1A2E"/>
+                </a:solidFill>
+              </a:rPr>
+              <a:t>) → </a:t>
+            </a:r>
+            <a:r>
+              <a:rPr lang="ko-KR" altLang="en-US" dirty="0">
+                <a:solidFill>
+                  <a:srgbClr val="1A1A2E"/>
+                </a:solidFill>
+              </a:rPr>
+              <a:t>강남 </a:t>
+            </a:r>
+            <a:r>
+              <a:rPr lang="en-US" altLang="ko-KR" dirty="0">
+                <a:solidFill>
+                  <a:srgbClr val="1A1A2E"/>
+                </a:solidFill>
+              </a:rPr>
+              <a:t>/ </a:t>
+            </a:r>
+            <a:r>
+              <a:rPr lang="ko-KR" altLang="en-US" dirty="0">
+                <a:solidFill>
+                  <a:srgbClr val="1A1A2E"/>
+                </a:solidFill>
+              </a:rPr>
+              <a:t>신촌 </a:t>
+            </a:r>
+            <a:r>
+              <a:rPr lang="en-US" altLang="ko-KR" dirty="0">
+                <a:solidFill>
+                  <a:srgbClr val="1A1A2E"/>
+                </a:solidFill>
+              </a:rPr>
+              <a:t>/ </a:t>
+            </a:r>
+            <a:r>
+              <a:rPr lang="ko-KR" altLang="en-US" dirty="0">
+                <a:solidFill>
+                  <a:srgbClr val="1A1A2E"/>
+                </a:solidFill>
+              </a:rPr>
+              <a:t>병합 각각 독립 실행</a:t>
+            </a:r>
+            <a:endParaRPr lang="en-US" altLang="ko-KR" dirty="0">
+              <a:solidFill>
+                <a:srgbClr val="1A1A2E"/>
+              </a:solidFill>
+            </a:endParaRPr>
+          </a:p>
+          <a:p>
+            <a:pPr lvl="2"/>
+            <a:r>
+              <a:rPr lang="ko-KR" altLang="en-US" b="1" dirty="0">
+                <a:solidFill>
+                  <a:srgbClr val="1A355E"/>
+                </a:solidFill>
+              </a:rPr>
+              <a:t>고정 피처</a:t>
+            </a:r>
+            <a:r>
+              <a:rPr lang="en-US" altLang="ko-KR" b="1" dirty="0">
+                <a:solidFill>
+                  <a:srgbClr val="1A355E"/>
+                </a:solidFill>
+              </a:rPr>
+              <a:t>: 'mean'</a:t>
+            </a:r>
+            <a:r>
+              <a:rPr lang="ko-KR" altLang="en-US" b="1" dirty="0">
+                <a:solidFill>
+                  <a:srgbClr val="1A355E"/>
+                </a:solidFill>
+              </a:rPr>
+              <a:t>은 임상 해석을 위해 모든 단계에서 강제 보존</a:t>
+            </a:r>
+          </a:p>
+          <a:p>
+            <a:pPr lvl="2"/>
+            <a:endParaRPr lang="ko-KR" altLang="en-US" dirty="0">
+              <a:solidFill>
+                <a:srgbClr val="1A1A2E"/>
+              </a:solidFill>
+            </a:endParaRPr>
+          </a:p>
+          <a:p>
+            <a:pPr lvl="1"/>
+            <a:endParaRPr lang="en-US" altLang="ko-KR" dirty="0">
+              <a:solidFill>
+                <a:srgbClr val="1A1A2E"/>
+              </a:solidFill>
+            </a:endParaRPr>
+          </a:p>
+          <a:p>
+            <a:pPr lvl="1"/>
+            <a:endParaRPr lang="en-US" altLang="ko-KR" dirty="0"/>
+          </a:p>
+        </p:txBody>
+      </p:sp>
+    </p:spTree>
+    <p:extLst>
+      <p:ext uri="{BB962C8B-B14F-4D97-AF65-F5344CB8AC3E}">
+        <p14:creationId xmlns:p14="http://schemas.microsoft.com/office/powerpoint/2010/main" val="2448059843"/>
+      </p:ext>
+    </p:extLst>
+  </p:cSld>
+  <p:clrMapOvr>
+    <a:masterClrMapping/>
+  </p:clrMapOvr>
+</p:sld>
+</file>
+
+<file path=ppt/slides/slide18.xml><?xml version="1.0" encoding="utf-8"?>
+<p:sld xmlns:a="http://schemas.openxmlformats.org/drawingml/2006/main" xmlns:r="http://schemas.openxmlformats.org/officeDocument/2006/relationships" xmlns:p="http://schemas.openxmlformats.org/presentationml/2006/main">
+  <p:cSld>
+    <p:spTree>
+      <p:nvGrpSpPr>
         <p:cNvPr id="1" name=""/>
         <p:cNvGrpSpPr/>
         <p:nvPr/>
@@ -12302,7 +13378,7 @@
           <a:p>
             <a:fld id="{9F4AF89A-28FA-47FA-B28F-9A9C6913CB7A}" type="slidenum">
               <a:rPr lang="ko-KR" altLang="en-US" smtClean="0"/>
-              <a:t>16</a:t>
+              <a:t>18</a:t>
             </a:fld>
             <a:endParaRPr lang="ko-KR" altLang="en-US" dirty="0"/>
           </a:p>
@@ -14502,7 +15578,7 @@
 </p:sld>
 </file>
 
-<file path=ppt/slides/slide17.xml><?xml version="1.0" encoding="utf-8"?>
+<file path=ppt/slides/slide19.xml><?xml version="1.0" encoding="utf-8"?>
 <p:sld xmlns:a="http://schemas.openxmlformats.org/drawingml/2006/main" xmlns:r="http://schemas.openxmlformats.org/officeDocument/2006/relationships" xmlns:p="http://schemas.openxmlformats.org/presentationml/2006/main">
   <p:cSld>
     <p:spTree>
@@ -14577,7 +15653,7 @@
           <a:p>
             <a:fld id="{9F4AF89A-28FA-47FA-B28F-9A9C6913CB7A}" type="slidenum">
               <a:rPr lang="ko-KR" altLang="en-US" smtClean="0"/>
-              <a:t>17</a:t>
+              <a:t>19</a:t>
             </a:fld>
             <a:endParaRPr lang="ko-KR" altLang="en-US" dirty="0"/>
           </a:p>
@@ -15425,7 +16501,227 @@
 </p:sld>
 </file>
 
-<file path=ppt/slides/slide18.xml><?xml version="1.0" encoding="utf-8"?>
+<file path=ppt/slides/slide2.xml><?xml version="1.0" encoding="utf-8"?>
+<p:sld xmlns:a="http://schemas.openxmlformats.org/drawingml/2006/main" xmlns:r="http://schemas.openxmlformats.org/officeDocument/2006/relationships" xmlns:p="http://schemas.openxmlformats.org/presentationml/2006/main">
+  <p:cSld>
+    <p:spTree>
+      <p:nvGrpSpPr>
+        <p:cNvPr id="1" name=""/>
+        <p:cNvGrpSpPr/>
+        <p:nvPr/>
+      </p:nvGrpSpPr>
+      <p:grpSpPr>
+        <a:xfrm>
+          <a:off x="0" y="0"/>
+          <a:ext cx="0" cy="0"/>
+          <a:chOff x="0" y="0"/>
+          <a:chExt cx="0" cy="0"/>
+        </a:xfrm>
+      </p:grpSpPr>
+      <p:sp>
+        <p:nvSpPr>
+          <p:cNvPr id="2" name="제목 1">
+            <a:extLst>
+              <a:ext uri="{FF2B5EF4-FFF2-40B4-BE49-F238E27FC236}">
+                <a16:creationId xmlns:a16="http://schemas.microsoft.com/office/drawing/2014/main" id="{9AF0C8C8-C4B1-4336-9468-E6803A595282}"/>
+              </a:ext>
+            </a:extLst>
+          </p:cNvPr>
+          <p:cNvSpPr>
+            <a:spLocks noGrp="1"/>
+          </p:cNvSpPr>
+          <p:nvPr>
+            <p:ph type="title"/>
+          </p:nvPr>
+        </p:nvSpPr>
+        <p:spPr/>
+        <p:txBody>
+          <a:bodyPr/>
+          <a:lstStyle/>
+          <a:p>
+            <a:r>
+              <a:rPr lang="en-US" altLang="ko-KR" dirty="0"/>
+              <a:t>1. What’s discussed in the last meetings</a:t>
+            </a:r>
+            <a:endParaRPr lang="ko-KR" altLang="en-US" dirty="0"/>
+          </a:p>
+        </p:txBody>
+      </p:sp>
+      <p:sp>
+        <p:nvSpPr>
+          <p:cNvPr id="3" name="내용 개체 틀 2">
+            <a:extLst>
+              <a:ext uri="{FF2B5EF4-FFF2-40B4-BE49-F238E27FC236}">
+                <a16:creationId xmlns:a16="http://schemas.microsoft.com/office/drawing/2014/main" id="{A84C152F-6AC6-4EBB-8679-327588602FD5}"/>
+              </a:ext>
+            </a:extLst>
+          </p:cNvPr>
+          <p:cNvSpPr>
+            <a:spLocks noGrp="1"/>
+          </p:cNvSpPr>
+          <p:nvPr>
+            <p:ph idx="1"/>
+          </p:nvPr>
+        </p:nvSpPr>
+        <p:spPr/>
+        <p:txBody>
+          <a:bodyPr>
+            <a:normAutofit/>
+          </a:bodyPr>
+          <a:lstStyle/>
+          <a:p>
+            <a:r>
+              <a:rPr lang="en-US" altLang="ko-KR" dirty="0"/>
+              <a:t>AEC Features Extracting</a:t>
+            </a:r>
+            <a:endParaRPr lang="en-US" altLang="ko-KR" dirty="0">
+              <a:ea typeface="KoPub돋움체 Bold" panose="02020603020101020101"/>
+            </a:endParaRPr>
+          </a:p>
+          <a:p>
+            <a:r>
+              <a:rPr lang="en-US" altLang="ko-KR" b="1" dirty="0"/>
+              <a:t>Linear &amp; Logistic Regression (</a:t>
+            </a:r>
+            <a:r>
+              <a:rPr lang="ko-KR" altLang="en-US" b="1" dirty="0" err="1"/>
+              <a:t>단변량</a:t>
+            </a:r>
+            <a:r>
+              <a:rPr lang="en-US" altLang="ko-KR" b="1" dirty="0"/>
+              <a:t>, </a:t>
+            </a:r>
+            <a:r>
+              <a:rPr lang="ko-KR" altLang="en-US" b="1" dirty="0" err="1"/>
+              <a:t>다변량</a:t>
+            </a:r>
+            <a:r>
+              <a:rPr lang="en-US" altLang="ko-KR" b="1" dirty="0"/>
+              <a:t>)</a:t>
+            </a:r>
+          </a:p>
+          <a:p>
+            <a:r>
+              <a:rPr lang="en-US" altLang="ko-KR" b="1" dirty="0"/>
+              <a:t>Multivariable Analysis (</a:t>
+            </a:r>
+            <a:r>
+              <a:rPr lang="ko-KR" altLang="en-US" b="1" dirty="0"/>
+              <a:t>심화</a:t>
+            </a:r>
+            <a:r>
+              <a:rPr lang="en-US" altLang="ko-KR" b="1" dirty="0"/>
+              <a:t>)</a:t>
+            </a:r>
+          </a:p>
+          <a:p>
+            <a:pPr lvl="1"/>
+            <a:r>
+              <a:rPr lang="en-US" altLang="ko-KR" dirty="0"/>
+              <a:t>Case1 [</a:t>
+            </a:r>
+            <a:r>
+              <a:rPr lang="ko-KR" altLang="en-US" dirty="0"/>
+              <a:t>성별</a:t>
+            </a:r>
+            <a:r>
+              <a:rPr lang="en-US" altLang="ko-KR" dirty="0"/>
+              <a:t>, </a:t>
+            </a:r>
+            <a:r>
+              <a:rPr lang="ko-KR" altLang="en-US" dirty="0"/>
+              <a:t>나이</a:t>
+            </a:r>
+            <a:r>
+              <a:rPr lang="en-US" altLang="ko-KR" dirty="0"/>
+              <a:t>], Case2 [+AEC features], Case3 [+</a:t>
+            </a:r>
+            <a:r>
+              <a:rPr lang="ko-KR" altLang="en-US" dirty="0"/>
+              <a:t>모델명</a:t>
+            </a:r>
+            <a:r>
+              <a:rPr lang="en-US" altLang="ko-KR" dirty="0"/>
+              <a:t>]</a:t>
+            </a:r>
+          </a:p>
+          <a:p>
+            <a:pPr lvl="1"/>
+            <a:r>
+              <a:rPr lang="ko-KR" altLang="en-US" dirty="0"/>
+              <a:t>비교분석결과 </a:t>
+            </a:r>
+            <a:r>
+              <a:rPr lang="en-US" altLang="ko-KR" dirty="0"/>
+              <a:t>AEC</a:t>
+            </a:r>
+            <a:r>
+              <a:rPr lang="ko-KR" altLang="en-US" dirty="0"/>
+              <a:t> </a:t>
+            </a:r>
+            <a:r>
+              <a:rPr lang="en-US" altLang="ko-KR" dirty="0"/>
+              <a:t>feature</a:t>
+            </a:r>
+            <a:r>
+              <a:rPr lang="ko-KR" altLang="en-US" dirty="0"/>
+              <a:t>가 독립적으로 </a:t>
+            </a:r>
+            <a:r>
+              <a:rPr lang="en-US" altLang="ko-KR" dirty="0"/>
+              <a:t>TAMA </a:t>
+            </a:r>
+            <a:r>
+              <a:rPr lang="ko-KR" altLang="en-US" dirty="0"/>
+              <a:t>예측에 기여한다고 판단</a:t>
+            </a:r>
+            <a:endParaRPr lang="en-US" altLang="ko-KR" dirty="0"/>
+          </a:p>
+        </p:txBody>
+      </p:sp>
+      <p:sp>
+        <p:nvSpPr>
+          <p:cNvPr id="4" name="슬라이드 번호 개체 틀 3">
+            <a:extLst>
+              <a:ext uri="{FF2B5EF4-FFF2-40B4-BE49-F238E27FC236}">
+                <a16:creationId xmlns:a16="http://schemas.microsoft.com/office/drawing/2014/main" id="{967768F2-76AD-4898-ABAE-26C158880624}"/>
+              </a:ext>
+            </a:extLst>
+          </p:cNvPr>
+          <p:cNvSpPr>
+            <a:spLocks noGrp="1"/>
+          </p:cNvSpPr>
+          <p:nvPr>
+            <p:ph type="sldNum" sz="quarter" idx="12"/>
+          </p:nvPr>
+        </p:nvSpPr>
+        <p:spPr/>
+        <p:txBody>
+          <a:bodyPr/>
+          <a:lstStyle/>
+          <a:p>
+            <a:fld id="{9F4AF89A-28FA-47FA-B28F-9A9C6913CB7A}" type="slidenum">
+              <a:rPr lang="ko-KR" altLang="en-US" smtClean="0"/>
+              <a:t>2</a:t>
+            </a:fld>
+            <a:endParaRPr lang="ko-KR" altLang="en-US" dirty="0"/>
+          </a:p>
+        </p:txBody>
+      </p:sp>
+    </p:spTree>
+    <p:extLst>
+      <p:ext uri="{BB962C8B-B14F-4D97-AF65-F5344CB8AC3E}">
+        <p14:creationId xmlns:p14="http://schemas.microsoft.com/office/powerpoint/2010/main" val="2819113242"/>
+      </p:ext>
+    </p:extLst>
+  </p:cSld>
+  <p:clrMapOvr>
+    <a:masterClrMapping/>
+  </p:clrMapOvr>
+</p:sld>
+</file>
+
+<file path=ppt/slides/slide20.xml><?xml version="1.0" encoding="utf-8"?>
 <p:sld xmlns:a="http://schemas.openxmlformats.org/drawingml/2006/main" xmlns:r="http://schemas.openxmlformats.org/officeDocument/2006/relationships" xmlns:p="http://schemas.openxmlformats.org/presentationml/2006/main">
   <p:cSld>
     <p:spTree>
@@ -15536,7 +16832,7 @@
           <a:p>
             <a:fld id="{9F4AF89A-28FA-47FA-B28F-9A9C6913CB7A}" type="slidenum">
               <a:rPr lang="ko-KR" altLang="en-US" smtClean="0"/>
-              <a:t>18</a:t>
+              <a:t>20</a:t>
             </a:fld>
             <a:endParaRPr lang="ko-KR" altLang="en-US" dirty="0"/>
           </a:p>
@@ -17716,7 +19012,7 @@
 </p:sld>
 </file>
 
-<file path=ppt/slides/slide19.xml><?xml version="1.0" encoding="utf-8"?>
+<file path=ppt/slides/slide21.xml><?xml version="1.0" encoding="utf-8"?>
 <p:sld xmlns:a="http://schemas.openxmlformats.org/drawingml/2006/main" xmlns:r="http://schemas.openxmlformats.org/officeDocument/2006/relationships" xmlns:p="http://schemas.openxmlformats.org/presentationml/2006/main">
   <p:cSld>
     <p:spTree>
@@ -17827,7 +19123,7 @@
           <a:p>
             <a:fld id="{9F4AF89A-28FA-47FA-B28F-9A9C6913CB7A}" type="slidenum">
               <a:rPr lang="ko-KR" altLang="en-US" smtClean="0"/>
-              <a:t>19</a:t>
+              <a:t>21</a:t>
             </a:fld>
             <a:endParaRPr lang="ko-KR" altLang="en-US" dirty="0"/>
           </a:p>
@@ -18645,7 +19941,7 @@
 </p:sld>
 </file>
 
-<file path=ppt/slides/slide2.xml><?xml version="1.0" encoding="utf-8"?>
+<file path=ppt/slides/slide22.xml><?xml version="1.0" encoding="utf-8"?>
 <p:sld xmlns:a="http://schemas.openxmlformats.org/drawingml/2006/main" xmlns:r="http://schemas.openxmlformats.org/officeDocument/2006/relationships" xmlns:p="http://schemas.openxmlformats.org/presentationml/2006/main">
   <p:cSld>
     <p:spTree>
@@ -18685,226 +19981,6 @@
           <a:p>
             <a:r>
               <a:rPr lang="en-US" altLang="ko-KR" dirty="0"/>
-              <a:t>1. What’s discussed in the last meetings</a:t>
-            </a:r>
-            <a:endParaRPr lang="ko-KR" altLang="en-US" dirty="0"/>
-          </a:p>
-        </p:txBody>
-      </p:sp>
-      <p:sp>
-        <p:nvSpPr>
-          <p:cNvPr id="3" name="내용 개체 틀 2">
-            <a:extLst>
-              <a:ext uri="{FF2B5EF4-FFF2-40B4-BE49-F238E27FC236}">
-                <a16:creationId xmlns:a16="http://schemas.microsoft.com/office/drawing/2014/main" id="{A84C152F-6AC6-4EBB-8679-327588602FD5}"/>
-              </a:ext>
-            </a:extLst>
-          </p:cNvPr>
-          <p:cNvSpPr>
-            <a:spLocks noGrp="1"/>
-          </p:cNvSpPr>
-          <p:nvPr>
-            <p:ph idx="1"/>
-          </p:nvPr>
-        </p:nvSpPr>
-        <p:spPr/>
-        <p:txBody>
-          <a:bodyPr>
-            <a:normAutofit/>
-          </a:bodyPr>
-          <a:lstStyle/>
-          <a:p>
-            <a:r>
-              <a:rPr lang="en-US" altLang="ko-KR" dirty="0"/>
-              <a:t>AEC Features Extracting</a:t>
-            </a:r>
-            <a:endParaRPr lang="en-US" altLang="ko-KR" dirty="0">
-              <a:ea typeface="KoPub돋움체 Bold" panose="02020603020101020101"/>
-            </a:endParaRPr>
-          </a:p>
-          <a:p>
-            <a:r>
-              <a:rPr lang="en-US" altLang="ko-KR" b="1" dirty="0"/>
-              <a:t>Linear &amp; Logistic Regression (</a:t>
-            </a:r>
-            <a:r>
-              <a:rPr lang="ko-KR" altLang="en-US" b="1" dirty="0" err="1"/>
-              <a:t>단변량</a:t>
-            </a:r>
-            <a:r>
-              <a:rPr lang="en-US" altLang="ko-KR" b="1" dirty="0"/>
-              <a:t>, </a:t>
-            </a:r>
-            <a:r>
-              <a:rPr lang="ko-KR" altLang="en-US" b="1" dirty="0" err="1"/>
-              <a:t>다변량</a:t>
-            </a:r>
-            <a:r>
-              <a:rPr lang="en-US" altLang="ko-KR" b="1" dirty="0"/>
-              <a:t>)</a:t>
-            </a:r>
-          </a:p>
-          <a:p>
-            <a:r>
-              <a:rPr lang="en-US" altLang="ko-KR" b="1" dirty="0"/>
-              <a:t>Multivariable Analysis (</a:t>
-            </a:r>
-            <a:r>
-              <a:rPr lang="ko-KR" altLang="en-US" b="1" dirty="0"/>
-              <a:t>심화</a:t>
-            </a:r>
-            <a:r>
-              <a:rPr lang="en-US" altLang="ko-KR" b="1" dirty="0"/>
-              <a:t>)</a:t>
-            </a:r>
-          </a:p>
-          <a:p>
-            <a:pPr lvl="1"/>
-            <a:r>
-              <a:rPr lang="en-US" altLang="ko-KR" dirty="0"/>
-              <a:t>Case1 [</a:t>
-            </a:r>
-            <a:r>
-              <a:rPr lang="ko-KR" altLang="en-US" dirty="0"/>
-              <a:t>성별</a:t>
-            </a:r>
-            <a:r>
-              <a:rPr lang="en-US" altLang="ko-KR" dirty="0"/>
-              <a:t>, </a:t>
-            </a:r>
-            <a:r>
-              <a:rPr lang="ko-KR" altLang="en-US" dirty="0"/>
-              <a:t>나이</a:t>
-            </a:r>
-            <a:r>
-              <a:rPr lang="en-US" altLang="ko-KR" dirty="0"/>
-              <a:t>], Case2 [+AEC features], Case3 [+</a:t>
-            </a:r>
-            <a:r>
-              <a:rPr lang="ko-KR" altLang="en-US" dirty="0"/>
-              <a:t>모델명</a:t>
-            </a:r>
-            <a:r>
-              <a:rPr lang="en-US" altLang="ko-KR" dirty="0"/>
-              <a:t>]</a:t>
-            </a:r>
-          </a:p>
-          <a:p>
-            <a:pPr lvl="1"/>
-            <a:r>
-              <a:rPr lang="ko-KR" altLang="en-US" dirty="0"/>
-              <a:t>비교분석결과 </a:t>
-            </a:r>
-            <a:r>
-              <a:rPr lang="en-US" altLang="ko-KR" dirty="0"/>
-              <a:t>AEC</a:t>
-            </a:r>
-            <a:r>
-              <a:rPr lang="ko-KR" altLang="en-US" dirty="0"/>
-              <a:t> </a:t>
-            </a:r>
-            <a:r>
-              <a:rPr lang="en-US" altLang="ko-KR" dirty="0"/>
-              <a:t>feature</a:t>
-            </a:r>
-            <a:r>
-              <a:rPr lang="ko-KR" altLang="en-US" dirty="0"/>
-              <a:t>가 독립적으로 </a:t>
-            </a:r>
-            <a:r>
-              <a:rPr lang="en-US" altLang="ko-KR" dirty="0"/>
-              <a:t>TAMA </a:t>
-            </a:r>
-            <a:r>
-              <a:rPr lang="ko-KR" altLang="en-US" dirty="0"/>
-              <a:t>예측에 기여한다고 판단</a:t>
-            </a:r>
-            <a:endParaRPr lang="en-US" altLang="ko-KR" dirty="0"/>
-          </a:p>
-        </p:txBody>
-      </p:sp>
-      <p:sp>
-        <p:nvSpPr>
-          <p:cNvPr id="4" name="슬라이드 번호 개체 틀 3">
-            <a:extLst>
-              <a:ext uri="{FF2B5EF4-FFF2-40B4-BE49-F238E27FC236}">
-                <a16:creationId xmlns:a16="http://schemas.microsoft.com/office/drawing/2014/main" id="{967768F2-76AD-4898-ABAE-26C158880624}"/>
-              </a:ext>
-            </a:extLst>
-          </p:cNvPr>
-          <p:cNvSpPr>
-            <a:spLocks noGrp="1"/>
-          </p:cNvSpPr>
-          <p:nvPr>
-            <p:ph type="sldNum" sz="quarter" idx="12"/>
-          </p:nvPr>
-        </p:nvSpPr>
-        <p:spPr/>
-        <p:txBody>
-          <a:bodyPr/>
-          <a:lstStyle/>
-          <a:p>
-            <a:fld id="{9F4AF89A-28FA-47FA-B28F-9A9C6913CB7A}" type="slidenum">
-              <a:rPr lang="ko-KR" altLang="en-US" smtClean="0"/>
-              <a:t>2</a:t>
-            </a:fld>
-            <a:endParaRPr lang="ko-KR" altLang="en-US" dirty="0"/>
-          </a:p>
-        </p:txBody>
-      </p:sp>
-    </p:spTree>
-    <p:extLst>
-      <p:ext uri="{BB962C8B-B14F-4D97-AF65-F5344CB8AC3E}">
-        <p14:creationId xmlns:p14="http://schemas.microsoft.com/office/powerpoint/2010/main" val="2819113242"/>
-      </p:ext>
-    </p:extLst>
-  </p:cSld>
-  <p:clrMapOvr>
-    <a:masterClrMapping/>
-  </p:clrMapOvr>
-</p:sld>
-</file>
-
-<file path=ppt/slides/slide20.xml><?xml version="1.0" encoding="utf-8"?>
-<p:sld xmlns:a="http://schemas.openxmlformats.org/drawingml/2006/main" xmlns:r="http://schemas.openxmlformats.org/officeDocument/2006/relationships" xmlns:p="http://schemas.openxmlformats.org/presentationml/2006/main">
-  <p:cSld>
-    <p:spTree>
-      <p:nvGrpSpPr>
-        <p:cNvPr id="1" name=""/>
-        <p:cNvGrpSpPr/>
-        <p:nvPr/>
-      </p:nvGrpSpPr>
-      <p:grpSpPr>
-        <a:xfrm>
-          <a:off x="0" y="0"/>
-          <a:ext cx="0" cy="0"/>
-          <a:chOff x="0" y="0"/>
-          <a:chExt cx="0" cy="0"/>
-        </a:xfrm>
-      </p:grpSpPr>
-      <p:sp>
-        <p:nvSpPr>
-          <p:cNvPr id="2" name="제목 1">
-            <a:extLst>
-              <a:ext uri="{FF2B5EF4-FFF2-40B4-BE49-F238E27FC236}">
-                <a16:creationId xmlns:a16="http://schemas.microsoft.com/office/drawing/2014/main" id="{9AF0C8C8-C4B1-4336-9468-E6803A595282}"/>
-              </a:ext>
-            </a:extLst>
-          </p:cNvPr>
-          <p:cNvSpPr>
-            <a:spLocks noGrp="1"/>
-          </p:cNvSpPr>
-          <p:nvPr>
-            <p:ph type="title"/>
-          </p:nvPr>
-        </p:nvSpPr>
-        <p:spPr/>
-        <p:txBody>
-          <a:bodyPr/>
-          <a:lstStyle/>
-          <a:p>
-            <a:r>
-              <a:rPr lang="en-US" altLang="ko-KR" dirty="0"/>
               <a:t>3. Detailed progress</a:t>
             </a:r>
             <a:endParaRPr lang="ko-KR" altLang="en-US" dirty="0"/>
@@ -18934,7 +20010,7 @@
           <a:p>
             <a:fld id="{9F4AF89A-28FA-47FA-B28F-9A9C6913CB7A}" type="slidenum">
               <a:rPr lang="ko-KR" altLang="en-US" smtClean="0"/>
-              <a:t>20</a:t>
+              <a:t>22</a:t>
             </a:fld>
             <a:endParaRPr lang="ko-KR" altLang="en-US" dirty="0"/>
           </a:p>
@@ -21620,7 +22696,7 @@
 </p:sld>
 </file>
 
-<file path=ppt/slides/slide21.xml><?xml version="1.0" encoding="utf-8"?>
+<file path=ppt/slides/slide23.xml><?xml version="1.0" encoding="utf-8"?>
 <p:sld xmlns:a="http://schemas.openxmlformats.org/drawingml/2006/main" xmlns:r="http://schemas.openxmlformats.org/officeDocument/2006/relationships" xmlns:p="http://schemas.openxmlformats.org/presentationml/2006/main">
   <p:cSld>
     <p:spTree>
@@ -21689,7 +22765,7 @@
           <a:p>
             <a:fld id="{9F4AF89A-28FA-47FA-B28F-9A9C6913CB7A}" type="slidenum">
               <a:rPr lang="ko-KR" altLang="en-US" smtClean="0"/>
-              <a:t>21</a:t>
+              <a:t>23</a:t>
             </a:fld>
             <a:endParaRPr lang="ko-KR" altLang="en-US" dirty="0"/>
           </a:p>
@@ -23152,7 +24228,7 @@
 </p:sld>
 </file>
 
-<file path=ppt/slides/slide22.xml><?xml version="1.0" encoding="utf-8"?>
+<file path=ppt/slides/slide24.xml><?xml version="1.0" encoding="utf-8"?>
 <p:sld xmlns:a="http://schemas.openxmlformats.org/drawingml/2006/main" xmlns:r="http://schemas.openxmlformats.org/officeDocument/2006/relationships" xmlns:p="http://schemas.openxmlformats.org/presentationml/2006/main">
   <p:cSld>
     <p:spTree>
@@ -23228,7 +24304,7 @@
           <a:p>
             <a:fld id="{9F4AF89A-28FA-47FA-B28F-9A9C6913CB7A}" type="slidenum">
               <a:rPr lang="ko-KR" altLang="en-US" smtClean="0"/>
-              <a:t>22</a:t>
+              <a:t>24</a:t>
             </a:fld>
             <a:endParaRPr lang="ko-KR" altLang="en-US" dirty="0"/>
           </a:p>
@@ -23247,7 +24323,7 @@
 </p:sld>
 </file>
 
-<file path=ppt/slides/slide23.xml><?xml version="1.0" encoding="utf-8"?>
+<file path=ppt/slides/slide25.xml><?xml version="1.0" encoding="utf-8"?>
 <p:sld xmlns:a="http://schemas.openxmlformats.org/drawingml/2006/main" xmlns:r="http://schemas.openxmlformats.org/officeDocument/2006/relationships" xmlns:p="http://schemas.openxmlformats.org/presentationml/2006/main">
   <p:cSld>
     <p:spTree>
@@ -23360,7 +24436,7 @@
           <a:p>
             <a:fld id="{9F4AF89A-28FA-47FA-B28F-9A9C6913CB7A}" type="slidenum">
               <a:rPr lang="ko-KR" altLang="en-US" smtClean="0"/>
-              <a:t>23</a:t>
+              <a:t>25</a:t>
             </a:fld>
             <a:endParaRPr lang="ko-KR" altLang="en-US" dirty="0"/>
           </a:p>
@@ -24505,7 +25581,7 @@
 </p:sld>
 </file>
 
-<file path=ppt/slides/slide24.xml><?xml version="1.0" encoding="utf-8"?>
+<file path=ppt/slides/slide26.xml><?xml version="1.0" encoding="utf-8"?>
 <p:sld xmlns:a="http://schemas.openxmlformats.org/drawingml/2006/main" xmlns:r="http://schemas.openxmlformats.org/officeDocument/2006/relationships" xmlns:p="http://schemas.openxmlformats.org/presentationml/2006/main">
   <p:cSld>
     <p:spTree>
@@ -24619,7 +25695,7 @@
           <a:p>
             <a:fld id="{9F4AF89A-28FA-47FA-B28F-9A9C6913CB7A}" type="slidenum">
               <a:rPr lang="ko-KR" altLang="en-US" smtClean="0"/>
-              <a:t>24</a:t>
+              <a:t>26</a:t>
             </a:fld>
             <a:endParaRPr lang="ko-KR" altLang="en-US" dirty="0"/>
           </a:p>
@@ -25824,7 +26900,7 @@
 </p:sld>
 </file>
 
-<file path=ppt/slides/slide25.xml><?xml version="1.0" encoding="utf-8"?>
+<file path=ppt/slides/slide27.xml><?xml version="1.0" encoding="utf-8"?>
 <p:sld xmlns:a="http://schemas.openxmlformats.org/drawingml/2006/main" xmlns:r="http://schemas.openxmlformats.org/officeDocument/2006/relationships" xmlns:p="http://schemas.openxmlformats.org/presentationml/2006/main">
   <p:cSld>
     <p:spTree>
@@ -26003,7 +27079,7 @@
           <a:p>
             <a:fld id="{9F4AF89A-28FA-47FA-B28F-9A9C6913CB7A}" type="slidenum">
               <a:rPr lang="ko-KR" altLang="en-US" smtClean="0"/>
-              <a:t>25</a:t>
+              <a:t>27</a:t>
             </a:fld>
             <a:endParaRPr lang="ko-KR" altLang="en-US" dirty="0"/>
           </a:p>
@@ -27088,7 +28164,7 @@
 </p:sld>
 </file>
 
-<file path=ppt/slides/slide26.xml><?xml version="1.0" encoding="utf-8"?>
+<file path=ppt/slides/slide28.xml><?xml version="1.0" encoding="utf-8"?>
 <p:sld xmlns:a="http://schemas.openxmlformats.org/drawingml/2006/main" xmlns:r="http://schemas.openxmlformats.org/officeDocument/2006/relationships" xmlns:p="http://schemas.openxmlformats.org/presentationml/2006/main">
   <p:cSld>
     <p:spTree>
@@ -27232,7 +28308,7 @@
           <a:p>
             <a:fld id="{9F4AF89A-28FA-47FA-B28F-9A9C6913CB7A}" type="slidenum">
               <a:rPr lang="ko-KR" altLang="en-US" smtClean="0"/>
-              <a:t>26</a:t>
+              <a:t>28</a:t>
             </a:fld>
             <a:endParaRPr lang="ko-KR" altLang="en-US" dirty="0"/>
           </a:p>
@@ -28407,7 +29483,7 @@
 </p:sld>
 </file>
 
-<file path=ppt/slides/slide27.xml><?xml version="1.0" encoding="utf-8"?>
+<file path=ppt/slides/slide29.xml><?xml version="1.0" encoding="utf-8"?>
 <p:sld xmlns:a="http://schemas.openxmlformats.org/drawingml/2006/main" xmlns:r="http://schemas.openxmlformats.org/officeDocument/2006/relationships" xmlns:p="http://schemas.openxmlformats.org/presentationml/2006/main">
   <p:cSld>
     <p:spTree>
@@ -28489,7 +29565,7 @@
           <a:p>
             <a:fld id="{9F4AF89A-28FA-47FA-B28F-9A9C6913CB7A}" type="slidenum">
               <a:rPr lang="ko-KR" altLang="en-US" smtClean="0"/>
-              <a:t>27</a:t>
+              <a:t>29</a:t>
             </a:fld>
             <a:endParaRPr lang="ko-KR" altLang="en-US" dirty="0"/>
           </a:p>
@@ -28508,7 +29584,242 @@
 </p:sld>
 </file>
 
-<file path=ppt/slides/slide28.xml><?xml version="1.0" encoding="utf-8"?>
+<file path=ppt/slides/slide3.xml><?xml version="1.0" encoding="utf-8"?>
+<p:sld xmlns:a="http://schemas.openxmlformats.org/drawingml/2006/main" xmlns:r="http://schemas.openxmlformats.org/officeDocument/2006/relationships" xmlns:p="http://schemas.openxmlformats.org/presentationml/2006/main">
+  <p:cSld>
+    <p:spTree>
+      <p:nvGrpSpPr>
+        <p:cNvPr id="1" name=""/>
+        <p:cNvGrpSpPr/>
+        <p:nvPr/>
+      </p:nvGrpSpPr>
+      <p:grpSpPr>
+        <a:xfrm>
+          <a:off x="0" y="0"/>
+          <a:ext cx="0" cy="0"/>
+          <a:chOff x="0" y="0"/>
+          <a:chExt cx="0" cy="0"/>
+        </a:xfrm>
+      </p:grpSpPr>
+      <p:sp>
+        <p:nvSpPr>
+          <p:cNvPr id="2" name="제목 1">
+            <a:extLst>
+              <a:ext uri="{FF2B5EF4-FFF2-40B4-BE49-F238E27FC236}">
+                <a16:creationId xmlns:a16="http://schemas.microsoft.com/office/drawing/2014/main" id="{9AF0C8C8-C4B1-4336-9468-E6803A595282}"/>
+              </a:ext>
+            </a:extLst>
+          </p:cNvPr>
+          <p:cNvSpPr>
+            <a:spLocks noGrp="1"/>
+          </p:cNvSpPr>
+          <p:nvPr>
+            <p:ph type="title"/>
+          </p:nvPr>
+        </p:nvSpPr>
+        <p:spPr/>
+        <p:txBody>
+          <a:bodyPr/>
+          <a:lstStyle/>
+          <a:p>
+            <a:r>
+              <a:rPr lang="en-US" altLang="ko-KR" dirty="0"/>
+              <a:t>2. Research</a:t>
+            </a:r>
+            <a:r>
+              <a:rPr lang="ko-KR" altLang="en-US" dirty="0"/>
+              <a:t> </a:t>
+            </a:r>
+            <a:r>
+              <a:rPr lang="en-US" altLang="ko-KR" dirty="0"/>
+              <a:t>Summary</a:t>
+            </a:r>
+            <a:endParaRPr lang="ko-KR" altLang="en-US" dirty="0"/>
+          </a:p>
+        </p:txBody>
+      </p:sp>
+      <p:sp>
+        <p:nvSpPr>
+          <p:cNvPr id="3" name="내용 개체 틀 2">
+            <a:extLst>
+              <a:ext uri="{FF2B5EF4-FFF2-40B4-BE49-F238E27FC236}">
+                <a16:creationId xmlns:a16="http://schemas.microsoft.com/office/drawing/2014/main" id="{A84C152F-6AC6-4EBB-8679-327588602FD5}"/>
+              </a:ext>
+            </a:extLst>
+          </p:cNvPr>
+          <p:cNvSpPr>
+            <a:spLocks noGrp="1"/>
+          </p:cNvSpPr>
+          <p:nvPr>
+            <p:ph idx="1"/>
+          </p:nvPr>
+        </p:nvSpPr>
+        <p:spPr/>
+        <p:txBody>
+          <a:bodyPr/>
+          <a:lstStyle/>
+          <a:p>
+            <a:r>
+              <a:rPr lang="en-US" altLang="ko-KR" dirty="0"/>
+              <a:t>Clinic Data :  Age, Sex </a:t>
+            </a:r>
+            <a:r>
+              <a:rPr lang="ko-KR" altLang="en-US" dirty="0"/>
+              <a:t>→ </a:t>
+            </a:r>
+            <a:r>
+              <a:rPr lang="en-US" altLang="ko-KR" dirty="0"/>
+              <a:t>Age, Sex, BMI</a:t>
+            </a:r>
+          </a:p>
+          <a:p>
+            <a:pPr lvl="1"/>
+            <a:r>
+              <a:rPr lang="en-US" altLang="ko-KR" dirty="0"/>
+              <a:t>BMI </a:t>
+            </a:r>
+            <a:r>
+              <a:rPr lang="ko-KR" altLang="en-US" dirty="0"/>
+              <a:t>교란변수 보정</a:t>
+            </a:r>
+            <a:endParaRPr lang="en-US" altLang="ko-KR" dirty="0"/>
+          </a:p>
+          <a:p>
+            <a:r>
+              <a:rPr lang="en-US" altLang="ko-KR" dirty="0"/>
+              <a:t>AEC Features Extraction : </a:t>
+            </a:r>
+            <a:r>
+              <a:rPr lang="ko-KR" altLang="en-US" dirty="0"/>
+              <a:t>수동 → 자동 파이프라인 </a:t>
+            </a:r>
+            <a:r>
+              <a:rPr lang="en-US" altLang="ko-KR" dirty="0"/>
+              <a:t>(4</a:t>
+            </a:r>
+            <a:r>
+              <a:rPr lang="ko-KR" altLang="en-US" dirty="0"/>
+              <a:t>단계</a:t>
+            </a:r>
+            <a:r>
+              <a:rPr lang="en-US" altLang="ko-KR" dirty="0"/>
+              <a:t>)</a:t>
+            </a:r>
+          </a:p>
+          <a:p>
+            <a:pPr lvl="1"/>
+            <a:r>
+              <a:rPr lang="ko-KR" altLang="en-US" dirty="0" err="1"/>
+              <a:t>다중공선성</a:t>
+            </a:r>
+            <a:r>
+              <a:rPr lang="en-US" altLang="ko-KR" dirty="0"/>
+              <a:t>, </a:t>
+            </a:r>
+            <a:r>
+              <a:rPr lang="ko-KR" altLang="en-US" dirty="0" err="1"/>
+              <a:t>과적합</a:t>
+            </a:r>
+            <a:r>
+              <a:rPr lang="ko-KR" altLang="en-US" dirty="0"/>
+              <a:t> 위험 제거</a:t>
+            </a:r>
+            <a:r>
+              <a:rPr lang="en-US" altLang="ko-KR" dirty="0"/>
+              <a:t>, </a:t>
+            </a:r>
+            <a:r>
+              <a:rPr lang="ko-KR" altLang="en-US" dirty="0"/>
+              <a:t>객관적 </a:t>
+            </a:r>
+            <a:r>
+              <a:rPr lang="en-US" altLang="ko-KR" dirty="0"/>
+              <a:t>Feature Selection</a:t>
+            </a:r>
+          </a:p>
+          <a:p>
+            <a:r>
+              <a:rPr lang="ko-KR" altLang="en-US" dirty="0"/>
+              <a:t>이전 </a:t>
+            </a:r>
+            <a:r>
+              <a:rPr lang="en-US" altLang="ko-KR" dirty="0"/>
+              <a:t>AEC Feature</a:t>
+            </a:r>
+            <a:r>
+              <a:rPr lang="ko-KR" altLang="en-US" dirty="0"/>
+              <a:t>와의 성능 비교</a:t>
+            </a:r>
+            <a:endParaRPr lang="en-US" altLang="ko-KR" dirty="0"/>
+          </a:p>
+          <a:p>
+            <a:pPr lvl="1"/>
+            <a:r>
+              <a:rPr lang="ko-KR" altLang="en-US" dirty="0"/>
+              <a:t>어떤 </a:t>
+            </a:r>
+            <a:r>
+              <a:rPr lang="en-US" altLang="ko-KR" dirty="0"/>
+              <a:t>AEC Feature Set</a:t>
+            </a:r>
+            <a:r>
+              <a:rPr lang="ko-KR" altLang="en-US" dirty="0"/>
+              <a:t>가 더 유용한지 정량 비교</a:t>
+            </a:r>
+            <a:endParaRPr lang="en-US" altLang="ko-KR" dirty="0"/>
+          </a:p>
+          <a:p>
+            <a:pPr lvl="1"/>
+            <a:endParaRPr lang="en-US" altLang="ko-KR" dirty="0"/>
+          </a:p>
+          <a:p>
+            <a:endParaRPr lang="en-US" altLang="ko-KR" dirty="0"/>
+          </a:p>
+        </p:txBody>
+      </p:sp>
+      <p:sp>
+        <p:nvSpPr>
+          <p:cNvPr id="4" name="슬라이드 번호 개체 틀 3">
+            <a:extLst>
+              <a:ext uri="{FF2B5EF4-FFF2-40B4-BE49-F238E27FC236}">
+                <a16:creationId xmlns:a16="http://schemas.microsoft.com/office/drawing/2014/main" id="{967768F2-76AD-4898-ABAE-26C158880624}"/>
+              </a:ext>
+            </a:extLst>
+          </p:cNvPr>
+          <p:cNvSpPr>
+            <a:spLocks noGrp="1"/>
+          </p:cNvSpPr>
+          <p:nvPr>
+            <p:ph type="sldNum" sz="quarter" idx="12"/>
+          </p:nvPr>
+        </p:nvSpPr>
+        <p:spPr/>
+        <p:txBody>
+          <a:bodyPr/>
+          <a:lstStyle/>
+          <a:p>
+            <a:fld id="{9F4AF89A-28FA-47FA-B28F-9A9C6913CB7A}" type="slidenum">
+              <a:rPr lang="ko-KR" altLang="en-US" smtClean="0"/>
+              <a:t>3</a:t>
+            </a:fld>
+            <a:endParaRPr lang="ko-KR" altLang="en-US" dirty="0"/>
+          </a:p>
+        </p:txBody>
+      </p:sp>
+    </p:spTree>
+    <p:extLst>
+      <p:ext uri="{BB962C8B-B14F-4D97-AF65-F5344CB8AC3E}">
+        <p14:creationId xmlns:p14="http://schemas.microsoft.com/office/powerpoint/2010/main" val="3808511553"/>
+      </p:ext>
+    </p:extLst>
+  </p:cSld>
+  <p:clrMapOvr>
+    <a:masterClrMapping/>
+  </p:clrMapOvr>
+</p:sld>
+</file>
+
+<file path=ppt/slides/slide30.xml><?xml version="1.0" encoding="utf-8"?>
 <p:sld xmlns:a="http://schemas.openxmlformats.org/drawingml/2006/main" xmlns:r="http://schemas.openxmlformats.org/officeDocument/2006/relationships" xmlns:p="http://schemas.openxmlformats.org/presentationml/2006/main">
   <p:cSld>
     <p:spTree>
@@ -28778,7 +30089,7 @@
           <a:p>
             <a:fld id="{9F4AF89A-28FA-47FA-B28F-9A9C6913CB7A}" type="slidenum">
               <a:rPr lang="ko-KR" altLang="en-US" smtClean="0"/>
-              <a:t>28</a:t>
+              <a:t>30</a:t>
             </a:fld>
             <a:endParaRPr lang="ko-KR" altLang="en-US" dirty="0"/>
           </a:p>
@@ -28797,7 +30108,7 @@
 </p:sld>
 </file>
 
-<file path=ppt/slides/slide29.xml><?xml version="1.0" encoding="utf-8"?>
+<file path=ppt/slides/slide31.xml><?xml version="1.0" encoding="utf-8"?>
 <p:sld xmlns:a="http://schemas.openxmlformats.org/drawingml/2006/main" xmlns:r="http://schemas.openxmlformats.org/officeDocument/2006/relationships" xmlns:p="http://schemas.openxmlformats.org/presentationml/2006/main">
   <p:cSld>
     <p:spTree>
@@ -28905,7 +30216,7 @@
           <a:p>
             <a:fld id="{9F4AF89A-28FA-47FA-B28F-9A9C6913CB7A}" type="slidenum">
               <a:rPr lang="ko-KR" altLang="en-US" smtClean="0"/>
-              <a:t>29</a:t>
+              <a:t>31</a:t>
             </a:fld>
             <a:endParaRPr lang="ko-KR" altLang="en-US" dirty="0"/>
           </a:p>
@@ -30282,256 +31593,7 @@
 </p:sld>
 </file>
 
-<file path=ppt/slides/slide3.xml><?xml version="1.0" encoding="utf-8"?>
-<p:sld xmlns:a="http://schemas.openxmlformats.org/drawingml/2006/main" xmlns:r="http://schemas.openxmlformats.org/officeDocument/2006/relationships" xmlns:p="http://schemas.openxmlformats.org/presentationml/2006/main">
-  <p:cSld>
-    <p:spTree>
-      <p:nvGrpSpPr>
-        <p:cNvPr id="1" name=""/>
-        <p:cNvGrpSpPr/>
-        <p:nvPr/>
-      </p:nvGrpSpPr>
-      <p:grpSpPr>
-        <a:xfrm>
-          <a:off x="0" y="0"/>
-          <a:ext cx="0" cy="0"/>
-          <a:chOff x="0" y="0"/>
-          <a:chExt cx="0" cy="0"/>
-        </a:xfrm>
-      </p:grpSpPr>
-      <p:sp>
-        <p:nvSpPr>
-          <p:cNvPr id="2" name="제목 1">
-            <a:extLst>
-              <a:ext uri="{FF2B5EF4-FFF2-40B4-BE49-F238E27FC236}">
-                <a16:creationId xmlns:a16="http://schemas.microsoft.com/office/drawing/2014/main" id="{9AF0C8C8-C4B1-4336-9468-E6803A595282}"/>
-              </a:ext>
-            </a:extLst>
-          </p:cNvPr>
-          <p:cNvSpPr>
-            <a:spLocks noGrp="1"/>
-          </p:cNvSpPr>
-          <p:nvPr>
-            <p:ph type="title"/>
-          </p:nvPr>
-        </p:nvSpPr>
-        <p:spPr/>
-        <p:txBody>
-          <a:bodyPr/>
-          <a:lstStyle/>
-          <a:p>
-            <a:r>
-              <a:rPr lang="en-US" altLang="ko-KR" dirty="0"/>
-              <a:t>2. Research</a:t>
-            </a:r>
-            <a:r>
-              <a:rPr lang="ko-KR" altLang="en-US" dirty="0"/>
-              <a:t> </a:t>
-            </a:r>
-            <a:r>
-              <a:rPr lang="en-US" altLang="ko-KR" dirty="0"/>
-              <a:t>Summary</a:t>
-            </a:r>
-            <a:endParaRPr lang="ko-KR" altLang="en-US" dirty="0"/>
-          </a:p>
-        </p:txBody>
-      </p:sp>
-      <p:sp>
-        <p:nvSpPr>
-          <p:cNvPr id="3" name="내용 개체 틀 2">
-            <a:extLst>
-              <a:ext uri="{FF2B5EF4-FFF2-40B4-BE49-F238E27FC236}">
-                <a16:creationId xmlns:a16="http://schemas.microsoft.com/office/drawing/2014/main" id="{A84C152F-6AC6-4EBB-8679-327588602FD5}"/>
-              </a:ext>
-            </a:extLst>
-          </p:cNvPr>
-          <p:cNvSpPr>
-            <a:spLocks noGrp="1"/>
-          </p:cNvSpPr>
-          <p:nvPr>
-            <p:ph idx="1"/>
-          </p:nvPr>
-        </p:nvSpPr>
-        <p:spPr/>
-        <p:txBody>
-          <a:bodyPr/>
-          <a:lstStyle/>
-          <a:p>
-            <a:r>
-              <a:rPr lang="en-US" altLang="ko-KR" dirty="0"/>
-              <a:t>BMI</a:t>
-            </a:r>
-            <a:r>
-              <a:rPr lang="ko-KR" altLang="en-US" dirty="0"/>
-              <a:t> 데이터를 추가하여 </a:t>
-            </a:r>
-            <a:r>
-              <a:rPr lang="en-US" altLang="ko-KR" dirty="0"/>
-              <a:t>Regression </a:t>
-            </a:r>
-            <a:r>
-              <a:rPr lang="ko-KR" altLang="en-US" dirty="0"/>
-              <a:t>분석 진행</a:t>
-            </a:r>
-            <a:endParaRPr lang="en-US" altLang="ko-KR" dirty="0"/>
-          </a:p>
-          <a:p>
-            <a:r>
-              <a:rPr lang="en-US" altLang="ko-KR" dirty="0"/>
-              <a:t>AEC Feature </a:t>
-            </a:r>
-            <a:r>
-              <a:rPr lang="ko-KR" altLang="en-US" dirty="0"/>
-              <a:t>비교 </a:t>
-            </a:r>
-            <a:r>
-              <a:rPr lang="en-US" altLang="ko-KR" dirty="0"/>
-              <a:t>(</a:t>
-            </a:r>
-            <a:r>
-              <a:rPr lang="ko-KR" altLang="en-US" dirty="0"/>
-              <a:t>이전 연구</a:t>
-            </a:r>
-            <a:r>
-              <a:rPr lang="en-US" altLang="ko-KR" dirty="0"/>
-              <a:t>, </a:t>
-            </a:r>
-            <a:r>
-              <a:rPr lang="ko-KR" altLang="en-US" dirty="0"/>
-              <a:t>모든 케이스 확인</a:t>
-            </a:r>
-            <a:r>
-              <a:rPr lang="en-US" altLang="ko-KR" dirty="0"/>
-              <a:t>)</a:t>
-            </a:r>
-          </a:p>
-          <a:p>
-            <a:pPr lvl="1"/>
-            <a:r>
-              <a:rPr lang="en-US" altLang="ko-KR" dirty="0"/>
-              <a:t>Case1 [</a:t>
-            </a:r>
-            <a:r>
-              <a:rPr lang="ko-KR" altLang="en-US" dirty="0"/>
-              <a:t>성별</a:t>
-            </a:r>
-            <a:r>
-              <a:rPr lang="en-US" altLang="ko-KR" dirty="0"/>
-              <a:t>, </a:t>
-            </a:r>
-            <a:r>
-              <a:rPr lang="ko-KR" altLang="en-US" dirty="0"/>
-              <a:t>나이</a:t>
-            </a:r>
-            <a:r>
-              <a:rPr lang="en-US" altLang="ko-KR" dirty="0"/>
-              <a:t>, BMI], Case2 [+AEC features], Case3 [+</a:t>
-            </a:r>
-            <a:r>
-              <a:rPr lang="ko-KR" altLang="en-US" dirty="0"/>
-              <a:t>모델명</a:t>
-            </a:r>
-            <a:r>
-              <a:rPr lang="en-US" altLang="ko-KR" dirty="0"/>
-              <a:t>, </a:t>
-            </a:r>
-            <a:r>
-              <a:rPr lang="en-US" altLang="ko-KR" dirty="0" err="1"/>
-              <a:t>kVp</a:t>
-            </a:r>
-            <a:r>
-              <a:rPr lang="en-US" altLang="ko-KR" dirty="0"/>
-              <a:t>]</a:t>
-            </a:r>
-          </a:p>
-          <a:p>
-            <a:pPr lvl="1"/>
-            <a:r>
-              <a:rPr lang="en-US" altLang="ko-KR" dirty="0"/>
-              <a:t>AEC features</a:t>
-            </a:r>
-            <a:r>
-              <a:rPr lang="ko-KR" altLang="en-US" dirty="0"/>
-              <a:t>의 경우 이전 연구에 사용되었던 </a:t>
-            </a:r>
-            <a:r>
-              <a:rPr lang="en-US" altLang="ko-KR" dirty="0"/>
-              <a:t>[mean, CV, skewness, </a:t>
-            </a:r>
-            <a:r>
-              <a:rPr lang="en-US" altLang="ko-KR" dirty="0" err="1"/>
-              <a:t>slope_abs_mean</a:t>
-            </a:r>
-            <a:r>
-              <a:rPr lang="en-US" altLang="ko-KR" dirty="0"/>
-              <a:t>]</a:t>
-            </a:r>
-            <a:r>
-              <a:rPr lang="ko-KR" altLang="en-US" dirty="0"/>
-              <a:t>과 새로운 </a:t>
-            </a:r>
-            <a:r>
-              <a:rPr lang="en-US" altLang="ko-KR" dirty="0"/>
-              <a:t>features 9</a:t>
-            </a:r>
-            <a:r>
-              <a:rPr lang="ko-KR" altLang="en-US" dirty="0"/>
-              <a:t>개를 모두 확인하고 성능 비교</a:t>
-            </a:r>
-            <a:endParaRPr lang="en-US" altLang="ko-KR" dirty="0"/>
-          </a:p>
-          <a:p>
-            <a:pPr lvl="1"/>
-            <a:endParaRPr lang="en-US" altLang="ko-KR" dirty="0"/>
-          </a:p>
-          <a:p>
-            <a:endParaRPr lang="en-US" altLang="ko-KR" dirty="0"/>
-          </a:p>
-        </p:txBody>
-      </p:sp>
-      <p:sp>
-        <p:nvSpPr>
-          <p:cNvPr id="4" name="슬라이드 번호 개체 틀 3">
-            <a:extLst>
-              <a:ext uri="{FF2B5EF4-FFF2-40B4-BE49-F238E27FC236}">
-                <a16:creationId xmlns:a16="http://schemas.microsoft.com/office/drawing/2014/main" id="{967768F2-76AD-4898-ABAE-26C158880624}"/>
-              </a:ext>
-            </a:extLst>
-          </p:cNvPr>
-          <p:cNvSpPr>
-            <a:spLocks noGrp="1"/>
-          </p:cNvSpPr>
-          <p:nvPr>
-            <p:ph type="sldNum" sz="quarter" idx="12"/>
-          </p:nvPr>
-        </p:nvSpPr>
-        <p:spPr/>
-        <p:txBody>
-          <a:bodyPr/>
-          <a:lstStyle/>
-          <a:p>
-            <a:fld id="{9F4AF89A-28FA-47FA-B28F-9A9C6913CB7A}" type="slidenum">
-              <a:rPr lang="ko-KR" altLang="en-US" smtClean="0"/>
-              <a:t>3</a:t>
-            </a:fld>
-            <a:endParaRPr lang="ko-KR" altLang="en-US" dirty="0"/>
-          </a:p>
-        </p:txBody>
-      </p:sp>
-    </p:spTree>
-    <p:extLst>
-      <p:ext uri="{BB962C8B-B14F-4D97-AF65-F5344CB8AC3E}">
-        <p14:creationId xmlns:p14="http://schemas.microsoft.com/office/powerpoint/2010/main" val="3808511553"/>
-      </p:ext>
-    </p:extLst>
-  </p:cSld>
-  <p:clrMapOvr>
-    <a:masterClrMapping/>
-  </p:clrMapOvr>
-</p:sld>
-</file>
-
-<file path=ppt/slides/slide30.xml><?xml version="1.0" encoding="utf-8"?>
+<file path=ppt/slides/slide32.xml><?xml version="1.0" encoding="utf-8"?>
 <p:sld xmlns:a="http://schemas.openxmlformats.org/drawingml/2006/main" xmlns:r="http://schemas.openxmlformats.org/officeDocument/2006/relationships" xmlns:p="http://schemas.openxmlformats.org/presentationml/2006/main">
   <p:cSld>
     <p:spTree>
@@ -30681,7 +31743,7 @@
           <a:p>
             <a:fld id="{9F4AF89A-28FA-47FA-B28F-9A9C6913CB7A}" type="slidenum">
               <a:rPr lang="ko-KR" altLang="en-US" smtClean="0"/>
-              <a:t>30</a:t>
+              <a:t>32</a:t>
             </a:fld>
             <a:endParaRPr lang="ko-KR" altLang="en-US" dirty="0"/>
           </a:p>
@@ -31703,7 +32765,7 @@
 </p:sld>
 </file>
 
-<file path=ppt/slides/slide31.xml><?xml version="1.0" encoding="utf-8"?>
+<file path=ppt/slides/slide33.xml><?xml version="1.0" encoding="utf-8"?>
 <p:sld xmlns:a="http://schemas.openxmlformats.org/drawingml/2006/main" xmlns:r="http://schemas.openxmlformats.org/officeDocument/2006/relationships" xmlns:p="http://schemas.openxmlformats.org/presentationml/2006/main">
   <p:cSld>
     <p:spTree>
@@ -31817,7 +32879,7 @@
           <a:p>
             <a:fld id="{9F4AF89A-28FA-47FA-B28F-9A9C6913CB7A}" type="slidenum">
               <a:rPr lang="ko-KR" altLang="en-US" smtClean="0"/>
-              <a:t>31</a:t>
+              <a:t>33</a:t>
             </a:fld>
             <a:endParaRPr lang="ko-KR" altLang="en-US" dirty="0"/>
           </a:p>
@@ -33174,7 +34236,7 @@
 </p:sld>
 </file>
 
-<file path=ppt/slides/slide32.xml><?xml version="1.0" encoding="utf-8"?>
+<file path=ppt/slides/slide34.xml><?xml version="1.0" encoding="utf-8"?>
 <p:sld xmlns:a="http://schemas.openxmlformats.org/drawingml/2006/main" xmlns:r="http://schemas.openxmlformats.org/officeDocument/2006/relationships" xmlns:p="http://schemas.openxmlformats.org/presentationml/2006/main">
   <p:cSld>
     <p:spTree>
@@ -33318,7 +34380,7 @@
           <a:p>
             <a:fld id="{9F4AF89A-28FA-47FA-B28F-9A9C6913CB7A}" type="slidenum">
               <a:rPr lang="ko-KR" altLang="en-US" smtClean="0"/>
-              <a:t>32</a:t>
+              <a:t>34</a:t>
             </a:fld>
             <a:endParaRPr lang="ko-KR" altLang="en-US" dirty="0"/>
           </a:p>
@@ -34340,7 +35402,7 @@
 </p:sld>
 </file>
 
-<file path=ppt/slides/slide33.xml><?xml version="1.0" encoding="utf-8"?>
+<file path=ppt/slides/slide35.xml><?xml version="1.0" encoding="utf-8"?>
 <p:sld xmlns:a="http://schemas.openxmlformats.org/drawingml/2006/main" xmlns:r="http://schemas.openxmlformats.org/officeDocument/2006/relationships" xmlns:p="http://schemas.openxmlformats.org/presentationml/2006/main">
   <p:cSld>
     <p:spTree>
@@ -34454,7 +35516,7 @@
           <a:p>
             <a:fld id="{9F4AF89A-28FA-47FA-B28F-9A9C6913CB7A}" type="slidenum">
               <a:rPr lang="ko-KR" altLang="en-US" smtClean="0"/>
-              <a:t>33</a:t>
+              <a:t>35</a:t>
             </a:fld>
             <a:endParaRPr lang="ko-KR" altLang="en-US" dirty="0"/>
           </a:p>
@@ -35852,7 +36914,7 @@
 </p:sld>
 </file>
 
-<file path=ppt/slides/slide34.xml><?xml version="1.0" encoding="utf-8"?>
+<file path=ppt/slides/slide36.xml><?xml version="1.0" encoding="utf-8"?>
 <p:sld xmlns:a="http://schemas.openxmlformats.org/drawingml/2006/main" xmlns:r="http://schemas.openxmlformats.org/officeDocument/2006/relationships" xmlns:p="http://schemas.openxmlformats.org/presentationml/2006/main">
   <p:cSld>
     <p:spTree>
@@ -35960,7 +37022,7 @@
           <a:p>
             <a:fld id="{9F4AF89A-28FA-47FA-B28F-9A9C6913CB7A}" type="slidenum">
               <a:rPr lang="ko-KR" altLang="en-US" smtClean="0"/>
-              <a:t>34</a:t>
+              <a:t>36</a:t>
             </a:fld>
             <a:endParaRPr lang="ko-KR" altLang="en-US" dirty="0"/>
           </a:p>
@@ -37205,7 +38267,7 @@
 </p:sld>
 </file>
 
-<file path=ppt/slides/slide35.xml><?xml version="1.0" encoding="utf-8"?>
+<file path=ppt/slides/slide37.xml><?xml version="1.0" encoding="utf-8"?>
 <p:sld xmlns:a="http://schemas.openxmlformats.org/drawingml/2006/main" xmlns:r="http://schemas.openxmlformats.org/officeDocument/2006/relationships" xmlns:p="http://schemas.openxmlformats.org/presentationml/2006/main">
   <p:cSld>
     <p:spTree>
@@ -37349,7 +38411,7 @@
           <a:p>
             <a:fld id="{9F4AF89A-28FA-47FA-B28F-9A9C6913CB7A}" type="slidenum">
               <a:rPr lang="ko-KR" altLang="en-US" smtClean="0"/>
-              <a:t>35</a:t>
+              <a:t>37</a:t>
             </a:fld>
             <a:endParaRPr lang="ko-KR" altLang="en-US" dirty="0"/>
           </a:p>
@@ -38798,7 +39860,7 @@
 </p:sld>
 </file>
 
-<file path=ppt/slides/slide36.xml><?xml version="1.0" encoding="utf-8"?>
+<file path=ppt/slides/slide38.xml><?xml version="1.0" encoding="utf-8"?>
 <p:sld xmlns:a="http://schemas.openxmlformats.org/drawingml/2006/main" xmlns:r="http://schemas.openxmlformats.org/officeDocument/2006/relationships" xmlns:p="http://schemas.openxmlformats.org/presentationml/2006/main">
   <p:cSld>
     <p:spTree>
@@ -38942,7 +40004,7 @@
           <a:p>
             <a:fld id="{9F4AF89A-28FA-47FA-B28F-9A9C6913CB7A}" type="slidenum">
               <a:rPr lang="ko-KR" altLang="en-US" smtClean="0"/>
-              <a:t>36</a:t>
+              <a:t>38</a:t>
             </a:fld>
             <a:endParaRPr lang="ko-KR" altLang="en-US" dirty="0"/>
           </a:p>
@@ -40151,7 +41213,7 @@
 </p:sld>
 </file>
 
-<file path=ppt/slides/slide37.xml><?xml version="1.0" encoding="utf-8"?>
+<file path=ppt/slides/slide39.xml><?xml version="1.0" encoding="utf-8"?>
 <p:sld xmlns:a="http://schemas.openxmlformats.org/drawingml/2006/main" xmlns:r="http://schemas.openxmlformats.org/officeDocument/2006/relationships" xmlns:p="http://schemas.openxmlformats.org/presentationml/2006/main">
   <p:cSld>
     <p:spTree>
@@ -40269,7 +41331,7 @@
           <a:p>
             <a:fld id="{9F4AF89A-28FA-47FA-B28F-9A9C6913CB7A}" type="slidenum">
               <a:rPr lang="ko-KR" altLang="en-US" smtClean="0"/>
-              <a:t>37</a:t>
+              <a:t>39</a:t>
             </a:fld>
             <a:endParaRPr lang="ko-KR" altLang="en-US" dirty="0"/>
           </a:p>
@@ -40498,503 +41560,6 @@
 </p:sld>
 </file>
 
-<file path=ppt/slides/slide38.xml><?xml version="1.0" encoding="utf-8"?>
-<p:sld xmlns:a="http://schemas.openxmlformats.org/drawingml/2006/main" xmlns:r="http://schemas.openxmlformats.org/officeDocument/2006/relationships" xmlns:p="http://schemas.openxmlformats.org/presentationml/2006/main">
-  <p:cSld>
-    <p:spTree>
-      <p:nvGrpSpPr>
-        <p:cNvPr id="1" name="">
-          <a:extLst>
-            <a:ext uri="{FF2B5EF4-FFF2-40B4-BE49-F238E27FC236}">
-              <a16:creationId xmlns:a16="http://schemas.microsoft.com/office/drawing/2014/main" id="{0674114E-B2FF-5818-CB8D-1DB297478403}"/>
-            </a:ext>
-          </a:extLst>
-        </p:cNvPr>
-        <p:cNvGrpSpPr/>
-        <p:nvPr/>
-      </p:nvGrpSpPr>
-      <p:grpSpPr>
-        <a:xfrm>
-          <a:off x="0" y="0"/>
-          <a:ext cx="0" cy="0"/>
-          <a:chOff x="0" y="0"/>
-          <a:chExt cx="0" cy="0"/>
-        </a:xfrm>
-      </p:grpSpPr>
-      <p:sp>
-        <p:nvSpPr>
-          <p:cNvPr id="3" name="내용 개체 틀 2">
-            <a:extLst>
-              <a:ext uri="{FF2B5EF4-FFF2-40B4-BE49-F238E27FC236}">
-                <a16:creationId xmlns:a16="http://schemas.microsoft.com/office/drawing/2014/main" id="{4A6E2355-4048-EA0F-4FD6-16AEF5CFD800}"/>
-              </a:ext>
-            </a:extLst>
-          </p:cNvPr>
-          <p:cNvSpPr>
-            <a:spLocks noGrp="1"/>
-          </p:cNvSpPr>
-          <p:nvPr>
-            <p:ph idx="1"/>
-          </p:nvPr>
-        </p:nvSpPr>
-        <p:spPr/>
-        <p:txBody>
-          <a:bodyPr>
-            <a:normAutofit/>
-          </a:bodyPr>
-          <a:lstStyle/>
-          <a:p>
-            <a:r>
-              <a:rPr lang="en-US" altLang="ko-KR" dirty="0"/>
-              <a:t>BMI </a:t>
-            </a:r>
-            <a:r>
-              <a:rPr lang="ko-KR" altLang="en-US" dirty="0"/>
-              <a:t>데이터 병합 현황</a:t>
-            </a:r>
-            <a:endParaRPr lang="en-US" altLang="ko-KR" dirty="0"/>
-          </a:p>
-          <a:p>
-            <a:pPr lvl="1"/>
-            <a:r>
-              <a:rPr lang="ko-KR" altLang="en-US" dirty="0"/>
-              <a:t>강남 데이터</a:t>
-            </a:r>
-            <a:endParaRPr lang="en-US" altLang="ko-KR" dirty="0"/>
-          </a:p>
-          <a:p>
-            <a:pPr lvl="2"/>
-            <a:r>
-              <a:rPr lang="en-US" altLang="ko-KR" dirty="0"/>
-              <a:t>2,025</a:t>
-            </a:r>
-            <a:r>
-              <a:rPr lang="ko-KR" altLang="en-US" dirty="0"/>
-              <a:t>명 中 </a:t>
-            </a:r>
-            <a:r>
-              <a:rPr lang="en-US" altLang="ko-KR" dirty="0"/>
-              <a:t>383</a:t>
-            </a:r>
-            <a:r>
-              <a:rPr lang="ko-KR" altLang="en-US" dirty="0"/>
-              <a:t>명 </a:t>
-            </a:r>
-            <a:r>
-              <a:rPr lang="en-US" altLang="ko-KR" dirty="0"/>
-              <a:t>(18.9%)</a:t>
-            </a:r>
-            <a:r>
-              <a:rPr lang="ko-KR" altLang="en-US" dirty="0"/>
-              <a:t> </a:t>
-            </a:r>
-            <a:r>
-              <a:rPr lang="en-US" altLang="ko-KR" dirty="0"/>
-              <a:t>: </a:t>
-            </a:r>
-            <a:r>
-              <a:rPr lang="ko-KR" altLang="en-US" dirty="0"/>
-              <a:t>신장</a:t>
-            </a:r>
-            <a:r>
-              <a:rPr lang="en-US" altLang="ko-KR" dirty="0"/>
-              <a:t>, </a:t>
-            </a:r>
-            <a:r>
-              <a:rPr lang="ko-KR" altLang="en-US" dirty="0"/>
-              <a:t>체중</a:t>
-            </a:r>
-            <a:r>
-              <a:rPr lang="en-US" altLang="ko-KR" dirty="0"/>
-              <a:t>, BMI </a:t>
-            </a:r>
-            <a:r>
-              <a:rPr lang="ko-KR" altLang="en-US" dirty="0"/>
-              <a:t>데이터 부재</a:t>
-            </a:r>
-            <a:endParaRPr lang="en-US" altLang="ko-KR" dirty="0"/>
-          </a:p>
-          <a:p>
-            <a:pPr lvl="1"/>
-            <a:r>
-              <a:rPr lang="ko-KR" altLang="en-US" dirty="0"/>
-              <a:t>신촌 데이터</a:t>
-            </a:r>
-            <a:endParaRPr lang="en-US" altLang="ko-KR" dirty="0"/>
-          </a:p>
-          <a:p>
-            <a:pPr lvl="2"/>
-            <a:r>
-              <a:rPr lang="en-US" altLang="ko-KR" dirty="0"/>
-              <a:t>2,257</a:t>
-            </a:r>
-            <a:r>
-              <a:rPr lang="ko-KR" altLang="en-US" dirty="0"/>
-              <a:t>명 中 </a:t>
-            </a:r>
-            <a:r>
-              <a:rPr lang="en-US" altLang="ko-KR" dirty="0"/>
-              <a:t>3</a:t>
-            </a:r>
-            <a:r>
-              <a:rPr lang="ko-KR" altLang="en-US" dirty="0"/>
-              <a:t>명 </a:t>
-            </a:r>
-            <a:r>
-              <a:rPr lang="en-US" altLang="ko-KR" dirty="0"/>
-              <a:t>(0.13%) : </a:t>
-            </a:r>
-            <a:r>
-              <a:rPr lang="ko-KR" altLang="en-US" dirty="0"/>
-              <a:t>신장</a:t>
-            </a:r>
-            <a:r>
-              <a:rPr lang="en-US" altLang="ko-KR" dirty="0"/>
-              <a:t>, </a:t>
-            </a:r>
-            <a:r>
-              <a:rPr lang="ko-KR" altLang="en-US" dirty="0"/>
-              <a:t>체중</a:t>
-            </a:r>
-            <a:r>
-              <a:rPr lang="en-US" altLang="ko-KR" dirty="0"/>
-              <a:t>, BMI </a:t>
-            </a:r>
-            <a:r>
-              <a:rPr lang="ko-KR" altLang="en-US" dirty="0"/>
-              <a:t>데이터 부재</a:t>
-            </a:r>
-            <a:endParaRPr lang="en-US" altLang="ko-KR" dirty="0"/>
-          </a:p>
-          <a:p>
-            <a:pPr lvl="1"/>
-            <a:r>
-              <a:rPr lang="ko-KR" altLang="en-US" dirty="0"/>
-              <a:t>신촌 </a:t>
-            </a:r>
-            <a:r>
-              <a:rPr lang="ko-KR" altLang="en-US" dirty="0" err="1"/>
-              <a:t>결측치는</a:t>
-            </a:r>
-            <a:r>
-              <a:rPr lang="ko-KR" altLang="en-US" dirty="0"/>
-              <a:t> 제외하지만</a:t>
-            </a:r>
-            <a:r>
-              <a:rPr lang="en-US" altLang="ko-KR" dirty="0"/>
-              <a:t>, </a:t>
-            </a:r>
-            <a:r>
-              <a:rPr lang="ko-KR" altLang="en-US" dirty="0"/>
-              <a:t>강남 </a:t>
-            </a:r>
-            <a:r>
-              <a:rPr lang="ko-KR" altLang="en-US" dirty="0" err="1"/>
-              <a:t>결측치는</a:t>
-            </a:r>
-            <a:r>
-              <a:rPr lang="ko-KR" altLang="en-US" dirty="0"/>
-              <a:t> 비율이 꽤 높음</a:t>
-            </a:r>
-            <a:endParaRPr lang="en-US" altLang="ko-KR" dirty="0"/>
-          </a:p>
-          <a:p>
-            <a:pPr lvl="1"/>
-            <a:r>
-              <a:rPr lang="ko-KR" altLang="en-US" dirty="0"/>
-              <a:t>강남 </a:t>
-            </a:r>
-            <a:r>
-              <a:rPr lang="ko-KR" altLang="en-US" dirty="0" err="1"/>
-              <a:t>결측치의</a:t>
-            </a:r>
-            <a:r>
-              <a:rPr lang="ko-KR" altLang="en-US" dirty="0"/>
-              <a:t> </a:t>
-            </a:r>
-            <a:r>
-              <a:rPr lang="en-US" altLang="ko-KR" dirty="0"/>
-              <a:t>92%</a:t>
-            </a:r>
-            <a:r>
-              <a:rPr lang="ko-KR" altLang="en-US" dirty="0"/>
-              <a:t>가 </a:t>
-            </a:r>
-            <a:r>
-              <a:rPr lang="en-US" altLang="ko-KR" dirty="0"/>
-              <a:t>BMI</a:t>
-            </a:r>
-            <a:r>
-              <a:rPr lang="ko-KR" altLang="en-US" dirty="0"/>
-              <a:t> 파일에서 병원 구분이 신촌으로 되어 있음</a:t>
-            </a:r>
-            <a:endParaRPr lang="en-US" altLang="ko-KR" dirty="0"/>
-          </a:p>
-        </p:txBody>
-      </p:sp>
-      <p:sp>
-        <p:nvSpPr>
-          <p:cNvPr id="2" name="제목 1">
-            <a:extLst>
-              <a:ext uri="{FF2B5EF4-FFF2-40B4-BE49-F238E27FC236}">
-                <a16:creationId xmlns:a16="http://schemas.microsoft.com/office/drawing/2014/main" id="{7B2D737D-D466-5D4B-3B59-BE0987322487}"/>
-              </a:ext>
-            </a:extLst>
-          </p:cNvPr>
-          <p:cNvSpPr>
-            <a:spLocks noGrp="1"/>
-          </p:cNvSpPr>
-          <p:nvPr>
-            <p:ph type="title"/>
-          </p:nvPr>
-        </p:nvSpPr>
-        <p:spPr/>
-        <p:txBody>
-          <a:bodyPr/>
-          <a:lstStyle/>
-          <a:p>
-            <a:r>
-              <a:rPr lang="en-US" altLang="ko-KR" dirty="0"/>
-              <a:t>3. </a:t>
-            </a:r>
-            <a:r>
-              <a:rPr lang="en-US" altLang="ko-KR"/>
-              <a:t>Detailed progress</a:t>
-            </a:r>
-            <a:endParaRPr lang="ko-KR" altLang="en-US" dirty="0"/>
-          </a:p>
-        </p:txBody>
-      </p:sp>
-      <p:sp>
-        <p:nvSpPr>
-          <p:cNvPr id="4" name="슬라이드 번호 개체 틀 3">
-            <a:extLst>
-              <a:ext uri="{FF2B5EF4-FFF2-40B4-BE49-F238E27FC236}">
-                <a16:creationId xmlns:a16="http://schemas.microsoft.com/office/drawing/2014/main" id="{F190B83B-B820-DA13-4B87-1CDBCFC24A69}"/>
-              </a:ext>
-            </a:extLst>
-          </p:cNvPr>
-          <p:cNvSpPr>
-            <a:spLocks noGrp="1"/>
-          </p:cNvSpPr>
-          <p:nvPr>
-            <p:ph type="sldNum" sz="quarter" idx="12"/>
-          </p:nvPr>
-        </p:nvSpPr>
-        <p:spPr/>
-        <p:txBody>
-          <a:bodyPr/>
-          <a:lstStyle/>
-          <a:p>
-            <a:fld id="{9F4AF89A-28FA-47FA-B28F-9A9C6913CB7A}" type="slidenum">
-              <a:rPr lang="ko-KR" altLang="en-US" smtClean="0"/>
-              <a:t>38</a:t>
-            </a:fld>
-            <a:endParaRPr lang="ko-KR" altLang="en-US" dirty="0"/>
-          </a:p>
-        </p:txBody>
-      </p:sp>
-    </p:spTree>
-    <p:extLst>
-      <p:ext uri="{BB962C8B-B14F-4D97-AF65-F5344CB8AC3E}">
-        <p14:creationId xmlns:p14="http://schemas.microsoft.com/office/powerpoint/2010/main" val="3506109384"/>
-      </p:ext>
-    </p:extLst>
-  </p:cSld>
-  <p:clrMapOvr>
-    <a:masterClrMapping/>
-  </p:clrMapOvr>
-</p:sld>
-</file>
-
-<file path=ppt/slides/slide39.xml><?xml version="1.0" encoding="utf-8"?>
-<p:sld xmlns:a="http://schemas.openxmlformats.org/drawingml/2006/main" xmlns:r="http://schemas.openxmlformats.org/officeDocument/2006/relationships" xmlns:p="http://schemas.openxmlformats.org/presentationml/2006/main">
-  <p:cSld>
-    <p:spTree>
-      <p:nvGrpSpPr>
-        <p:cNvPr id="1" name=""/>
-        <p:cNvGrpSpPr/>
-        <p:nvPr/>
-      </p:nvGrpSpPr>
-      <p:grpSpPr>
-        <a:xfrm>
-          <a:off x="0" y="0"/>
-          <a:ext cx="0" cy="0"/>
-          <a:chOff x="0" y="0"/>
-          <a:chExt cx="0" cy="0"/>
-        </a:xfrm>
-      </p:grpSpPr>
-      <p:sp>
-        <p:nvSpPr>
-          <p:cNvPr id="3" name="내용 개체 틀 2">
-            <a:extLst>
-              <a:ext uri="{FF2B5EF4-FFF2-40B4-BE49-F238E27FC236}">
-                <a16:creationId xmlns:a16="http://schemas.microsoft.com/office/drawing/2014/main" id="{A84C152F-6AC6-4EBB-8679-327588602FD5}"/>
-              </a:ext>
-            </a:extLst>
-          </p:cNvPr>
-          <p:cNvSpPr>
-            <a:spLocks noGrp="1"/>
-          </p:cNvSpPr>
-          <p:nvPr>
-            <p:ph idx="1"/>
-          </p:nvPr>
-        </p:nvSpPr>
-        <p:spPr/>
-        <p:txBody>
-          <a:bodyPr>
-            <a:normAutofit/>
-          </a:bodyPr>
-          <a:lstStyle/>
-          <a:p>
-            <a:r>
-              <a:rPr lang="en-US" altLang="ko-KR" dirty="0"/>
-              <a:t>ML </a:t>
-            </a:r>
-            <a:r>
-              <a:rPr lang="ko-KR" altLang="en-US" dirty="0"/>
-              <a:t>기반 앙상블 모델 비교 </a:t>
-            </a:r>
-            <a:r>
-              <a:rPr lang="en-US" altLang="ko-KR" dirty="0"/>
-              <a:t>(Random Forest, </a:t>
-            </a:r>
-            <a:r>
-              <a:rPr lang="en-US" altLang="ko-KR" dirty="0" err="1"/>
-              <a:t>XGBoost</a:t>
-            </a:r>
-            <a:r>
-              <a:rPr lang="en-US" altLang="ko-KR" dirty="0"/>
-              <a:t> </a:t>
-            </a:r>
-            <a:r>
-              <a:rPr lang="ko-KR" altLang="en-US" dirty="0"/>
-              <a:t>등</a:t>
-            </a:r>
-            <a:r>
-              <a:rPr lang="en-US" altLang="ko-KR" dirty="0"/>
-              <a:t>)</a:t>
-            </a:r>
-          </a:p>
-          <a:p>
-            <a:r>
-              <a:rPr lang="ko-KR" altLang="en-US" dirty="0"/>
-              <a:t>신장</a:t>
-            </a:r>
-            <a:r>
-              <a:rPr lang="en-US" altLang="ko-KR" dirty="0"/>
-              <a:t>, </a:t>
-            </a:r>
-            <a:r>
-              <a:rPr lang="ko-KR" altLang="en-US" dirty="0"/>
-              <a:t>체중</a:t>
-            </a:r>
-            <a:r>
-              <a:rPr lang="en-US" altLang="ko-KR" dirty="0"/>
-              <a:t>, BMI</a:t>
-            </a:r>
-            <a:r>
-              <a:rPr lang="ko-KR" altLang="en-US" dirty="0"/>
-              <a:t>를 추가한 데이터셋으로 성능 비교</a:t>
-            </a:r>
-            <a:endParaRPr lang="en-US" altLang="ko-KR" dirty="0"/>
-          </a:p>
-          <a:p>
-            <a:r>
-              <a:rPr lang="ko-KR" altLang="en-US" dirty="0"/>
-              <a:t>추후 </a:t>
-            </a:r>
-            <a:r>
-              <a:rPr lang="en-US" altLang="ko-KR" dirty="0"/>
-              <a:t>SMI(TAMA/Height</a:t>
-            </a:r>
-            <a:r>
-              <a:rPr lang="en-US" altLang="ko-KR" baseline="30000" dirty="0"/>
-              <a:t>2</a:t>
-            </a:r>
-            <a:r>
-              <a:rPr lang="en-US" altLang="ko-KR" dirty="0"/>
-              <a:t>)</a:t>
-            </a:r>
-            <a:r>
-              <a:rPr lang="ko-KR" altLang="en-US" dirty="0"/>
-              <a:t>도 활용 가능</a:t>
-            </a:r>
-            <a:endParaRPr lang="en-US" altLang="ko-KR" dirty="0"/>
-          </a:p>
-        </p:txBody>
-      </p:sp>
-      <p:sp>
-        <p:nvSpPr>
-          <p:cNvPr id="2" name="제목 1">
-            <a:extLst>
-              <a:ext uri="{FF2B5EF4-FFF2-40B4-BE49-F238E27FC236}">
-                <a16:creationId xmlns:a16="http://schemas.microsoft.com/office/drawing/2014/main" id="{9AF0C8C8-C4B1-4336-9468-E6803A595282}"/>
-              </a:ext>
-            </a:extLst>
-          </p:cNvPr>
-          <p:cNvSpPr>
-            <a:spLocks noGrp="1"/>
-          </p:cNvSpPr>
-          <p:nvPr>
-            <p:ph type="title"/>
-          </p:nvPr>
-        </p:nvSpPr>
-        <p:spPr/>
-        <p:txBody>
-          <a:bodyPr/>
-          <a:lstStyle/>
-          <a:p>
-            <a:r>
-              <a:rPr lang="en-US" altLang="ko-KR" dirty="0"/>
-              <a:t>4. Next Plan</a:t>
-            </a:r>
-            <a:endParaRPr lang="ko-KR" altLang="en-US" dirty="0"/>
-          </a:p>
-        </p:txBody>
-      </p:sp>
-      <p:sp>
-        <p:nvSpPr>
-          <p:cNvPr id="4" name="슬라이드 번호 개체 틀 3">
-            <a:extLst>
-              <a:ext uri="{FF2B5EF4-FFF2-40B4-BE49-F238E27FC236}">
-                <a16:creationId xmlns:a16="http://schemas.microsoft.com/office/drawing/2014/main" id="{967768F2-76AD-4898-ABAE-26C158880624}"/>
-              </a:ext>
-            </a:extLst>
-          </p:cNvPr>
-          <p:cNvSpPr>
-            <a:spLocks noGrp="1"/>
-          </p:cNvSpPr>
-          <p:nvPr>
-            <p:ph type="sldNum" sz="quarter" idx="12"/>
-          </p:nvPr>
-        </p:nvSpPr>
-        <p:spPr/>
-        <p:txBody>
-          <a:bodyPr/>
-          <a:lstStyle/>
-          <a:p>
-            <a:fld id="{9F4AF89A-28FA-47FA-B28F-9A9C6913CB7A}" type="slidenum">
-              <a:rPr lang="ko-KR" altLang="en-US" smtClean="0"/>
-              <a:t>39</a:t>
-            </a:fld>
-            <a:endParaRPr lang="ko-KR" altLang="en-US" dirty="0"/>
-          </a:p>
-        </p:txBody>
-      </p:sp>
-    </p:spTree>
-    <p:extLst>
-      <p:ext uri="{BB962C8B-B14F-4D97-AF65-F5344CB8AC3E}">
-        <p14:creationId xmlns:p14="http://schemas.microsoft.com/office/powerpoint/2010/main" val="422661794"/>
-      </p:ext>
-    </p:extLst>
-  </p:cSld>
-  <p:clrMapOvr>
-    <a:masterClrMapping/>
-  </p:clrMapOvr>
-</p:sld>
-</file>
-
 <file path=ppt/slides/slide4.xml><?xml version="1.0" encoding="utf-8"?>
 <p:sld xmlns:a="http://schemas.openxmlformats.org/drawingml/2006/main" xmlns:r="http://schemas.openxmlformats.org/officeDocument/2006/relationships" xmlns:p="http://schemas.openxmlformats.org/presentationml/2006/main">
   <p:cSld>
@@ -41090,6 +41655,503 @@
 </file>
 
 <file path=ppt/slides/slide40.xml><?xml version="1.0" encoding="utf-8"?>
+<p:sld xmlns:a="http://schemas.openxmlformats.org/drawingml/2006/main" xmlns:r="http://schemas.openxmlformats.org/officeDocument/2006/relationships" xmlns:p="http://schemas.openxmlformats.org/presentationml/2006/main">
+  <p:cSld>
+    <p:spTree>
+      <p:nvGrpSpPr>
+        <p:cNvPr id="1" name="">
+          <a:extLst>
+            <a:ext uri="{FF2B5EF4-FFF2-40B4-BE49-F238E27FC236}">
+              <a16:creationId xmlns:a16="http://schemas.microsoft.com/office/drawing/2014/main" id="{0674114E-B2FF-5818-CB8D-1DB297478403}"/>
+            </a:ext>
+          </a:extLst>
+        </p:cNvPr>
+        <p:cNvGrpSpPr/>
+        <p:nvPr/>
+      </p:nvGrpSpPr>
+      <p:grpSpPr>
+        <a:xfrm>
+          <a:off x="0" y="0"/>
+          <a:ext cx="0" cy="0"/>
+          <a:chOff x="0" y="0"/>
+          <a:chExt cx="0" cy="0"/>
+        </a:xfrm>
+      </p:grpSpPr>
+      <p:sp>
+        <p:nvSpPr>
+          <p:cNvPr id="3" name="내용 개체 틀 2">
+            <a:extLst>
+              <a:ext uri="{FF2B5EF4-FFF2-40B4-BE49-F238E27FC236}">
+                <a16:creationId xmlns:a16="http://schemas.microsoft.com/office/drawing/2014/main" id="{4A6E2355-4048-EA0F-4FD6-16AEF5CFD800}"/>
+              </a:ext>
+            </a:extLst>
+          </p:cNvPr>
+          <p:cNvSpPr>
+            <a:spLocks noGrp="1"/>
+          </p:cNvSpPr>
+          <p:nvPr>
+            <p:ph idx="1"/>
+          </p:nvPr>
+        </p:nvSpPr>
+        <p:spPr/>
+        <p:txBody>
+          <a:bodyPr>
+            <a:normAutofit/>
+          </a:bodyPr>
+          <a:lstStyle/>
+          <a:p>
+            <a:r>
+              <a:rPr lang="en-US" altLang="ko-KR" dirty="0"/>
+              <a:t>BMI </a:t>
+            </a:r>
+            <a:r>
+              <a:rPr lang="ko-KR" altLang="en-US" dirty="0"/>
+              <a:t>데이터 병합 현황</a:t>
+            </a:r>
+            <a:endParaRPr lang="en-US" altLang="ko-KR" dirty="0"/>
+          </a:p>
+          <a:p>
+            <a:pPr lvl="1"/>
+            <a:r>
+              <a:rPr lang="ko-KR" altLang="en-US" dirty="0"/>
+              <a:t>강남 데이터</a:t>
+            </a:r>
+            <a:endParaRPr lang="en-US" altLang="ko-KR" dirty="0"/>
+          </a:p>
+          <a:p>
+            <a:pPr lvl="2"/>
+            <a:r>
+              <a:rPr lang="en-US" altLang="ko-KR" dirty="0"/>
+              <a:t>2,025</a:t>
+            </a:r>
+            <a:r>
+              <a:rPr lang="ko-KR" altLang="en-US" dirty="0"/>
+              <a:t>명 中 </a:t>
+            </a:r>
+            <a:r>
+              <a:rPr lang="en-US" altLang="ko-KR" dirty="0"/>
+              <a:t>383</a:t>
+            </a:r>
+            <a:r>
+              <a:rPr lang="ko-KR" altLang="en-US" dirty="0"/>
+              <a:t>명 </a:t>
+            </a:r>
+            <a:r>
+              <a:rPr lang="en-US" altLang="ko-KR" dirty="0"/>
+              <a:t>(18.9%)</a:t>
+            </a:r>
+            <a:r>
+              <a:rPr lang="ko-KR" altLang="en-US" dirty="0"/>
+              <a:t> </a:t>
+            </a:r>
+            <a:r>
+              <a:rPr lang="en-US" altLang="ko-KR" dirty="0"/>
+              <a:t>: </a:t>
+            </a:r>
+            <a:r>
+              <a:rPr lang="ko-KR" altLang="en-US" dirty="0"/>
+              <a:t>신장</a:t>
+            </a:r>
+            <a:r>
+              <a:rPr lang="en-US" altLang="ko-KR" dirty="0"/>
+              <a:t>, </a:t>
+            </a:r>
+            <a:r>
+              <a:rPr lang="ko-KR" altLang="en-US" dirty="0"/>
+              <a:t>체중</a:t>
+            </a:r>
+            <a:r>
+              <a:rPr lang="en-US" altLang="ko-KR" dirty="0"/>
+              <a:t>, BMI </a:t>
+            </a:r>
+            <a:r>
+              <a:rPr lang="ko-KR" altLang="en-US" dirty="0"/>
+              <a:t>데이터 부재</a:t>
+            </a:r>
+            <a:endParaRPr lang="en-US" altLang="ko-KR" dirty="0"/>
+          </a:p>
+          <a:p>
+            <a:pPr lvl="1"/>
+            <a:r>
+              <a:rPr lang="ko-KR" altLang="en-US" dirty="0"/>
+              <a:t>신촌 데이터</a:t>
+            </a:r>
+            <a:endParaRPr lang="en-US" altLang="ko-KR" dirty="0"/>
+          </a:p>
+          <a:p>
+            <a:pPr lvl="2"/>
+            <a:r>
+              <a:rPr lang="en-US" altLang="ko-KR" dirty="0"/>
+              <a:t>2,257</a:t>
+            </a:r>
+            <a:r>
+              <a:rPr lang="ko-KR" altLang="en-US" dirty="0"/>
+              <a:t>명 中 </a:t>
+            </a:r>
+            <a:r>
+              <a:rPr lang="en-US" altLang="ko-KR" dirty="0"/>
+              <a:t>3</a:t>
+            </a:r>
+            <a:r>
+              <a:rPr lang="ko-KR" altLang="en-US" dirty="0"/>
+              <a:t>명 </a:t>
+            </a:r>
+            <a:r>
+              <a:rPr lang="en-US" altLang="ko-KR" dirty="0"/>
+              <a:t>(0.13%) : </a:t>
+            </a:r>
+            <a:r>
+              <a:rPr lang="ko-KR" altLang="en-US" dirty="0"/>
+              <a:t>신장</a:t>
+            </a:r>
+            <a:r>
+              <a:rPr lang="en-US" altLang="ko-KR" dirty="0"/>
+              <a:t>, </a:t>
+            </a:r>
+            <a:r>
+              <a:rPr lang="ko-KR" altLang="en-US" dirty="0"/>
+              <a:t>체중</a:t>
+            </a:r>
+            <a:r>
+              <a:rPr lang="en-US" altLang="ko-KR" dirty="0"/>
+              <a:t>, BMI </a:t>
+            </a:r>
+            <a:r>
+              <a:rPr lang="ko-KR" altLang="en-US" dirty="0"/>
+              <a:t>데이터 부재</a:t>
+            </a:r>
+            <a:endParaRPr lang="en-US" altLang="ko-KR" dirty="0"/>
+          </a:p>
+          <a:p>
+            <a:pPr lvl="1"/>
+            <a:r>
+              <a:rPr lang="ko-KR" altLang="en-US" dirty="0"/>
+              <a:t>신촌 </a:t>
+            </a:r>
+            <a:r>
+              <a:rPr lang="ko-KR" altLang="en-US" dirty="0" err="1"/>
+              <a:t>결측치는</a:t>
+            </a:r>
+            <a:r>
+              <a:rPr lang="ko-KR" altLang="en-US" dirty="0"/>
+              <a:t> 제외하지만</a:t>
+            </a:r>
+            <a:r>
+              <a:rPr lang="en-US" altLang="ko-KR" dirty="0"/>
+              <a:t>, </a:t>
+            </a:r>
+            <a:r>
+              <a:rPr lang="ko-KR" altLang="en-US" dirty="0"/>
+              <a:t>강남 </a:t>
+            </a:r>
+            <a:r>
+              <a:rPr lang="ko-KR" altLang="en-US" dirty="0" err="1"/>
+              <a:t>결측치는</a:t>
+            </a:r>
+            <a:r>
+              <a:rPr lang="ko-KR" altLang="en-US" dirty="0"/>
+              <a:t> 비율이 꽤 높음</a:t>
+            </a:r>
+            <a:endParaRPr lang="en-US" altLang="ko-KR" dirty="0"/>
+          </a:p>
+          <a:p>
+            <a:pPr lvl="1"/>
+            <a:r>
+              <a:rPr lang="ko-KR" altLang="en-US" dirty="0"/>
+              <a:t>강남 </a:t>
+            </a:r>
+            <a:r>
+              <a:rPr lang="ko-KR" altLang="en-US" dirty="0" err="1"/>
+              <a:t>결측치의</a:t>
+            </a:r>
+            <a:r>
+              <a:rPr lang="ko-KR" altLang="en-US" dirty="0"/>
+              <a:t> </a:t>
+            </a:r>
+            <a:r>
+              <a:rPr lang="en-US" altLang="ko-KR" dirty="0"/>
+              <a:t>92%</a:t>
+            </a:r>
+            <a:r>
+              <a:rPr lang="ko-KR" altLang="en-US" dirty="0"/>
+              <a:t>가 </a:t>
+            </a:r>
+            <a:r>
+              <a:rPr lang="en-US" altLang="ko-KR" dirty="0"/>
+              <a:t>BMI</a:t>
+            </a:r>
+            <a:r>
+              <a:rPr lang="ko-KR" altLang="en-US" dirty="0"/>
+              <a:t> 파일에서 병원 구분이 신촌으로 되어 있음</a:t>
+            </a:r>
+            <a:endParaRPr lang="en-US" altLang="ko-KR" dirty="0"/>
+          </a:p>
+        </p:txBody>
+      </p:sp>
+      <p:sp>
+        <p:nvSpPr>
+          <p:cNvPr id="2" name="제목 1">
+            <a:extLst>
+              <a:ext uri="{FF2B5EF4-FFF2-40B4-BE49-F238E27FC236}">
+                <a16:creationId xmlns:a16="http://schemas.microsoft.com/office/drawing/2014/main" id="{7B2D737D-D466-5D4B-3B59-BE0987322487}"/>
+              </a:ext>
+            </a:extLst>
+          </p:cNvPr>
+          <p:cNvSpPr>
+            <a:spLocks noGrp="1"/>
+          </p:cNvSpPr>
+          <p:nvPr>
+            <p:ph type="title"/>
+          </p:nvPr>
+        </p:nvSpPr>
+        <p:spPr/>
+        <p:txBody>
+          <a:bodyPr/>
+          <a:lstStyle/>
+          <a:p>
+            <a:r>
+              <a:rPr lang="en-US" altLang="ko-KR" dirty="0"/>
+              <a:t>3. </a:t>
+            </a:r>
+            <a:r>
+              <a:rPr lang="en-US" altLang="ko-KR"/>
+              <a:t>Detailed progress</a:t>
+            </a:r>
+            <a:endParaRPr lang="ko-KR" altLang="en-US" dirty="0"/>
+          </a:p>
+        </p:txBody>
+      </p:sp>
+      <p:sp>
+        <p:nvSpPr>
+          <p:cNvPr id="4" name="슬라이드 번호 개체 틀 3">
+            <a:extLst>
+              <a:ext uri="{FF2B5EF4-FFF2-40B4-BE49-F238E27FC236}">
+                <a16:creationId xmlns:a16="http://schemas.microsoft.com/office/drawing/2014/main" id="{F190B83B-B820-DA13-4B87-1CDBCFC24A69}"/>
+              </a:ext>
+            </a:extLst>
+          </p:cNvPr>
+          <p:cNvSpPr>
+            <a:spLocks noGrp="1"/>
+          </p:cNvSpPr>
+          <p:nvPr>
+            <p:ph type="sldNum" sz="quarter" idx="12"/>
+          </p:nvPr>
+        </p:nvSpPr>
+        <p:spPr/>
+        <p:txBody>
+          <a:bodyPr/>
+          <a:lstStyle/>
+          <a:p>
+            <a:fld id="{9F4AF89A-28FA-47FA-B28F-9A9C6913CB7A}" type="slidenum">
+              <a:rPr lang="ko-KR" altLang="en-US" smtClean="0"/>
+              <a:t>40</a:t>
+            </a:fld>
+            <a:endParaRPr lang="ko-KR" altLang="en-US" dirty="0"/>
+          </a:p>
+        </p:txBody>
+      </p:sp>
+    </p:spTree>
+    <p:extLst>
+      <p:ext uri="{BB962C8B-B14F-4D97-AF65-F5344CB8AC3E}">
+        <p14:creationId xmlns:p14="http://schemas.microsoft.com/office/powerpoint/2010/main" val="3506109384"/>
+      </p:ext>
+    </p:extLst>
+  </p:cSld>
+  <p:clrMapOvr>
+    <a:masterClrMapping/>
+  </p:clrMapOvr>
+</p:sld>
+</file>
+
+<file path=ppt/slides/slide41.xml><?xml version="1.0" encoding="utf-8"?>
+<p:sld xmlns:a="http://schemas.openxmlformats.org/drawingml/2006/main" xmlns:r="http://schemas.openxmlformats.org/officeDocument/2006/relationships" xmlns:p="http://schemas.openxmlformats.org/presentationml/2006/main">
+  <p:cSld>
+    <p:spTree>
+      <p:nvGrpSpPr>
+        <p:cNvPr id="1" name=""/>
+        <p:cNvGrpSpPr/>
+        <p:nvPr/>
+      </p:nvGrpSpPr>
+      <p:grpSpPr>
+        <a:xfrm>
+          <a:off x="0" y="0"/>
+          <a:ext cx="0" cy="0"/>
+          <a:chOff x="0" y="0"/>
+          <a:chExt cx="0" cy="0"/>
+        </a:xfrm>
+      </p:grpSpPr>
+      <p:sp>
+        <p:nvSpPr>
+          <p:cNvPr id="3" name="내용 개체 틀 2">
+            <a:extLst>
+              <a:ext uri="{FF2B5EF4-FFF2-40B4-BE49-F238E27FC236}">
+                <a16:creationId xmlns:a16="http://schemas.microsoft.com/office/drawing/2014/main" id="{A84C152F-6AC6-4EBB-8679-327588602FD5}"/>
+              </a:ext>
+            </a:extLst>
+          </p:cNvPr>
+          <p:cNvSpPr>
+            <a:spLocks noGrp="1"/>
+          </p:cNvSpPr>
+          <p:nvPr>
+            <p:ph idx="1"/>
+          </p:nvPr>
+        </p:nvSpPr>
+        <p:spPr/>
+        <p:txBody>
+          <a:bodyPr>
+            <a:normAutofit/>
+          </a:bodyPr>
+          <a:lstStyle/>
+          <a:p>
+            <a:r>
+              <a:rPr lang="en-US" altLang="ko-KR" dirty="0"/>
+              <a:t>ML </a:t>
+            </a:r>
+            <a:r>
+              <a:rPr lang="ko-KR" altLang="en-US" dirty="0"/>
+              <a:t>기반 앙상블 모델 비교 </a:t>
+            </a:r>
+            <a:r>
+              <a:rPr lang="en-US" altLang="ko-KR" dirty="0"/>
+              <a:t>(Random Forest, </a:t>
+            </a:r>
+            <a:r>
+              <a:rPr lang="en-US" altLang="ko-KR" dirty="0" err="1"/>
+              <a:t>XGBoost</a:t>
+            </a:r>
+            <a:r>
+              <a:rPr lang="en-US" altLang="ko-KR" dirty="0"/>
+              <a:t> </a:t>
+            </a:r>
+            <a:r>
+              <a:rPr lang="ko-KR" altLang="en-US" dirty="0"/>
+              <a:t>등</a:t>
+            </a:r>
+            <a:r>
+              <a:rPr lang="en-US" altLang="ko-KR" dirty="0"/>
+              <a:t>)</a:t>
+            </a:r>
+          </a:p>
+          <a:p>
+            <a:r>
+              <a:rPr lang="ko-KR" altLang="en-US" dirty="0"/>
+              <a:t>신장</a:t>
+            </a:r>
+            <a:r>
+              <a:rPr lang="en-US" altLang="ko-KR" dirty="0"/>
+              <a:t>, </a:t>
+            </a:r>
+            <a:r>
+              <a:rPr lang="ko-KR" altLang="en-US" dirty="0"/>
+              <a:t>체중</a:t>
+            </a:r>
+            <a:r>
+              <a:rPr lang="en-US" altLang="ko-KR" dirty="0"/>
+              <a:t>, BMI</a:t>
+            </a:r>
+            <a:r>
+              <a:rPr lang="ko-KR" altLang="en-US" dirty="0"/>
+              <a:t>를 추가한 데이터셋으로 성능 비교</a:t>
+            </a:r>
+            <a:endParaRPr lang="en-US" altLang="ko-KR" dirty="0"/>
+          </a:p>
+          <a:p>
+            <a:r>
+              <a:rPr lang="ko-KR" altLang="en-US" dirty="0"/>
+              <a:t>추후 </a:t>
+            </a:r>
+            <a:r>
+              <a:rPr lang="en-US" altLang="ko-KR" dirty="0"/>
+              <a:t>SMI(TAMA/Height</a:t>
+            </a:r>
+            <a:r>
+              <a:rPr lang="en-US" altLang="ko-KR" baseline="30000" dirty="0"/>
+              <a:t>2</a:t>
+            </a:r>
+            <a:r>
+              <a:rPr lang="en-US" altLang="ko-KR" dirty="0"/>
+              <a:t>)</a:t>
+            </a:r>
+            <a:r>
+              <a:rPr lang="ko-KR" altLang="en-US" dirty="0"/>
+              <a:t>도 활용 가능</a:t>
+            </a:r>
+            <a:endParaRPr lang="en-US" altLang="ko-KR" dirty="0"/>
+          </a:p>
+        </p:txBody>
+      </p:sp>
+      <p:sp>
+        <p:nvSpPr>
+          <p:cNvPr id="2" name="제목 1">
+            <a:extLst>
+              <a:ext uri="{FF2B5EF4-FFF2-40B4-BE49-F238E27FC236}">
+                <a16:creationId xmlns:a16="http://schemas.microsoft.com/office/drawing/2014/main" id="{9AF0C8C8-C4B1-4336-9468-E6803A595282}"/>
+              </a:ext>
+            </a:extLst>
+          </p:cNvPr>
+          <p:cNvSpPr>
+            <a:spLocks noGrp="1"/>
+          </p:cNvSpPr>
+          <p:nvPr>
+            <p:ph type="title"/>
+          </p:nvPr>
+        </p:nvSpPr>
+        <p:spPr/>
+        <p:txBody>
+          <a:bodyPr/>
+          <a:lstStyle/>
+          <a:p>
+            <a:r>
+              <a:rPr lang="en-US" altLang="ko-KR" dirty="0"/>
+              <a:t>4. Next Plan</a:t>
+            </a:r>
+            <a:endParaRPr lang="ko-KR" altLang="en-US" dirty="0"/>
+          </a:p>
+        </p:txBody>
+      </p:sp>
+      <p:sp>
+        <p:nvSpPr>
+          <p:cNvPr id="4" name="슬라이드 번호 개체 틀 3">
+            <a:extLst>
+              <a:ext uri="{FF2B5EF4-FFF2-40B4-BE49-F238E27FC236}">
+                <a16:creationId xmlns:a16="http://schemas.microsoft.com/office/drawing/2014/main" id="{967768F2-76AD-4898-ABAE-26C158880624}"/>
+              </a:ext>
+            </a:extLst>
+          </p:cNvPr>
+          <p:cNvSpPr>
+            <a:spLocks noGrp="1"/>
+          </p:cNvSpPr>
+          <p:nvPr>
+            <p:ph type="sldNum" sz="quarter" idx="12"/>
+          </p:nvPr>
+        </p:nvSpPr>
+        <p:spPr/>
+        <p:txBody>
+          <a:bodyPr/>
+          <a:lstStyle/>
+          <a:p>
+            <a:fld id="{9F4AF89A-28FA-47FA-B28F-9A9C6913CB7A}" type="slidenum">
+              <a:rPr lang="ko-KR" altLang="en-US" smtClean="0"/>
+              <a:t>41</a:t>
+            </a:fld>
+            <a:endParaRPr lang="ko-KR" altLang="en-US" dirty="0"/>
+          </a:p>
+        </p:txBody>
+      </p:sp>
+    </p:spTree>
+    <p:extLst>
+      <p:ext uri="{BB962C8B-B14F-4D97-AF65-F5344CB8AC3E}">
+        <p14:creationId xmlns:p14="http://schemas.microsoft.com/office/powerpoint/2010/main" val="422661794"/>
+      </p:ext>
+    </p:extLst>
+  </p:cSld>
+  <p:clrMapOvr>
+    <a:masterClrMapping/>
+  </p:clrMapOvr>
+</p:sld>
+</file>
+
+<file path=ppt/slides/slide42.xml><?xml version="1.0" encoding="utf-8"?>
 <p:sld xmlns:a="http://schemas.openxmlformats.org/drawingml/2006/main" xmlns:r="http://schemas.openxmlformats.org/officeDocument/2006/relationships" xmlns:p="http://schemas.openxmlformats.org/presentationml/2006/main">
   <p:cSld>
     <p:spTree>
@@ -42271,7 +43333,7 @@
                   <a:ea typeface="KoPub돋움체 Bold" panose="00000800000000000000" pitchFamily="2" charset="-127"/>
                   <a:cs typeface="KoPubWorld돋움체 Medium" panose="00000600000000000000" pitchFamily="2" charset="-127"/>
                 </a:rPr>
-                <a:t>1,67</a:t>
+                <a:t>1,</a:t>
               </a:r>
               <a:r>
                 <a:rPr lang="en-US" sz="1600" b="1" i="0" dirty="0">
@@ -42282,7 +43344,7 @@
                   <a:ea typeface="KoPub돋움체 Bold" panose="00000800000000000000" pitchFamily="2" charset="-127"/>
                   <a:cs typeface="KoPubWorld돋움체 Medium" panose="00000600000000000000" pitchFamily="2" charset="-127"/>
                 </a:rPr>
-                <a:t>3</a:t>
+                <a:t>365</a:t>
               </a:r>
               <a:r>
                 <a:rPr sz="1600" b="1" i="0" dirty="0">
@@ -42427,6 +43489,17 @@
             <a:p>
               <a:pPr algn="l"/>
               <a:r>
+                <a:rPr lang="en-US" sz="1600" b="1" i="0" dirty="0">
+                  <a:solidFill>
+                    <a:srgbClr val="1A355E"/>
+                  </a:solidFill>
+                  <a:latin typeface="KoPub돋움체 Bold" panose="00000800000000000000" pitchFamily="2" charset="-127"/>
+                  <a:ea typeface="KoPub돋움체 Bold" panose="00000800000000000000" pitchFamily="2" charset="-127"/>
+                  <a:cs typeface="KoPubWorld돋움체 Medium" panose="00000600000000000000" pitchFamily="2" charset="-127"/>
+                </a:rPr>
+                <a:t>524</a:t>
+              </a:r>
+              <a:r>
                 <a:rPr sz="1600" b="1" i="0" dirty="0">
                   <a:solidFill>
                     <a:srgbClr val="1A355E"/>
@@ -42435,7 +43508,7 @@
                   <a:ea typeface="KoPub돋움체 Bold" panose="00000800000000000000" pitchFamily="2" charset="-127"/>
                   <a:cs typeface="KoPubWorld돋움체 Medium" panose="00000600000000000000" pitchFamily="2" charset="-127"/>
                 </a:rPr>
-                <a:t>665명 (39.</a:t>
+                <a:t>명 (3</a:t>
               </a:r>
               <a:r>
                 <a:rPr lang="en-US" sz="1600" b="1" i="0" dirty="0">
@@ -42446,7 +43519,29 @@
                   <a:ea typeface="KoPub돋움체 Bold" panose="00000800000000000000" pitchFamily="2" charset="-127"/>
                   <a:cs typeface="KoPubWorld돋움체 Medium" panose="00000600000000000000" pitchFamily="2" charset="-127"/>
                 </a:rPr>
-                <a:t>7</a:t>
+                <a:t>8</a:t>
+              </a:r>
+              <a:r>
+                <a:rPr sz="1600" b="1" i="0" dirty="0">
+                  <a:solidFill>
+                    <a:srgbClr val="1A355E"/>
+                  </a:solidFill>
+                  <a:latin typeface="KoPub돋움체 Bold" panose="00000800000000000000" pitchFamily="2" charset="-127"/>
+                  <a:ea typeface="KoPub돋움체 Bold" panose="00000800000000000000" pitchFamily="2" charset="-127"/>
+                  <a:cs typeface="KoPubWorld돋움체 Medium" panose="00000600000000000000" pitchFamily="2" charset="-127"/>
+                </a:rPr>
+                <a:t>.</a:t>
+              </a:r>
+              <a:r>
+                <a:rPr lang="en-US" sz="1600" b="1" i="0" dirty="0">
+                  <a:solidFill>
+                    <a:srgbClr val="1A355E"/>
+                  </a:solidFill>
+                  <a:latin typeface="KoPub돋움체 Bold" panose="00000800000000000000" pitchFamily="2" charset="-127"/>
+                  <a:ea typeface="KoPub돋움체 Bold" panose="00000800000000000000" pitchFamily="2" charset="-127"/>
+                  <a:cs typeface="KoPubWorld돋움체 Medium" panose="00000600000000000000" pitchFamily="2" charset="-127"/>
+                </a:rPr>
+                <a:t>4</a:t>
               </a:r>
               <a:r>
                 <a:rPr sz="1600" b="1" i="0" dirty="0">
@@ -42591,6 +43686,17 @@
             <a:p>
               <a:pPr algn="l"/>
               <a:r>
+                <a:rPr lang="en-US" sz="1600" b="1" i="0" dirty="0">
+                  <a:solidFill>
+                    <a:srgbClr val="1A355E"/>
+                  </a:solidFill>
+                  <a:latin typeface="KoPub돋움체 Bold" panose="00000800000000000000" pitchFamily="2" charset="-127"/>
+                  <a:ea typeface="KoPub돋움체 Bold" panose="00000800000000000000" pitchFamily="2" charset="-127"/>
+                  <a:cs typeface="KoPubWorld돋움체 Medium" panose="00000600000000000000" pitchFamily="2" charset="-127"/>
+                </a:rPr>
+                <a:t>841</a:t>
+              </a:r>
+              <a:r>
                 <a:rPr sz="1600" b="1" i="0" dirty="0">
                   <a:solidFill>
                     <a:srgbClr val="1A355E"/>
@@ -42599,7 +43705,7 @@
                   <a:ea typeface="KoPub돋움체 Bold" panose="00000800000000000000" pitchFamily="2" charset="-127"/>
                   <a:cs typeface="KoPubWorld돋움체 Medium" panose="00000600000000000000" pitchFamily="2" charset="-127"/>
                 </a:rPr>
-                <a:t>1,00</a:t>
+                <a:t>명 (6</a:t>
               </a:r>
               <a:r>
                 <a:rPr lang="en-US" sz="1600" b="1" i="0" dirty="0">
@@ -42610,7 +43716,7 @@
                   <a:ea typeface="KoPub돋움체 Bold" panose="00000800000000000000" pitchFamily="2" charset="-127"/>
                   <a:cs typeface="KoPubWorld돋움체 Medium" panose="00000600000000000000" pitchFamily="2" charset="-127"/>
                 </a:rPr>
-                <a:t>8</a:t>
+                <a:t>1</a:t>
               </a:r>
               <a:r>
                 <a:rPr sz="1600" b="1" i="0" dirty="0">
@@ -42621,7 +43727,7 @@
                   <a:ea typeface="KoPub돋움체 Bold" panose="00000800000000000000" pitchFamily="2" charset="-127"/>
                   <a:cs typeface="KoPubWorld돋움체 Medium" panose="00000600000000000000" pitchFamily="2" charset="-127"/>
                 </a:rPr>
-                <a:t>명 (60.</a:t>
+                <a:t>.</a:t>
               </a:r>
               <a:r>
                 <a:rPr lang="en-US" sz="1600" b="1" i="0" dirty="0">
@@ -42632,7 +43738,7 @@
                   <a:ea typeface="KoPub돋움체 Bold" panose="00000800000000000000" pitchFamily="2" charset="-127"/>
                   <a:cs typeface="KoPubWorld돋움체 Medium" panose="00000600000000000000" pitchFamily="2" charset="-127"/>
                 </a:rPr>
-                <a:t>3</a:t>
+                <a:t>6</a:t>
               </a:r>
               <a:r>
                 <a:rPr sz="1600" b="1" i="0" dirty="0">
@@ -43282,7 +44388,7 @@
           <p:nvPr>
             <p:extLst>
               <p:ext uri="{D42A27DB-BD31-4B8C-83A1-F6EECF244321}">
-                <p14:modId xmlns:p14="http://schemas.microsoft.com/office/powerpoint/2010/main" val="3571278036"/>
+                <p14:modId xmlns:p14="http://schemas.microsoft.com/office/powerpoint/2010/main" val="3200427355"/>
               </p:ext>
             </p:extLst>
           </p:nvPr>
@@ -43603,7 +44709,7 @@
                     <a:p>
                       <a:pPr algn="ctr"/>
                       <a:r>
-                        <a:rPr sz="1200">
+                        <a:rPr lang="en-US" sz="1200" dirty="0">
                           <a:solidFill>
                             <a:srgbClr val="1A1A2E"/>
                           </a:solidFill>
@@ -43611,175 +44717,7 @@
                           <a:ea typeface="KoPub돋움체 Medium" panose="00000600000000000000" pitchFamily="2" charset="-127"/>
                           <a:cs typeface="KoPubWorld돋움체 Medium" panose="00000600000000000000" pitchFamily="2" charset="-127"/>
                         </a:rPr>
-                        <a:t>665</a:t>
-                      </a:r>
-                    </a:p>
-                  </a:txBody>
-                  <a:tcPr anchor="ctr">
-                    <a:solidFill>
-                      <a:srgbClr val="F2F2F2"/>
-                    </a:solidFill>
-                  </a:tcPr>
-                </a:tc>
-                <a:tc>
-                  <a:txBody>
-                    <a:bodyPr/>
-                    <a:lstStyle/>
-                    <a:p>
-                      <a:pPr algn="ctr"/>
-                      <a:r>
-                        <a:rPr sz="1200" dirty="0">
-                          <a:solidFill>
-                            <a:srgbClr val="1A1A2E"/>
-                          </a:solidFill>
-                          <a:latin typeface="KoPub돋움체 Medium" panose="00000600000000000000" pitchFamily="2" charset="-127"/>
-                          <a:ea typeface="KoPub돋움체 Medium" panose="00000600000000000000" pitchFamily="2" charset="-127"/>
-                          <a:cs typeface="KoPubWorld돋움체 Medium" panose="00000600000000000000" pitchFamily="2" charset="-127"/>
-                        </a:rPr>
-                        <a:t>149.52</a:t>
-                      </a:r>
-                    </a:p>
-                  </a:txBody>
-                  <a:tcPr anchor="ctr">
-                    <a:solidFill>
-                      <a:srgbClr val="F2F2F2"/>
-                    </a:solidFill>
-                  </a:tcPr>
-                </a:tc>
-                <a:tc>
-                  <a:txBody>
-                    <a:bodyPr/>
-                    <a:lstStyle/>
-                    <a:p>
-                      <a:pPr algn="ctr"/>
-                      <a:r>
-                        <a:rPr sz="1200">
-                          <a:solidFill>
-                            <a:srgbClr val="1A1A2E"/>
-                          </a:solidFill>
-                          <a:latin typeface="KoPub돋움체 Medium" panose="00000600000000000000" pitchFamily="2" charset="-127"/>
-                          <a:ea typeface="KoPub돋움체 Medium" panose="00000600000000000000" pitchFamily="2" charset="-127"/>
-                          <a:cs typeface="KoPubWorld돋움체 Medium" panose="00000600000000000000" pitchFamily="2" charset="-127"/>
-                        </a:rPr>
-                        <a:t>27.46</a:t>
-                      </a:r>
-                    </a:p>
-                  </a:txBody>
-                  <a:tcPr anchor="ctr">
-                    <a:solidFill>
-                      <a:srgbClr val="F2F2F2"/>
-                    </a:solidFill>
-                  </a:tcPr>
-                </a:tc>
-                <a:tc>
-                  <a:txBody>
-                    <a:bodyPr/>
-                    <a:lstStyle/>
-                    <a:p>
-                      <a:pPr algn="ctr"/>
-                      <a:r>
-                        <a:rPr sz="1200" dirty="0">
-                          <a:solidFill>
-                            <a:srgbClr val="1A1A2E"/>
-                          </a:solidFill>
-                          <a:latin typeface="KoPub돋움체 Medium" panose="00000600000000000000" pitchFamily="2" charset="-127"/>
-                          <a:ea typeface="KoPub돋움체 Medium" panose="00000600000000000000" pitchFamily="2" charset="-127"/>
-                          <a:cs typeface="KoPubWorld돋움체 Medium" panose="00000600000000000000" pitchFamily="2" charset="-127"/>
-                        </a:rPr>
-                        <a:t>150</a:t>
-                      </a:r>
-                    </a:p>
-                  </a:txBody>
-                  <a:tcPr anchor="ctr">
-                    <a:solidFill>
-                      <a:srgbClr val="F2F2F2"/>
-                    </a:solidFill>
-                  </a:tcPr>
-                </a:tc>
-                <a:tc>
-                  <a:txBody>
-                    <a:bodyPr/>
-                    <a:lstStyle/>
-                    <a:p>
-                      <a:pPr algn="ctr"/>
-                      <a:r>
-                        <a:rPr sz="1200" dirty="0">
-                          <a:solidFill>
-                            <a:srgbClr val="1A1A2E"/>
-                          </a:solidFill>
-                          <a:latin typeface="KoPub돋움체 Medium" panose="00000600000000000000" pitchFamily="2" charset="-127"/>
-                          <a:ea typeface="KoPub돋움체 Medium" panose="00000600000000000000" pitchFamily="2" charset="-127"/>
-                          <a:cs typeface="KoPubWorld돋움체 Medium" panose="00000600000000000000" pitchFamily="2" charset="-127"/>
-                        </a:rPr>
-                        <a:t>132</a:t>
-                      </a:r>
-                    </a:p>
-                  </a:txBody>
-                  <a:tcPr anchor="ctr">
-                    <a:solidFill>
-                      <a:srgbClr val="F2F2F2"/>
-                    </a:solidFill>
-                  </a:tcPr>
-                </a:tc>
-                <a:tc>
-                  <a:txBody>
-                    <a:bodyPr/>
-                    <a:lstStyle/>
-                    <a:p>
-                      <a:pPr algn="ctr"/>
-                      <a:r>
-                        <a:rPr sz="1200" dirty="0">
-                          <a:solidFill>
-                            <a:srgbClr val="1A1A2E"/>
-                          </a:solidFill>
-                          <a:latin typeface="KoPub돋움체 Medium" panose="00000600000000000000" pitchFamily="2" charset="-127"/>
-                          <a:ea typeface="KoPub돋움체 Medium" panose="00000600000000000000" pitchFamily="2" charset="-127"/>
-                          <a:cs typeface="KoPubWorld돋움체 Medium" panose="00000600000000000000" pitchFamily="2" charset="-127"/>
-                        </a:rPr>
-                        <a:t>166</a:t>
-                      </a:r>
-                    </a:p>
-                  </a:txBody>
-                  <a:tcPr anchor="ctr">
-                    <a:solidFill>
-                      <a:srgbClr val="F2F2F2"/>
-                    </a:solidFill>
-                  </a:tcPr>
-                </a:tc>
-                <a:extLst>
-                  <a:ext uri="{0D108BD9-81ED-4DB2-BD59-A6C34878D82A}">
-                    <a16:rowId xmlns:a16="http://schemas.microsoft.com/office/drawing/2014/main" val="10001"/>
-                  </a:ext>
-                </a:extLst>
-              </a:tr>
-              <a:tr h="411480">
-                <a:tc>
-                  <a:txBody>
-                    <a:bodyPr/>
-                    <a:lstStyle/>
-                    <a:p>
-                      <a:pPr algn="ctr"/>
-                      <a:r>
-                        <a:rPr sz="1200" dirty="0">
-                          <a:solidFill>
-                            <a:srgbClr val="1A1A2E"/>
-                          </a:solidFill>
-                          <a:latin typeface="KoPub돋움체 Medium" panose="00000600000000000000" pitchFamily="2" charset="-127"/>
-                          <a:ea typeface="KoPub돋움체 Medium" panose="00000600000000000000" pitchFamily="2" charset="-127"/>
-                          <a:cs typeface="KoPubWorld돋움체 Medium" panose="00000600000000000000" pitchFamily="2" charset="-127"/>
-                        </a:rPr>
-                        <a:t>F</a:t>
-                      </a:r>
-                      <a:r>
-                        <a:rPr lang="en-US" sz="1200" dirty="0">
-                          <a:solidFill>
-                            <a:srgbClr val="1A1A2E"/>
-                          </a:solidFill>
-                          <a:latin typeface="KoPub돋움체 Medium" panose="00000600000000000000" pitchFamily="2" charset="-127"/>
-                          <a:ea typeface="KoPub돋움체 Medium" panose="00000600000000000000" pitchFamily="2" charset="-127"/>
-                          <a:cs typeface="KoPubWorld돋움체 Medium" panose="00000600000000000000" pitchFamily="2" charset="-127"/>
-                        </a:rPr>
-                        <a:t>emale</a:t>
+                        <a:t>524</a:t>
                       </a:r>
                       <a:endParaRPr sz="1200" dirty="0">
                         <a:solidFill>
@@ -43793,7 +44731,7 @@
                   </a:txBody>
                   <a:tcPr anchor="ctr">
                     <a:solidFill>
-                      <a:srgbClr val="FFFFFF"/>
+                      <a:srgbClr val="F2F2F2"/>
                     </a:solidFill>
                   </a:tcPr>
                 </a:tc>
@@ -43812,10 +44750,24 @@
                           <a:ea typeface="KoPub돋움체 Medium" panose="00000600000000000000" pitchFamily="2" charset="-127"/>
                           <a:cs typeface="KoPubWorld돋움체 Medium" panose="00000600000000000000" pitchFamily="2" charset="-127"/>
                         </a:rPr>
-                        <a:t>1,00</a:t>
-                      </a:r>
-                      <a:r>
-                        <a:rPr lang="en-US" sz="1200" dirty="0">
+                        <a:t>149.52</a:t>
+                      </a:r>
+                    </a:p>
+                  </a:txBody>
+                  <a:tcPr anchor="ctr">
+                    <a:solidFill>
+                      <a:srgbClr val="F2F2F2"/>
+                    </a:solidFill>
+                  </a:tcPr>
+                </a:tc>
+                <a:tc>
+                  <a:txBody>
+                    <a:bodyPr/>
+                    <a:lstStyle/>
+                    <a:p>
+                      <a:pPr algn="ctr"/>
+                      <a:r>
+                        <a:rPr sz="1200">
                           <a:solidFill>
                             <a:srgbClr val="1A1A2E"/>
                           </a:solidFill>
@@ -43823,7 +44775,158 @@
                           <a:ea typeface="KoPub돋움체 Medium" panose="00000600000000000000" pitchFamily="2" charset="-127"/>
                           <a:cs typeface="KoPubWorld돋움체 Medium" panose="00000600000000000000" pitchFamily="2" charset="-127"/>
                         </a:rPr>
-                        <a:t>8</a:t>
+                        <a:t>27.46</a:t>
+                      </a:r>
+                    </a:p>
+                  </a:txBody>
+                  <a:tcPr anchor="ctr">
+                    <a:solidFill>
+                      <a:srgbClr val="F2F2F2"/>
+                    </a:solidFill>
+                  </a:tcPr>
+                </a:tc>
+                <a:tc>
+                  <a:txBody>
+                    <a:bodyPr/>
+                    <a:lstStyle/>
+                    <a:p>
+                      <a:pPr algn="ctr"/>
+                      <a:r>
+                        <a:rPr sz="1200" dirty="0">
+                          <a:solidFill>
+                            <a:srgbClr val="1A1A2E"/>
+                          </a:solidFill>
+                          <a:latin typeface="KoPub돋움체 Medium" panose="00000600000000000000" pitchFamily="2" charset="-127"/>
+                          <a:ea typeface="KoPub돋움체 Medium" panose="00000600000000000000" pitchFamily="2" charset="-127"/>
+                          <a:cs typeface="KoPubWorld돋움체 Medium" panose="00000600000000000000" pitchFamily="2" charset="-127"/>
+                        </a:rPr>
+                        <a:t>150</a:t>
+                      </a:r>
+                    </a:p>
+                  </a:txBody>
+                  <a:tcPr anchor="ctr">
+                    <a:solidFill>
+                      <a:srgbClr val="F2F2F2"/>
+                    </a:solidFill>
+                  </a:tcPr>
+                </a:tc>
+                <a:tc>
+                  <a:txBody>
+                    <a:bodyPr/>
+                    <a:lstStyle/>
+                    <a:p>
+                      <a:pPr algn="ctr"/>
+                      <a:r>
+                        <a:rPr sz="1200" dirty="0">
+                          <a:solidFill>
+                            <a:srgbClr val="1A1A2E"/>
+                          </a:solidFill>
+                          <a:latin typeface="KoPub돋움체 Medium" panose="00000600000000000000" pitchFamily="2" charset="-127"/>
+                          <a:ea typeface="KoPub돋움체 Medium" panose="00000600000000000000" pitchFamily="2" charset="-127"/>
+                          <a:cs typeface="KoPubWorld돋움체 Medium" panose="00000600000000000000" pitchFamily="2" charset="-127"/>
+                        </a:rPr>
+                        <a:t>132</a:t>
+                      </a:r>
+                    </a:p>
+                  </a:txBody>
+                  <a:tcPr anchor="ctr">
+                    <a:solidFill>
+                      <a:srgbClr val="F2F2F2"/>
+                    </a:solidFill>
+                  </a:tcPr>
+                </a:tc>
+                <a:tc>
+                  <a:txBody>
+                    <a:bodyPr/>
+                    <a:lstStyle/>
+                    <a:p>
+                      <a:pPr algn="ctr"/>
+                      <a:r>
+                        <a:rPr sz="1200" dirty="0">
+                          <a:solidFill>
+                            <a:srgbClr val="1A1A2E"/>
+                          </a:solidFill>
+                          <a:latin typeface="KoPub돋움체 Medium" panose="00000600000000000000" pitchFamily="2" charset="-127"/>
+                          <a:ea typeface="KoPub돋움체 Medium" panose="00000600000000000000" pitchFamily="2" charset="-127"/>
+                          <a:cs typeface="KoPubWorld돋움체 Medium" panose="00000600000000000000" pitchFamily="2" charset="-127"/>
+                        </a:rPr>
+                        <a:t>166</a:t>
+                      </a:r>
+                    </a:p>
+                  </a:txBody>
+                  <a:tcPr anchor="ctr">
+                    <a:solidFill>
+                      <a:srgbClr val="F2F2F2"/>
+                    </a:solidFill>
+                  </a:tcPr>
+                </a:tc>
+                <a:extLst>
+                  <a:ext uri="{0D108BD9-81ED-4DB2-BD59-A6C34878D82A}">
+                    <a16:rowId xmlns:a16="http://schemas.microsoft.com/office/drawing/2014/main" val="10001"/>
+                  </a:ext>
+                </a:extLst>
+              </a:tr>
+              <a:tr h="411480">
+                <a:tc>
+                  <a:txBody>
+                    <a:bodyPr/>
+                    <a:lstStyle/>
+                    <a:p>
+                      <a:pPr algn="ctr"/>
+                      <a:r>
+                        <a:rPr sz="1200" dirty="0">
+                          <a:solidFill>
+                            <a:srgbClr val="1A1A2E"/>
+                          </a:solidFill>
+                          <a:latin typeface="KoPub돋움체 Medium" panose="00000600000000000000" pitchFamily="2" charset="-127"/>
+                          <a:ea typeface="KoPub돋움체 Medium" panose="00000600000000000000" pitchFamily="2" charset="-127"/>
+                          <a:cs typeface="KoPubWorld돋움체 Medium" panose="00000600000000000000" pitchFamily="2" charset="-127"/>
+                        </a:rPr>
+                        <a:t>F</a:t>
+                      </a:r>
+                      <a:r>
+                        <a:rPr lang="en-US" sz="1200" dirty="0">
+                          <a:solidFill>
+                            <a:srgbClr val="1A1A2E"/>
+                          </a:solidFill>
+                          <a:latin typeface="KoPub돋움체 Medium" panose="00000600000000000000" pitchFamily="2" charset="-127"/>
+                          <a:ea typeface="KoPub돋움체 Medium" panose="00000600000000000000" pitchFamily="2" charset="-127"/>
+                          <a:cs typeface="KoPubWorld돋움체 Medium" panose="00000600000000000000" pitchFamily="2" charset="-127"/>
+                        </a:rPr>
+                        <a:t>emale</a:t>
+                      </a:r>
+                      <a:endParaRPr sz="1200" dirty="0">
+                        <a:solidFill>
+                          <a:srgbClr val="1A1A2E"/>
+                        </a:solidFill>
+                        <a:latin typeface="KoPub돋움체 Medium" panose="00000600000000000000" pitchFamily="2" charset="-127"/>
+                        <a:ea typeface="KoPub돋움체 Medium" panose="00000600000000000000" pitchFamily="2" charset="-127"/>
+                        <a:cs typeface="KoPubWorld돋움체 Medium" panose="00000600000000000000" pitchFamily="2" charset="-127"/>
+                      </a:endParaRPr>
+                    </a:p>
+                  </a:txBody>
+                  <a:tcPr anchor="ctr">
+                    <a:solidFill>
+                      <a:srgbClr val="FFFFFF"/>
+                    </a:solidFill>
+                  </a:tcPr>
+                </a:tc>
+                <a:tc>
+                  <a:txBody>
+                    <a:bodyPr/>
+                    <a:lstStyle/>
+                    <a:p>
+                      <a:pPr algn="ctr"/>
+                      <a:r>
+                        <a:rPr lang="en-US" sz="1200" dirty="0">
+                          <a:solidFill>
+                            <a:srgbClr val="1A1A2E"/>
+                          </a:solidFill>
+                          <a:latin typeface="KoPub돋움체 Medium" panose="00000600000000000000" pitchFamily="2" charset="-127"/>
+                          <a:ea typeface="KoPub돋움체 Medium" panose="00000600000000000000" pitchFamily="2" charset="-127"/>
+                          <a:cs typeface="KoPubWorld돋움체 Medium" panose="00000600000000000000" pitchFamily="2" charset="-127"/>
+                        </a:rPr>
+                        <a:t>841</a:t>
                       </a:r>
                       <a:endParaRPr sz="1200" dirty="0">
                         <a:solidFill>
@@ -44359,7 +45462,7 @@
                 <a:t>: </a:t>
               </a:r>
               <a:r>
-                <a:rPr lang="en-US" sz="1200" dirty="0">
+                <a:rPr lang="en-US" sz="1200" b="0" i="0" dirty="0">
                   <a:solidFill>
                     <a:srgbClr val="FFFFFF"/>
                   </a:solidFill>
@@ -44367,7 +45470,7 @@
                   <a:ea typeface="KoPub돋움체 Bold" panose="00000800000000000000" pitchFamily="2" charset="-127"/>
                   <a:cs typeface="KoPubWorld돋움체 Bold" panose="00000800000000000000" pitchFamily="2" charset="-127"/>
                 </a:rPr>
-                <a:t>400</a:t>
+                <a:t>322</a:t>
               </a:r>
               <a:r>
                 <a:rPr sz="1200" b="0" i="0" dirty="0">
@@ -44378,7 +45481,7 @@
                   <a:ea typeface="KoPub돋움체 Bold" panose="00000800000000000000" pitchFamily="2" charset="-127"/>
                   <a:cs typeface="KoPubWorld돋움체 Bold" panose="00000800000000000000" pitchFamily="2" charset="-127"/>
                 </a:rPr>
-                <a:t> / 1,67</a:t>
+                <a:t> / 1,</a:t>
               </a:r>
               <a:r>
                 <a:rPr lang="en-US" sz="1200" b="0" i="0" dirty="0">
@@ -44389,7 +45492,7 @@
                   <a:ea typeface="KoPub돋움체 Bold" panose="00000800000000000000" pitchFamily="2" charset="-127"/>
                   <a:cs typeface="KoPubWorld돋움체 Bold" panose="00000800000000000000" pitchFamily="2" charset="-127"/>
                 </a:rPr>
-                <a:t>3</a:t>
+                <a:t>365</a:t>
               </a:r>
               <a:r>
                 <a:rPr sz="1200" b="0" i="0" dirty="0">
@@ -44422,7 +45525,29 @@
                   <a:ea typeface="KoPub돋움체 Bold" panose="00000800000000000000" pitchFamily="2" charset="-127"/>
                   <a:cs typeface="KoPubWorld돋움체 Bold" panose="00000800000000000000" pitchFamily="2" charset="-127"/>
                 </a:rPr>
-                <a:t>.9 %</a:t>
+                <a:t>.</a:t>
+              </a:r>
+              <a:r>
+                <a:rPr lang="en-US" sz="1200" b="0" i="0" dirty="0">
+                  <a:solidFill>
+                    <a:srgbClr val="FFFFFF"/>
+                  </a:solidFill>
+                  <a:latin typeface="KoPub돋움체 Bold" panose="00000800000000000000" pitchFamily="2" charset="-127"/>
+                  <a:ea typeface="KoPub돋움체 Bold" panose="00000800000000000000" pitchFamily="2" charset="-127"/>
+                  <a:cs typeface="KoPubWorld돋움체 Bold" panose="00000800000000000000" pitchFamily="2" charset="-127"/>
+                </a:rPr>
+                <a:t>6</a:t>
+              </a:r>
+              <a:r>
+                <a:rPr sz="1200" b="0" i="0" dirty="0">
+                  <a:solidFill>
+                    <a:srgbClr val="FFFFFF"/>
+                  </a:solidFill>
+                  <a:latin typeface="KoPub돋움체 Bold" panose="00000800000000000000" pitchFamily="2" charset="-127"/>
+                  <a:ea typeface="KoPub돋움체 Bold" panose="00000800000000000000" pitchFamily="2" charset="-127"/>
+                  <a:cs typeface="KoPubWorld돋움체 Bold" panose="00000800000000000000" pitchFamily="2" charset="-127"/>
+                </a:rPr>
+                <a:t> %</a:t>
               </a:r>
             </a:p>
           </p:txBody>

--- a/연구자료/260430_Linear_Logistic_Regression.pptx
+++ b/연구자료/260430_Linear_Logistic_Regression.pptx
@@ -251,6 +251,87 @@
 
 <file path=ppt/changesInfos/changesInfo1.xml><?xml version="1.0" encoding="utf-8"?>
 <pc:chgInfo xmlns:a="http://schemas.openxmlformats.org/drawingml/2006/main" xmlns:r="http://schemas.openxmlformats.org/officeDocument/2006/relationships" xmlns:ac="http://schemas.microsoft.com/office/drawing/2013/main/command" xmlns:pc="http://schemas.microsoft.com/office/powerpoint/2013/main/command">
+  <pc:docChgLst>
+    <pc:chgData name="Jihun Kim" userId="2469e03939fca47a" providerId="LiveId" clId="{0EC0481E-6524-4E60-9AD2-E07F55D3906F}"/>
+    <pc:docChg chg="undo custSel modSld modMainMaster">
+      <pc:chgData name="Jihun Kim" userId="2469e03939fca47a" providerId="LiveId" clId="{0EC0481E-6524-4E60-9AD2-E07F55D3906F}" dt="2026-04-09T12:43:38.717" v="9" actId="113"/>
+      <pc:docMkLst>
+        <pc:docMk/>
+      </pc:docMkLst>
+      <pc:sldChg chg="modSp mod">
+        <pc:chgData name="Jihun Kim" userId="2469e03939fca47a" providerId="LiveId" clId="{0EC0481E-6524-4E60-9AD2-E07F55D3906F}" dt="2026-04-09T12:43:04.015" v="5" actId="2711"/>
+        <pc:sldMkLst>
+          <pc:docMk/>
+          <pc:sldMk cId="1998851532" sldId="256"/>
+        </pc:sldMkLst>
+        <pc:spChg chg="mod">
+          <ac:chgData name="Jihun Kim" userId="2469e03939fca47a" providerId="LiveId" clId="{0EC0481E-6524-4E60-9AD2-E07F55D3906F}" dt="2026-04-09T12:41:51.143" v="2" actId="207"/>
+          <ac:spMkLst>
+            <pc:docMk/>
+            <pc:sldMk cId="1998851532" sldId="256"/>
+            <ac:spMk id="4" creationId="{4C14D9A0-1BB9-428F-B273-3CE24758593B}"/>
+          </ac:spMkLst>
+        </pc:spChg>
+        <pc:spChg chg="mod">
+          <ac:chgData name="Jihun Kim" userId="2469e03939fca47a" providerId="LiveId" clId="{0EC0481E-6524-4E60-9AD2-E07F55D3906F}" dt="2026-04-09T12:42:23.172" v="3" actId="2711"/>
+          <ac:spMkLst>
+            <pc:docMk/>
+            <pc:sldMk cId="1998851532" sldId="256"/>
+            <ac:spMk id="5" creationId="{94B21C1C-F3A0-440B-961E-968F2C77FB2A}"/>
+          </ac:spMkLst>
+        </pc:spChg>
+        <pc:spChg chg="mod">
+          <ac:chgData name="Jihun Kim" userId="2469e03939fca47a" providerId="LiveId" clId="{0EC0481E-6524-4E60-9AD2-E07F55D3906F}" dt="2026-04-09T12:42:57.903" v="4" actId="2711"/>
+          <ac:spMkLst>
+            <pc:docMk/>
+            <pc:sldMk cId="1998851532" sldId="256"/>
+            <ac:spMk id="6" creationId="{63F70F93-076B-4BBC-B933-AC7768BB0AE5}"/>
+          </ac:spMkLst>
+        </pc:spChg>
+        <pc:spChg chg="mod">
+          <ac:chgData name="Jihun Kim" userId="2469e03939fca47a" providerId="LiveId" clId="{0EC0481E-6524-4E60-9AD2-E07F55D3906F}" dt="2026-04-09T12:43:04.015" v="5" actId="2711"/>
+          <ac:spMkLst>
+            <pc:docMk/>
+            <pc:sldMk cId="1998851532" sldId="256"/>
+            <ac:spMk id="7" creationId="{CEB5E8A0-083F-4B6E-AA66-93BFFD6A8E1A}"/>
+          </ac:spMkLst>
+        </pc:spChg>
+      </pc:sldChg>
+      <pc:sldMasterChg chg="modSldLayout">
+        <pc:chgData name="Jihun Kim" userId="2469e03939fca47a" providerId="LiveId" clId="{0EC0481E-6524-4E60-9AD2-E07F55D3906F}" dt="2026-04-09T12:43:38.717" v="9" actId="113"/>
+        <pc:sldMasterMkLst>
+          <pc:docMk/>
+          <pc:sldMasterMk cId="2755485914" sldId="2147483648"/>
+        </pc:sldMasterMkLst>
+        <pc:sldLayoutChg chg="modSp mod">
+          <pc:chgData name="Jihun Kim" userId="2469e03939fca47a" providerId="LiveId" clId="{0EC0481E-6524-4E60-9AD2-E07F55D3906F}" dt="2026-04-09T12:43:38.717" v="9" actId="113"/>
+          <pc:sldLayoutMkLst>
+            <pc:docMk/>
+            <pc:sldMasterMk cId="2755485914" sldId="2147483648"/>
+            <pc:sldLayoutMk cId="3176484067" sldId="2147483650"/>
+          </pc:sldLayoutMkLst>
+          <pc:spChg chg="mod">
+            <ac:chgData name="Jihun Kim" userId="2469e03939fca47a" providerId="LiveId" clId="{0EC0481E-6524-4E60-9AD2-E07F55D3906F}" dt="2026-04-09T12:43:24.420" v="6" actId="2711"/>
+            <ac:spMkLst>
+              <pc:docMk/>
+              <pc:sldMasterMk cId="2755485914" sldId="2147483648"/>
+              <pc:sldLayoutMk cId="3176484067" sldId="2147483650"/>
+              <ac:spMk id="2" creationId="{FE4F955D-C3E9-4033-8442-9095377B0662}"/>
+            </ac:spMkLst>
+          </pc:spChg>
+          <pc:spChg chg="mod">
+            <ac:chgData name="Jihun Kim" userId="2469e03939fca47a" providerId="LiveId" clId="{0EC0481E-6524-4E60-9AD2-E07F55D3906F}" dt="2026-04-09T12:43:38.717" v="9" actId="113"/>
+            <ac:spMkLst>
+              <pc:docMk/>
+              <pc:sldMasterMk cId="2755485914" sldId="2147483648"/>
+              <pc:sldLayoutMk cId="3176484067" sldId="2147483650"/>
+              <ac:spMk id="3" creationId="{9CA482F1-FC12-443E-892A-B48F9C50AA53}"/>
+            </ac:spMkLst>
+          </pc:spChg>
+        </pc:sldLayoutChg>
+      </pc:sldMasterChg>
+    </pc:docChg>
+  </pc:docChgLst>
   <pc:docChgLst>
     <pc:chgData name="janghoon jun" userId="056a5883350c2f5e" providerId="LiveId" clId="{74AFAB52-6487-4651-9B79-2F181DBD8D0A}"/>
     <pc:docChg chg="undo redo custSel addSld delSld modSld sldOrd modSection">
@@ -2397,87 +2478,6 @@
     </pc:docChg>
   </pc:docChgLst>
   <pc:docChgLst>
-    <pc:chgData name="Jihun Kim" userId="2469e03939fca47a" providerId="LiveId" clId="{0EC0481E-6524-4E60-9AD2-E07F55D3906F}"/>
-    <pc:docChg chg="undo custSel modSld modMainMaster">
-      <pc:chgData name="Jihun Kim" userId="2469e03939fca47a" providerId="LiveId" clId="{0EC0481E-6524-4E60-9AD2-E07F55D3906F}" dt="2026-04-09T12:43:38.717" v="9" actId="113"/>
-      <pc:docMkLst>
-        <pc:docMk/>
-      </pc:docMkLst>
-      <pc:sldChg chg="modSp mod">
-        <pc:chgData name="Jihun Kim" userId="2469e03939fca47a" providerId="LiveId" clId="{0EC0481E-6524-4E60-9AD2-E07F55D3906F}" dt="2026-04-09T12:43:04.015" v="5" actId="2711"/>
-        <pc:sldMkLst>
-          <pc:docMk/>
-          <pc:sldMk cId="1998851532" sldId="256"/>
-        </pc:sldMkLst>
-        <pc:spChg chg="mod">
-          <ac:chgData name="Jihun Kim" userId="2469e03939fca47a" providerId="LiveId" clId="{0EC0481E-6524-4E60-9AD2-E07F55D3906F}" dt="2026-04-09T12:41:51.143" v="2" actId="207"/>
-          <ac:spMkLst>
-            <pc:docMk/>
-            <pc:sldMk cId="1998851532" sldId="256"/>
-            <ac:spMk id="4" creationId="{4C14D9A0-1BB9-428F-B273-3CE24758593B}"/>
-          </ac:spMkLst>
-        </pc:spChg>
-        <pc:spChg chg="mod">
-          <ac:chgData name="Jihun Kim" userId="2469e03939fca47a" providerId="LiveId" clId="{0EC0481E-6524-4E60-9AD2-E07F55D3906F}" dt="2026-04-09T12:42:23.172" v="3" actId="2711"/>
-          <ac:spMkLst>
-            <pc:docMk/>
-            <pc:sldMk cId="1998851532" sldId="256"/>
-            <ac:spMk id="5" creationId="{94B21C1C-F3A0-440B-961E-968F2C77FB2A}"/>
-          </ac:spMkLst>
-        </pc:spChg>
-        <pc:spChg chg="mod">
-          <ac:chgData name="Jihun Kim" userId="2469e03939fca47a" providerId="LiveId" clId="{0EC0481E-6524-4E60-9AD2-E07F55D3906F}" dt="2026-04-09T12:42:57.903" v="4" actId="2711"/>
-          <ac:spMkLst>
-            <pc:docMk/>
-            <pc:sldMk cId="1998851532" sldId="256"/>
-            <ac:spMk id="6" creationId="{63F70F93-076B-4BBC-B933-AC7768BB0AE5}"/>
-          </ac:spMkLst>
-        </pc:spChg>
-        <pc:spChg chg="mod">
-          <ac:chgData name="Jihun Kim" userId="2469e03939fca47a" providerId="LiveId" clId="{0EC0481E-6524-4E60-9AD2-E07F55D3906F}" dt="2026-04-09T12:43:04.015" v="5" actId="2711"/>
-          <ac:spMkLst>
-            <pc:docMk/>
-            <pc:sldMk cId="1998851532" sldId="256"/>
-            <ac:spMk id="7" creationId="{CEB5E8A0-083F-4B6E-AA66-93BFFD6A8E1A}"/>
-          </ac:spMkLst>
-        </pc:spChg>
-      </pc:sldChg>
-      <pc:sldMasterChg chg="modSldLayout">
-        <pc:chgData name="Jihun Kim" userId="2469e03939fca47a" providerId="LiveId" clId="{0EC0481E-6524-4E60-9AD2-E07F55D3906F}" dt="2026-04-09T12:43:38.717" v="9" actId="113"/>
-        <pc:sldMasterMkLst>
-          <pc:docMk/>
-          <pc:sldMasterMk cId="2755485914" sldId="2147483648"/>
-        </pc:sldMasterMkLst>
-        <pc:sldLayoutChg chg="modSp mod">
-          <pc:chgData name="Jihun Kim" userId="2469e03939fca47a" providerId="LiveId" clId="{0EC0481E-6524-4E60-9AD2-E07F55D3906F}" dt="2026-04-09T12:43:38.717" v="9" actId="113"/>
-          <pc:sldLayoutMkLst>
-            <pc:docMk/>
-            <pc:sldMasterMk cId="2755485914" sldId="2147483648"/>
-            <pc:sldLayoutMk cId="3176484067" sldId="2147483650"/>
-          </pc:sldLayoutMkLst>
-          <pc:spChg chg="mod">
-            <ac:chgData name="Jihun Kim" userId="2469e03939fca47a" providerId="LiveId" clId="{0EC0481E-6524-4E60-9AD2-E07F55D3906F}" dt="2026-04-09T12:43:24.420" v="6" actId="2711"/>
-            <ac:spMkLst>
-              <pc:docMk/>
-              <pc:sldMasterMk cId="2755485914" sldId="2147483648"/>
-              <pc:sldLayoutMk cId="3176484067" sldId="2147483650"/>
-              <ac:spMk id="2" creationId="{FE4F955D-C3E9-4033-8442-9095377B0662}"/>
-            </ac:spMkLst>
-          </pc:spChg>
-          <pc:spChg chg="mod">
-            <ac:chgData name="Jihun Kim" userId="2469e03939fca47a" providerId="LiveId" clId="{0EC0481E-6524-4E60-9AD2-E07F55D3906F}" dt="2026-04-09T12:43:38.717" v="9" actId="113"/>
-            <ac:spMkLst>
-              <pc:docMk/>
-              <pc:sldMasterMk cId="2755485914" sldId="2147483648"/>
-              <pc:sldLayoutMk cId="3176484067" sldId="2147483650"/>
-              <ac:spMk id="3" creationId="{9CA482F1-FC12-443E-892A-B48F9C50AA53}"/>
-            </ac:spMkLst>
-          </pc:spChg>
-        </pc:sldLayoutChg>
-      </pc:sldMasterChg>
-    </pc:docChg>
-  </pc:docChgLst>
-  <pc:docChgLst>
     <pc:chgData name="janghoon jun" userId="056a5883350c2f5e" providerId="LiveId" clId="{EC358B4E-7CCC-4F9E-86DF-ACF8DD1FCFA2}"/>
     <pc:docChg chg="addSld delSld modSld">
       <pc:chgData name="janghoon jun" userId="056a5883350c2f5e" providerId="LiveId" clId="{EC358B4E-7CCC-4F9E-86DF-ACF8DD1FCFA2}" dt="2026-04-29T10:17:24.925" v="27"/>
@@ -2748,7 +2748,7 @@
           <a:p>
             <a:fld id="{33074436-1BEA-4F09-AD5C-9DF87C96BF5A}" type="datetimeFigureOut">
               <a:rPr lang="ko-KR" altLang="en-US" smtClean="0"/>
-              <a:t>2026-04-30</a:t>
+              <a:t>2026-05-06</a:t>
             </a:fld>
             <a:endParaRPr lang="ko-KR" altLang="en-US"/>
           </a:p>
@@ -10787,7 +10787,7 @@
             <a:p>
               <a:pPr algn="l"/>
               <a:r>
-                <a:rPr sz="1600" b="1" i="0" dirty="0">
+                <a:rPr sz="1600" b="1" i="0">
                   <a:solidFill>
                     <a:srgbClr val="1A355E"/>
                   </a:solidFill>
@@ -10798,7 +10798,7 @@
                 <a:t>1,</a:t>
               </a:r>
               <a:r>
-                <a:rPr lang="en-US" sz="1600" b="1" i="0" dirty="0">
+                <a:rPr lang="en-US" sz="1600" b="1" i="0">
                   <a:solidFill>
                     <a:srgbClr val="1A355E"/>
                   </a:solidFill>
@@ -10806,10 +10806,10 @@
                   <a:ea typeface="KoPub돋움체 Bold" panose="00000800000000000000" pitchFamily="2" charset="-127"/>
                   <a:cs typeface="KoPubWorld돋움체 Medium" panose="00000600000000000000" pitchFamily="2" charset="-127"/>
                 </a:rPr>
-                <a:t>365</a:t>
+                <a:t>373</a:t>
               </a:r>
               <a:r>
-                <a:rPr sz="1600" b="1" i="0" dirty="0">
+                <a:rPr sz="1600" b="1" i="0">
                   <a:solidFill>
                     <a:srgbClr val="1A355E"/>
                   </a:solidFill>
@@ -10819,6 +10819,14 @@
                 </a:rPr>
                 <a:t>명</a:t>
               </a:r>
+              <a:endParaRPr sz="1600" b="1" i="0" dirty="0">
+                <a:solidFill>
+                  <a:srgbClr val="1A355E"/>
+                </a:solidFill>
+                <a:latin typeface="KoPub돋움체 Bold" panose="00000800000000000000" pitchFamily="2" charset="-127"/>
+                <a:ea typeface="KoPub돋움체 Bold" panose="00000800000000000000" pitchFamily="2" charset="-127"/>
+                <a:cs typeface="KoPubWorld돋움체 Medium" panose="00000600000000000000" pitchFamily="2" charset="-127"/>
+              </a:endParaRPr>
             </a:p>
           </p:txBody>
         </p:sp>
